--- a/BS2_проект_5_слайдов.pptx
+++ b/BS2_проект_5_слайдов.pptx
@@ -5130,7 +5130,7 @@
                 </a:solidFill>
                 <a:latin typeface="Arial"/>
               </a:rPr>
-              <a:t>Четыре независимых взгляда на человека сводятся в одну оценку: рецепт — из статьи, обучение — на нашем компьютере</a:t>
+              <a:t>Ролик делится на отрезки по 20 с, каждый проходит весь конвейер; четыре взгляда на человека сводятся в одну оценку</a:t>
             </a:r>
           </a:p>
         </p:txBody>
@@ -5235,7 +5235,7 @@
                 </a:solidFill>
                 <a:latin typeface="Arial"/>
               </a:rPr>
-              <a:t>или отрезок 20 с</a:t>
+              <a:t>весь ролик, отрезками по 20 с</a:t>
             </a:r>
           </a:p>
         </p:txBody>
@@ -5479,7 +5479,7 @@
                 </a:solidFill>
                 <a:latin typeface="Arial"/>
               </a:rPr>
-              <a:t>30 кадров → поиск лица (MediaPipe)</a:t>
+              <a:t>30 кадров каждого отрезка → поиск лица (MediaPipe)</a:t>
             </a:r>
           </a:p>
         </p:txBody>
@@ -6022,7 +6022,7 @@
                 </a:solidFill>
                 <a:latin typeface="Arial"/>
               </a:rPr>
-              <a:t>звуковая дорожка</a:t>
+              <a:t>звуковая дорожка отрезка целиком</a:t>
             </a:r>
           </a:p>
         </p:txBody>
@@ -6565,7 +6565,7 @@
                 </a:solidFill>
                 <a:latin typeface="Arial"/>
               </a:rPr>
-              <a:t>Whisper → транскрипт</a:t>
+              <a:t>Whisper → транскрипт всей речи отрезка</a:t>
             </a:r>
           </a:p>
         </p:txBody>
@@ -7108,7 +7108,7 @@
                 </a:solidFill>
                 <a:latin typeface="Arial"/>
               </a:rPr>
-              <a:t>16 кадров → Qwen-VL пишет описание</a:t>
+              <a:t>16 кадров отрезка → Qwen-VL пишет описание</a:t>
             </a:r>
           </a:p>
         </p:txBody>
@@ -8446,7 +8446,7 @@
                 </a:solidFill>
                 <a:latin typeface="Arial"/>
               </a:rPr>
-              <a:t>Whisper распознаёт речь с метками времени</a:t>
+              <a:t>весь ролик без пропусков; Whisper распознаёт речь с метками времени</a:t>
             </a:r>
           </a:p>
         </p:txBody>
@@ -8616,7 +8616,7 @@
                 </a:solidFill>
                 <a:latin typeface="Arial"/>
               </a:rPr>
-              <a:t>OCEAN-AI (веса для русской или английской речи) + своя модель: основная оценка и второе мнение</a:t>
+              <a:t>OCEAN-AI (лицо 5 кадров в секунду, голос, текст) + своя модель: основная оценка и второе мнение</a:t>
             </a:r>
           </a:p>
         </p:txBody>

--- a/BS2_проект_5_слайдов.pptx
+++ b/BS2_проект_5_слайдов.pptx
@@ -5537,7 +5537,7 @@
             </a:avLst>
           </a:prstGeom>
           <a:solidFill>
-            <a:srgbClr val="E4E4E7"/>
+            <a:srgbClr val="DBEAFE"/>
           </a:solidFill>
           <a:ln>
             <a:noFill/>
@@ -6080,7 +6080,7 @@
             </a:avLst>
           </a:prstGeom>
           <a:solidFill>
-            <a:srgbClr val="E4E4E7"/>
+            <a:srgbClr val="DBEAFE"/>
           </a:solidFill>
           <a:ln>
             <a:noFill/>
@@ -6623,7 +6623,7 @@
             </a:avLst>
           </a:prstGeom>
           <a:solidFill>
-            <a:srgbClr val="E4E4E7"/>
+            <a:srgbClr val="DBEAFE"/>
           </a:solidFill>
           <a:ln>
             <a:noFill/>
@@ -7166,7 +7166,7 @@
             </a:avLst>
           </a:prstGeom>
           <a:solidFill>
-            <a:srgbClr val="E4E4E7"/>
+            <a:srgbClr val="DBEAFE"/>
           </a:solidFill>
           <a:ln>
             <a:noFill/>
@@ -7713,7 +7713,7 @@
             </a:avLst>
           </a:prstGeom>
           <a:solidFill>
-            <a:srgbClr val="E4E4E7"/>
+            <a:srgbClr val="DBEAFE"/>
           </a:solidFill>
           <a:ln>
             <a:noFill/>
@@ -7777,7 +7777,7 @@
                 </a:solidFill>
                 <a:latin typeface="Arial"/>
               </a:rPr>
-              <a:t>серый — готовые веса, не дообучались</a:t>
+              <a:t>голубой — готовые веса, не дообучались</a:t>
             </a:r>
           </a:p>
         </p:txBody>
@@ -12360,7 +12360,7 @@
             <a:r>
               <a:rPr sz="1200" b="0" i="0">
                 <a:solidFill>
-                  <a:srgbClr val="E4E4E7"/>
+                  <a:srgbClr val="DBEAFE"/>
                 </a:solidFill>
                 <a:latin typeface="Arial"/>
               </a:rPr>
@@ -12388,7 +12388,7 @@
             <a:r>
               <a:rPr sz="1200" b="0" i="0">
                 <a:solidFill>
-                  <a:srgbClr val="E4E4E7"/>
+                  <a:srgbClr val="DBEAFE"/>
                 </a:solidFill>
                 <a:latin typeface="Arial"/>
               </a:rPr>
@@ -12416,7 +12416,7 @@
             <a:r>
               <a:rPr sz="1200" b="0" i="0">
                 <a:solidFill>
-                  <a:srgbClr val="E4E4E7"/>
+                  <a:srgbClr val="DBEAFE"/>
                 </a:solidFill>
                 <a:latin typeface="Arial"/>
               </a:rPr>
@@ -12444,7 +12444,7 @@
             <a:r>
               <a:rPr sz="1200" b="0" i="0">
                 <a:solidFill>
-                  <a:srgbClr val="E4E4E7"/>
+                  <a:srgbClr val="DBEAFE"/>
                 </a:solidFill>
                 <a:latin typeface="Arial"/>
               </a:rPr>
@@ -12634,7 +12634,7 @@
             <a:r>
               <a:rPr sz="1200" b="0" i="0">
                 <a:solidFill>
-                  <a:srgbClr val="E4E4E7"/>
+                  <a:srgbClr val="DBEAFE"/>
                 </a:solidFill>
                 <a:latin typeface="Arial"/>
               </a:rPr>
@@ -12662,7 +12662,7 @@
             <a:r>
               <a:rPr sz="1200" b="0" i="0">
                 <a:solidFill>
-                  <a:srgbClr val="E4E4E7"/>
+                  <a:srgbClr val="DBEAFE"/>
                 </a:solidFill>
                 <a:latin typeface="Arial"/>
               </a:rPr>
@@ -12690,7 +12690,7 @@
             <a:r>
               <a:rPr sz="1200" b="0" i="0">
                 <a:solidFill>
-                  <a:srgbClr val="E4E4E7"/>
+                  <a:srgbClr val="DBEAFE"/>
                 </a:solidFill>
                 <a:latin typeface="Arial"/>
               </a:rPr>
@@ -12718,7 +12718,7 @@
             <a:r>
               <a:rPr sz="1200" b="0" i="0">
                 <a:solidFill>
-                  <a:srgbClr val="E4E4E7"/>
+                  <a:srgbClr val="DBEAFE"/>
                 </a:solidFill>
                 <a:latin typeface="Arial"/>
               </a:rPr>
@@ -12908,7 +12908,7 @@
             <a:r>
               <a:rPr sz="1200" b="0" i="0">
                 <a:solidFill>
-                  <a:srgbClr val="E4E4E7"/>
+                  <a:srgbClr val="DBEAFE"/>
                 </a:solidFill>
                 <a:latin typeface="Arial"/>
               </a:rPr>
@@ -12936,7 +12936,7 @@
             <a:r>
               <a:rPr sz="1200" b="0" i="0">
                 <a:solidFill>
-                  <a:srgbClr val="E4E4E7"/>
+                  <a:srgbClr val="DBEAFE"/>
                 </a:solidFill>
                 <a:latin typeface="Arial"/>
               </a:rPr>
@@ -12964,7 +12964,7 @@
             <a:r>
               <a:rPr sz="1200" b="0" i="0">
                 <a:solidFill>
-                  <a:srgbClr val="E4E4E7"/>
+                  <a:srgbClr val="DBEAFE"/>
                 </a:solidFill>
                 <a:latin typeface="Arial"/>
               </a:rPr>
@@ -12992,7 +12992,7 @@
             <a:r>
               <a:rPr sz="1200" b="0" i="0">
                 <a:solidFill>
-                  <a:srgbClr val="E4E4E7"/>
+                  <a:srgbClr val="DBEAFE"/>
                 </a:solidFill>
                 <a:latin typeface="Arial"/>
               </a:rPr>

--- a/BS2_проект_5_слайдов.pptx
+++ b/BS2_проект_5_слайдов.pptx
@@ -128,7 +128,7 @@
                 </a:solidFill>
                 <a:latin typeface="Arial"/>
               </a:rPr>
-              <a:t>Насколько оценка совпадает с мнением людей (CCC, чем ближе к 1, тем лучше)</a:t>
+              <a:t>Насколько оценка совпадает с мнением людей* (CCC, чем ближе к 1, тем лучше)</a:t>
             </a:r>
           </a:p>
         </c:rich>
@@ -197,7 +197,7 @@
 (готовые веса)</c:v>
                 </c:pt>
                 <c:pt idx="1">
-                  <c:v>Своя модель</c:v>
+                  <c:v>Моя модель</c:v>
                 </c:pt>
                 <c:pt idx="2">
                   <c:v>Ансамбль двух
@@ -3388,7 +3388,7 @@
                 </a:solidFill>
                 <a:latin typeface="Arial"/>
               </a:rPr>
-              <a:t>С чего начали и что нашли</a:t>
+              <a:t>С чего я начал и что нашёл</a:t>
             </a:r>
           </a:p>
         </p:txBody>
@@ -3430,7 +3430,7 @@
                 </a:solidFill>
                 <a:latin typeface="Arial"/>
               </a:rPr>
-              <a:t>Задача: локальная программа «видео на входе → оценка Big Five и поведения на выходе», всё считается на одном компьютере</a:t>
+              <a:t>Моя задача: локальная программа «видео на входе → оценка Big Five и поведения на выходе». Разработка — в Claude Code (модель Fable 5.1, режим Ultracode)</a:t>
             </a:r>
           </a:p>
         </p:txBody>
@@ -3545,14 +3545,14 @@
           <a:p>
             <a:pPr algn="l">
               <a:lnSpc>
-                <a:spcPct val="115000"/>
-              </a:lnSpc>
-              <a:spcAft>
-                <a:spcPts val="1000"/>
-              </a:spcAft>
-            </a:pPr>
-            <a:r>
-              <a:rPr sz="1250" b="1" i="0">
+                <a:spcPct val="112000"/>
+              </a:lnSpc>
+              <a:spcAft>
+                <a:spcPts val="800"/>
+              </a:spcAft>
+            </a:pPr>
+            <a:r>
+              <a:rPr sz="1200" b="1" i="0">
                 <a:solidFill>
                   <a:srgbClr val="27272A"/>
                 </a:solidFill>
@@ -3561,7 +3561,7 @@
               <a:t>MM-PSYCHE</a:t>
             </a:r>
             <a:r>
-              <a:rPr sz="1250" b="0" i="0">
+              <a:rPr sz="1200" b="0" i="0">
                 <a:solidFill>
                   <a:srgbClr val="27272A"/>
                 </a:solidFill>
@@ -3573,14 +3573,14 @@
           <a:p>
             <a:pPr algn="l">
               <a:lnSpc>
-                <a:spcPct val="115000"/>
-              </a:lnSpc>
-              <a:spcAft>
-                <a:spcPts val="1000"/>
-              </a:spcAft>
-            </a:pPr>
-            <a:r>
-              <a:rPr sz="1250" b="1" i="0">
+                <a:spcPct val="112000"/>
+              </a:lnSpc>
+              <a:spcAft>
+                <a:spcPts val="800"/>
+              </a:spcAft>
+            </a:pPr>
+            <a:r>
+              <a:rPr sz="1200" b="1" i="0">
                 <a:solidFill>
                   <a:srgbClr val="27272A"/>
                 </a:solidFill>
@@ -3589,7 +3589,7 @@
               <a:t>Что было открыто: </a:t>
             </a:r>
             <a:r>
-              <a:rPr sz="1250" b="0" i="0">
+              <a:rPr sz="1200" b="0" i="0">
                 <a:solidFill>
                   <a:srgbClr val="27272A"/>
                 </a:solidFill>
@@ -3601,14 +3601,14 @@
           <a:p>
             <a:pPr algn="l">
               <a:lnSpc>
-                <a:spcPct val="115000"/>
-              </a:lnSpc>
-              <a:spcAft>
-                <a:spcPts val="1000"/>
-              </a:spcAft>
-            </a:pPr>
-            <a:r>
-              <a:rPr sz="1250" b="1" i="0">
+                <a:spcPct val="112000"/>
+              </a:lnSpc>
+              <a:spcAft>
+                <a:spcPts val="800"/>
+              </a:spcAft>
+            </a:pPr>
+            <a:r>
+              <a:rPr sz="1200" b="1" i="0">
                 <a:solidFill>
                   <a:srgbClr val="27272A"/>
                 </a:solidFill>
@@ -3617,7 +3617,7 @@
               <a:t>Чего не было: </a:t>
             </a:r>
             <a:r>
-              <a:rPr sz="1250" b="0" i="0">
+              <a:rPr sz="1200" b="0" i="0">
                 <a:solidFill>
                   <a:srgbClr val="27272A"/>
                 </a:solidFill>
@@ -3629,23 +3629,23 @@
           <a:p>
             <a:pPr algn="l">
               <a:lnSpc>
-                <a:spcPct val="115000"/>
-              </a:lnSpc>
-              <a:spcAft>
-                <a:spcPts val="1000"/>
-              </a:spcAft>
-            </a:pPr>
-            <a:r>
-              <a:rPr sz="1250" b="1" i="0">
+                <a:spcPct val="112000"/>
+              </a:lnSpc>
+              <a:spcAft>
+                <a:spcPts val="800"/>
+              </a:spcAft>
+            </a:pPr>
+            <a:r>
+              <a:rPr sz="1200" b="1" i="0">
                 <a:solidFill>
                   <a:srgbClr val="C2410C"/>
                 </a:solidFill>
                 <a:latin typeface="Arial"/>
               </a:rPr>
-              <a:t>Решение: </a:t>
-            </a:r>
-            <a:r>
-              <a:rPr sz="1250" b="0" i="0">
+              <a:t>Моё решение: </a:t>
+            </a:r>
+            <a:r>
+              <a:rPr sz="1200" b="0" i="0">
                 <a:solidFill>
                   <a:srgbClr val="27272A"/>
                 </a:solidFill>
@@ -3664,8 +3664,8 @@
         </p:nvSpPr>
         <p:spPr>
           <a:xfrm>
-            <a:off x="5029200" y="1600200"/>
-            <a:ext cx="6583680" cy="365760"/>
+            <a:off x="777240" y="5303520"/>
+            <a:ext cx="3657600" cy="365760"/>
           </a:xfrm>
           <a:prstGeom prst="rect">
             <a:avLst/>
@@ -3687,20 +3687,101 @@
               </a:spcAft>
             </a:pPr>
             <a:r>
+              <a:rPr sz="950" b="1" i="0">
+                <a:solidFill>
+                  <a:srgbClr val="52525B"/>
+                </a:solidFill>
+                <a:latin typeface="Arial"/>
+              </a:rPr>
+              <a:t>Статья: </a:t>
+            </a:r>
+            <a:r>
+              <a:rPr sz="950" u="sng">
+                <a:solidFill>
+                  <a:srgbClr val="C2410C"/>
+                </a:solidFill>
+                <a:latin typeface="Arial"/>
+                <a:hlinkClick r:id="rId2"/>
+              </a:rPr>
+              <a:t>doi.org/10.1109/ACCESS.2026.3723020</a:t>
+            </a:r>
+          </a:p>
+          <a:p>
+            <a:pPr algn="l">
+              <a:lnSpc>
+                <a:spcPct val="110000"/>
+              </a:lnSpc>
+              <a:spcAft>
+                <a:spcPts val="0"/>
+              </a:spcAft>
+            </a:pPr>
+            <a:r>
+              <a:rPr sz="950" b="1" i="0">
+                <a:solidFill>
+                  <a:srgbClr val="52525B"/>
+                </a:solidFill>
+                <a:latin typeface="Arial"/>
+              </a:rPr>
+              <a:t>Код: </a:t>
+            </a:r>
+            <a:r>
+              <a:rPr sz="950" u="sng">
+                <a:solidFill>
+                  <a:srgbClr val="C2410C"/>
+                </a:solidFill>
+                <a:latin typeface="Arial"/>
+                <a:hlinkClick r:id="rId3"/>
+              </a:rPr>
+              <a:t>github.com/LEYA-HSE/MM-PSYCHE</a:t>
+            </a:r>
+          </a:p>
+        </p:txBody>
+      </p:sp>
+      <p:sp>
+        <p:nvSpPr>
+          <p:cNvPr id="8" name="TextBox 7"/>
+          <p:cNvSpPr txBox="1"/>
+          <p:nvPr/>
+        </p:nvSpPr>
+        <p:spPr>
+          <a:xfrm>
+            <a:off x="5029200" y="1600200"/>
+            <a:ext cx="6583680" cy="365760"/>
+          </a:xfrm>
+          <a:prstGeom prst="rect">
+            <a:avLst/>
+          </a:prstGeom>
+          <a:noFill/>
+        </p:spPr>
+        <p:txBody>
+          <a:bodyPr wrap="square" anchor="t" lIns="0" rIns="0" tIns="0" bIns="0">
+            <a:spAutoFit/>
+          </a:bodyPr>
+          <a:lstStyle/>
+          <a:p>
+            <a:pPr algn="l">
+              <a:lnSpc>
+                <a:spcPct val="110000"/>
+              </a:lnSpc>
+              <a:spcAft>
+                <a:spcPts val="0"/>
+              </a:spcAft>
+            </a:pPr>
+            <a:r>
               <a:rPr sz="1500" b="1" i="0">
                 <a:solidFill>
                   <a:srgbClr val="27272A"/>
                 </a:solidFill>
                 <a:latin typeface="Arial"/>
               </a:rPr>
-              <a:t>Что нашли и проверили</a:t>
-            </a:r>
-          </a:p>
-        </p:txBody>
-      </p:sp>
-      <p:sp>
-        <p:nvSpPr>
-          <p:cNvPr id="8" name="Rounded Rectangle 7"/>
+              <a:t>Что я нашёл и проверил</a:t>
+            </a:r>
+          </a:p>
+        </p:txBody>
+      </p:sp>
+      <p:sp>
+        <p:nvSpPr>
+          <p:cNvPr id="9" name="Rounded Rectangle 8"/>
           <p:cNvSpPr/>
           <p:nvPr/>
         </p:nvSpPr>
@@ -3744,7 +3825,7 @@
       </p:sp>
       <p:sp>
         <p:nvSpPr>
-          <p:cNvPr id="9" name="Oval 8"/>
+          <p:cNvPr id="10" name="Oval 9"/>
           <p:cNvSpPr/>
           <p:nvPr/>
         </p:nvSpPr>
@@ -3797,7 +3878,7 @@
       </p:sp>
       <p:sp>
         <p:nvSpPr>
-          <p:cNvPr id="10" name="TextBox 9"/>
+          <p:cNvPr id="11" name="TextBox 10"/>
           <p:cNvSpPr txBox="1"/>
           <p:nvPr/>
         </p:nvSpPr>
@@ -3839,7 +3920,7 @@
       </p:sp>
       <p:sp>
         <p:nvSpPr>
-          <p:cNvPr id="11" name="TextBox 10"/>
+          <p:cNvPr id="12" name="TextBox 11"/>
           <p:cNvSpPr txBox="1"/>
           <p:nvPr/>
         </p:nvSpPr>
@@ -3874,14 +3955,14 @@
                 </a:solidFill>
                 <a:latin typeface="Arial"/>
               </a:rPr>
-              <a:t>10 000 роликов по 15 с из англоязычных видеоблогов с разметкой пяти черт и метки «пригласить на собеседование». Открытое зеркало, 29 ГБ, скачано и проверено полностью.</a:t>
-            </a:r>
-          </a:p>
-        </p:txBody>
-      </p:sp>
-      <p:sp>
-        <p:nvSpPr>
-          <p:cNvPr id="12" name="Rounded Rectangle 11"/>
+              <a:t>10 000 роликов по 15 с из англоязычных видеоблогов с разметкой пяти черт и метки «пригласить на собеседование». Открытое зеркало, 29 ГБ — скачал и проверил полностью.</a:t>
+            </a:r>
+          </a:p>
+        </p:txBody>
+      </p:sp>
+      <p:sp>
+        <p:nvSpPr>
+          <p:cNvPr id="13" name="Rounded Rectangle 12"/>
           <p:cNvSpPr/>
           <p:nvPr/>
         </p:nvSpPr>
@@ -3925,7 +4006,7 @@
       </p:sp>
       <p:sp>
         <p:nvSpPr>
-          <p:cNvPr id="13" name="Oval 12"/>
+          <p:cNvPr id="14" name="Oval 13"/>
           <p:cNvSpPr/>
           <p:nvPr/>
         </p:nvSpPr>
@@ -3978,7 +4059,7 @@
       </p:sp>
       <p:sp>
         <p:nvSpPr>
-          <p:cNvPr id="14" name="TextBox 13"/>
+          <p:cNvPr id="15" name="TextBox 14"/>
           <p:cNvSpPr txBox="1"/>
           <p:nvPr/>
         </p:nvSpPr>
@@ -4020,7 +4101,7 @@
       </p:sp>
       <p:sp>
         <p:nvSpPr>
-          <p:cNvPr id="15" name="TextBox 14"/>
+          <p:cNvPr id="16" name="TextBox 15"/>
           <p:cNvSpPr txBox="1"/>
           <p:nvPr/>
         </p:nvSpPr>
@@ -4062,7 +4143,7 @@
       </p:sp>
       <p:sp>
         <p:nvSpPr>
-          <p:cNvPr id="16" name="Rounded Rectangle 15"/>
+          <p:cNvPr id="17" name="Rounded Rectangle 16"/>
           <p:cNvSpPr/>
           <p:nvPr/>
         </p:nvSpPr>
@@ -4106,7 +4187,7 @@
       </p:sp>
       <p:sp>
         <p:nvSpPr>
-          <p:cNvPr id="17" name="Oval 16"/>
+          <p:cNvPr id="18" name="Oval 17"/>
           <p:cNvSpPr/>
           <p:nvPr/>
         </p:nvSpPr>
@@ -4159,7 +4240,7 @@
       </p:sp>
       <p:sp>
         <p:nvSpPr>
-          <p:cNvPr id="18" name="TextBox 17"/>
+          <p:cNvPr id="19" name="TextBox 18"/>
           <p:cNvSpPr txBox="1"/>
           <p:nvPr/>
         </p:nvSpPr>
@@ -4201,7 +4282,7 @@
       </p:sp>
       <p:sp>
         <p:nvSpPr>
-          <p:cNvPr id="19" name="TextBox 18"/>
+          <p:cNvPr id="20" name="TextBox 19"/>
           <p:cNvSpPr txBox="1"/>
           <p:nvPr/>
         </p:nvSpPr>
@@ -4236,14 +4317,14 @@
                 </a:solidFill>
                 <a:latin typeface="Arial"/>
               </a:rPr>
-              <a:t>Готовые модели, которые мы не дообучали: CLIP — лицо, CLAP — голос, EmoRoBERTa — текст, Whisper — речь в текст, Qwen-VL — описание поведения по кадрам.</a:t>
-            </a:r>
-          </a:p>
-        </p:txBody>
-      </p:sp>
-      <p:sp>
-        <p:nvSpPr>
-          <p:cNvPr id="20" name="Rounded Rectangle 19"/>
+              <a:t>Готовые модели, которые я не дообучал: CLIP — лицо, CLAP — голос, EmoRoBERTa — текст, Whisper — речь в текст, Qwen-VL — описание поведения по кадрам.</a:t>
+            </a:r>
+          </a:p>
+        </p:txBody>
+      </p:sp>
+      <p:sp>
+        <p:nvSpPr>
+          <p:cNvPr id="21" name="Rounded Rectangle 20"/>
           <p:cNvSpPr/>
           <p:nvPr/>
         </p:nvSpPr>
@@ -4287,7 +4368,7 @@
       </p:sp>
       <p:sp>
         <p:nvSpPr>
-          <p:cNvPr id="21" name="Oval 20"/>
+          <p:cNvPr id="22" name="Oval 21"/>
           <p:cNvSpPr/>
           <p:nvPr/>
         </p:nvSpPr>
@@ -4340,7 +4421,7 @@
       </p:sp>
       <p:sp>
         <p:nvSpPr>
-          <p:cNvPr id="22" name="TextBox 21"/>
+          <p:cNvPr id="23" name="TextBox 22"/>
           <p:cNvSpPr txBox="1"/>
           <p:nvPr/>
         </p:nvSpPr>
@@ -4382,7 +4463,7 @@
       </p:sp>
       <p:sp>
         <p:nvSpPr>
-          <p:cNvPr id="23" name="TextBox 22"/>
+          <p:cNvPr id="24" name="TextBox 23"/>
           <p:cNvSpPr txBox="1"/>
           <p:nvPr/>
         </p:nvSpPr>
@@ -4417,14 +4498,14 @@
                 </a:solidFill>
                 <a:latin typeface="Arial"/>
               </a:rPr>
-              <a:t>Пять модальностей, но веса лица и тела авторы не опубликовали. Использован как ориентир по точности, не как основа.</a:t>
+              <a:t>Пять модальностей, но веса лица и тела авторы не опубликовали. Взял как ориентир по точности, не как основу.</a:t>
             </a:r>
           </a:p>
         </p:txBody>
       </p:sp>
       <p:cxnSp>
         <p:nvCxnSpPr>
-          <p:cNvPr id="24" name="Connector 23"/>
+          <p:cNvPr id="25" name="Connector 24"/>
           <p:cNvCxnSpPr/>
           <p:nvPr/>
         </p:nvCxnSpPr>
@@ -4460,13 +4541,13 @@
       </p:cxnSp>
       <p:sp>
         <p:nvSpPr>
-          <p:cNvPr id="25" name="Oval 24"/>
+          <p:cNvPr id="26" name="Oval 25"/>
           <p:cNvSpPr/>
           <p:nvPr/>
         </p:nvSpPr>
         <p:spPr>
           <a:xfrm>
-            <a:off x="1005839" y="5815584"/>
+            <a:off x="960120" y="5815584"/>
             <a:ext cx="164592" cy="164592"/>
           </a:xfrm>
           <a:prstGeom prst="ellipse">
@@ -4504,14 +4585,14 @@
       </p:sp>
       <p:sp>
         <p:nvSpPr>
-          <p:cNvPr id="26" name="TextBox 25"/>
+          <p:cNvPr id="27" name="TextBox 26"/>
           <p:cNvSpPr txBox="1"/>
           <p:nvPr/>
         </p:nvSpPr>
         <p:spPr>
           <a:xfrm>
-            <a:off x="0" y="6035040"/>
-            <a:ext cx="2194560" cy="502920"/>
+            <a:off x="45720" y="6035040"/>
+            <a:ext cx="2011680" cy="502920"/>
           </a:xfrm>
           <a:prstGeom prst="rect">
             <a:avLst/>
@@ -4539,7 +4620,7 @@
                 </a:solidFill>
                 <a:latin typeface="Arial"/>
               </a:rPr>
-              <a:t>14 сентября</a:t>
+              <a:t>11 сентября</a:t>
             </a:r>
           </a:p>
           <a:p>
@@ -4558,20 +4639,20 @@
                 </a:solidFill>
                 <a:latin typeface="Arial"/>
               </a:rPr>
-              <a:t>статья, техническое задание</a:t>
-            </a:r>
-          </a:p>
-        </p:txBody>
-      </p:sp>
-      <p:sp>
-        <p:nvSpPr>
-          <p:cNvPr id="27" name="Oval 26"/>
+              <a:t>нашёл статью, изучил её и код</a:t>
+            </a:r>
+          </a:p>
+        </p:txBody>
+      </p:sp>
+      <p:sp>
+        <p:nvSpPr>
+          <p:cNvPr id="28" name="Oval 27"/>
           <p:cNvSpPr/>
           <p:nvPr/>
         </p:nvSpPr>
         <p:spPr>
           <a:xfrm>
-            <a:off x="3474720" y="5815584"/>
+            <a:off x="2971800" y="5815584"/>
             <a:ext cx="164592" cy="164592"/>
           </a:xfrm>
           <a:prstGeom prst="ellipse">
@@ -4609,14 +4690,14 @@
       </p:sp>
       <p:sp>
         <p:nvSpPr>
-          <p:cNvPr id="28" name="TextBox 27"/>
+          <p:cNvPr id="29" name="TextBox 28"/>
           <p:cNvSpPr txBox="1"/>
           <p:nvPr/>
         </p:nvSpPr>
         <p:spPr>
           <a:xfrm>
-            <a:off x="2468880" y="6035040"/>
-            <a:ext cx="2194560" cy="502920"/>
+            <a:off x="2057400" y="6035040"/>
+            <a:ext cx="2011680" cy="502920"/>
           </a:xfrm>
           <a:prstGeom prst="rect">
             <a:avLst/>
@@ -4644,7 +4725,7 @@
                 </a:solidFill>
                 <a:latin typeface="Arial"/>
               </a:rPr>
-              <a:t>14–15 сентября</a:t>
+              <a:t>14 сентября</a:t>
             </a:r>
           </a:p>
           <a:p>
@@ -4663,20 +4744,20 @@
                 </a:solidFill>
                 <a:latin typeface="Arial"/>
               </a:rPr>
-              <a:t>готовые веса, первый конвейер</a:t>
-            </a:r>
-          </a:p>
-        </p:txBody>
-      </p:sp>
-      <p:sp>
-        <p:nvSpPr>
-          <p:cNvPr id="29" name="Oval 28"/>
+              <a:t>техническое задание</a:t>
+            </a:r>
+          </a:p>
+        </p:txBody>
+      </p:sp>
+      <p:sp>
+        <p:nvSpPr>
+          <p:cNvPr id="30" name="Oval 29"/>
           <p:cNvSpPr/>
           <p:nvPr/>
         </p:nvSpPr>
         <p:spPr>
           <a:xfrm>
-            <a:off x="5943600" y="5815584"/>
+            <a:off x="4983480" y="5815584"/>
             <a:ext cx="164592" cy="164592"/>
           </a:xfrm>
           <a:prstGeom prst="ellipse">
@@ -4714,14 +4795,14 @@
       </p:sp>
       <p:sp>
         <p:nvSpPr>
-          <p:cNvPr id="30" name="TextBox 29"/>
+          <p:cNvPr id="31" name="TextBox 30"/>
           <p:cNvSpPr txBox="1"/>
           <p:nvPr/>
         </p:nvSpPr>
         <p:spPr>
           <a:xfrm>
-            <a:off x="4937760" y="6035040"/>
-            <a:ext cx="2194560" cy="502920"/>
+            <a:off x="4069080" y="6035040"/>
+            <a:ext cx="2011680" cy="502920"/>
           </a:xfrm>
           <a:prstGeom prst="rect">
             <a:avLst/>
@@ -4749,7 +4830,7 @@
                 </a:solidFill>
                 <a:latin typeface="Arial"/>
               </a:rPr>
-              <a:t>15 сентября</a:t>
+              <a:t>14–15 сентября</a:t>
             </a:r>
           </a:p>
           <a:p>
@@ -4768,20 +4849,20 @@
                 </a:solidFill>
                 <a:latin typeface="Arial"/>
               </a:rPr>
-              <a:t>своя модель и ансамбль</a:t>
-            </a:r>
-          </a:p>
-        </p:txBody>
-      </p:sp>
-      <p:sp>
-        <p:nvSpPr>
-          <p:cNvPr id="31" name="Oval 30"/>
+              <a:t>готовые веса, первый конвейер</a:t>
+            </a:r>
+          </a:p>
+        </p:txBody>
+      </p:sp>
+      <p:sp>
+        <p:nvSpPr>
+          <p:cNvPr id="32" name="Oval 31"/>
           <p:cNvSpPr/>
           <p:nvPr/>
         </p:nvSpPr>
         <p:spPr>
           <a:xfrm>
-            <a:off x="8412480" y="5815584"/>
+            <a:off x="6995160" y="5815584"/>
             <a:ext cx="164592" cy="164592"/>
           </a:xfrm>
           <a:prstGeom prst="ellipse">
@@ -4819,14 +4900,14 @@
       </p:sp>
       <p:sp>
         <p:nvSpPr>
-          <p:cNvPr id="32" name="TextBox 31"/>
+          <p:cNvPr id="33" name="TextBox 32"/>
           <p:cNvSpPr txBox="1"/>
           <p:nvPr/>
         </p:nvSpPr>
         <p:spPr>
           <a:xfrm>
-            <a:off x="7406640" y="6035040"/>
-            <a:ext cx="2194560" cy="502920"/>
+            <a:off x="6080760" y="6035040"/>
+            <a:ext cx="2011680" cy="502920"/>
           </a:xfrm>
           <a:prstGeom prst="rect">
             <a:avLst/>
@@ -4854,7 +4935,7 @@
                 </a:solidFill>
                 <a:latin typeface="Arial"/>
               </a:rPr>
-              <a:t>15–16 сентября</a:t>
+              <a:t>15 сентября</a:t>
             </a:r>
           </a:p>
           <a:p>
@@ -4873,20 +4954,20 @@
                 </a:solidFill>
                 <a:latin typeface="Arial"/>
               </a:rPr>
-              <a:t>русские ролики, страница, PDF</a:t>
-            </a:r>
-          </a:p>
-        </p:txBody>
-      </p:sp>
-      <p:sp>
-        <p:nvSpPr>
-          <p:cNvPr id="33" name="Oval 32"/>
+              <a:t>моя модель и ансамбль</a:t>
+            </a:r>
+          </a:p>
+        </p:txBody>
+      </p:sp>
+      <p:sp>
+        <p:nvSpPr>
+          <p:cNvPr id="34" name="Oval 33"/>
           <p:cNvSpPr/>
           <p:nvPr/>
         </p:nvSpPr>
         <p:spPr>
           <a:xfrm>
-            <a:off x="10881360" y="5815584"/>
+            <a:off x="9006840" y="5815584"/>
             <a:ext cx="164592" cy="164592"/>
           </a:xfrm>
           <a:prstGeom prst="ellipse">
@@ -4924,14 +5005,14 @@
       </p:sp>
       <p:sp>
         <p:nvSpPr>
-          <p:cNvPr id="34" name="TextBox 33"/>
+          <p:cNvPr id="35" name="TextBox 34"/>
           <p:cNvSpPr txBox="1"/>
           <p:nvPr/>
         </p:nvSpPr>
         <p:spPr>
           <a:xfrm>
-            <a:off x="9875520" y="6035040"/>
-            <a:ext cx="2194560" cy="502920"/>
+            <a:off x="8092440" y="6035040"/>
+            <a:ext cx="2011680" cy="502920"/>
           </a:xfrm>
           <a:prstGeom prst="rect">
             <a:avLst/>
@@ -4959,7 +5040,7 @@
                 </a:solidFill>
                 <a:latin typeface="Arial"/>
               </a:rPr>
-              <a:t>16–20 сентября</a:t>
+              <a:t>15–16 сентября</a:t>
             </a:r>
           </a:p>
           <a:p>
@@ -4978,21 +5059,65 @@
                 </a:solidFill>
                 <a:latin typeface="Arial"/>
               </a:rPr>
-              <a:t>эмоции, голос, мимика, речь</a:t>
-            </a:r>
-          </a:p>
-        </p:txBody>
-      </p:sp>
-      <p:sp>
-        <p:nvSpPr>
-          <p:cNvPr id="35" name="TextBox 34"/>
+              <a:t>русские ролики, страница, PDF</a:t>
+            </a:r>
+          </a:p>
+        </p:txBody>
+      </p:sp>
+      <p:sp>
+        <p:nvSpPr>
+          <p:cNvPr id="36" name="Oval 35"/>
+          <p:cNvSpPr/>
+          <p:nvPr/>
+        </p:nvSpPr>
+        <p:spPr>
+          <a:xfrm>
+            <a:off x="11018519" y="5815584"/>
+            <a:ext cx="164592" cy="164592"/>
+          </a:xfrm>
+          <a:prstGeom prst="ellipse">
+            <a:avLst/>
+          </a:prstGeom>
+          <a:solidFill>
+            <a:srgbClr val="C2410C"/>
+          </a:solidFill>
+          <a:ln>
+            <a:noFill/>
+          </a:ln>
+          <a:effectLst/>
+        </p:spPr>
+        <p:style>
+          <a:lnRef idx="1">
+            <a:schemeClr val="accent1"/>
+          </a:lnRef>
+          <a:fillRef idx="3">
+            <a:schemeClr val="accent1"/>
+          </a:fillRef>
+          <a:effectRef idx="2">
+            <a:schemeClr val="accent1"/>
+          </a:effectRef>
+          <a:fontRef idx="minor">
+            <a:schemeClr val="lt1"/>
+          </a:fontRef>
+        </p:style>
+        <p:txBody>
+          <a:bodyPr rtlCol="0" anchor="ctr"/>
+          <a:lstStyle/>
+          <a:p>
+            <a:pPr algn="ctr"/>
+          </a:p>
+        </p:txBody>
+      </p:sp>
+      <p:sp>
+        <p:nvSpPr>
+          <p:cNvPr id="37" name="TextBox 36"/>
           <p:cNvSpPr txBox="1"/>
           <p:nvPr/>
         </p:nvSpPr>
         <p:spPr>
           <a:xfrm>
-            <a:off x="548640" y="6446520"/>
-            <a:ext cx="7315200" cy="274320"/>
+            <a:off x="10104119" y="6035040"/>
+            <a:ext cx="2011680" cy="502920"/>
           </a:xfrm>
           <a:prstGeom prst="rect">
             <a:avLst/>
@@ -5005,6 +5130,67 @@
           </a:bodyPr>
           <a:lstStyle/>
           <a:p>
+            <a:pPr algn="ctr">
+              <a:lnSpc>
+                <a:spcPct val="100000"/>
+              </a:lnSpc>
+              <a:spcAft>
+                <a:spcPts val="0"/>
+              </a:spcAft>
+            </a:pPr>
+            <a:r>
+              <a:rPr sz="1000" b="1" i="0">
+                <a:solidFill>
+                  <a:srgbClr val="27272A"/>
+                </a:solidFill>
+                <a:latin typeface="Arial"/>
+              </a:rPr>
+              <a:t>16–20 сентября</a:t>
+            </a:r>
+          </a:p>
+          <a:p>
+            <a:pPr algn="ctr">
+              <a:lnSpc>
+                <a:spcPct val="100000"/>
+              </a:lnSpc>
+              <a:spcAft>
+                <a:spcPts val="0"/>
+              </a:spcAft>
+            </a:pPr>
+            <a:r>
+              <a:rPr sz="950" b="0" i="0">
+                <a:solidFill>
+                  <a:srgbClr val="52525B"/>
+                </a:solidFill>
+                <a:latin typeface="Arial"/>
+              </a:rPr>
+              <a:t>эмоции, голос, мимика, речь</a:t>
+            </a:r>
+          </a:p>
+        </p:txBody>
+      </p:sp>
+      <p:sp>
+        <p:nvSpPr>
+          <p:cNvPr id="38" name="TextBox 37"/>
+          <p:cNvSpPr txBox="1"/>
+          <p:nvPr/>
+        </p:nvSpPr>
+        <p:spPr>
+          <a:xfrm>
+            <a:off x="548640" y="6446520"/>
+            <a:ext cx="8686800" cy="274320"/>
+          </a:xfrm>
+          <a:prstGeom prst="rect">
+            <a:avLst/>
+          </a:prstGeom>
+          <a:noFill/>
+        </p:spPr>
+        <p:txBody>
+          <a:bodyPr wrap="square" anchor="t" lIns="0" rIns="0" tIns="0" bIns="0">
+            <a:spAutoFit/>
+          </a:bodyPr>
+          <a:lstStyle/>
+          <a:p>
             <a:pPr algn="l">
               <a:lnSpc>
                 <a:spcPct val="110000"/>
@@ -5020,7 +5206,7 @@
                 </a:solidFill>
                 <a:latin typeface="Arial"/>
               </a:rPr>
-              <a:t>BS 2.0 · анализ человека по видео · © 2026 AMLAI</a:t>
+              <a:t>BS 2.0 · анализ человека по видео · сделано в Claude Code, модель Fable 5.1, режим Ultracode · © 2026 AMLAI</a:t>
             </a:r>
           </a:p>
         </p:txBody>
@@ -5088,7 +5274,7 @@
                 </a:solidFill>
                 <a:latin typeface="Arial"/>
               </a:rPr>
-              <a:t>Своя модель: что взяли готовым и что обучили сами</a:t>
+              <a:t>Моя модель: что взял готовым и что обучил сам</a:t>
             </a:r>
           </a:p>
         </p:txBody>
@@ -7512,7 +7698,7 @@
                 </a:solidFill>
                 <a:latin typeface="Arial"/>
               </a:rPr>
-              <a:t>обучили мы</a:t>
+              <a:t>обучил я</a:t>
             </a:r>
           </a:p>
           <a:p>
@@ -7951,7 +8137,7 @@
                 </a:solidFill>
                 <a:latin typeface="Arial"/>
               </a:rPr>
-              <a:t>оранжевый — обучено нами</a:t>
+              <a:t>оранжевый — обучил я</a:t>
             </a:r>
           </a:p>
         </p:txBody>
@@ -7993,7 +8179,7 @@
                 </a:solidFill>
                 <a:latin typeface="Arial"/>
               </a:rPr>
-              <a:t>Обучение: </a:t>
+              <a:t>Как обучал: </a:t>
             </a:r>
             <a:r>
               <a:rPr sz="1050" b="0" i="0">
@@ -8002,7 +8188,7 @@
                 </a:solidFill>
                 <a:latin typeface="Arial"/>
               </a:rPr>
-              <a:t>6000 роликов First Impressions V2, пять запусков и усреднение; </a:t>
+              <a:t>на 6000 роликах First Impressions V2, пять запусков и усреднение; </a:t>
             </a:r>
             <a:r>
               <a:rPr sz="1050" b="1" i="0">
@@ -8048,7 +8234,7 @@
                 </a:solidFill>
                 <a:latin typeface="Arial"/>
               </a:rPr>
-              <a:t>обучить собственные кодировщики лица, голоса и текста можно, но для этого нужны десятки тысяч размеченных роликов. Открытых размеченных данных хватает только на слияние — его мы и обучили.</a:t>
+              <a:t>обучить собственные кодировщики лица, голоса и текста можно, но для этого нужны десятки тысяч размеченных роликов. Открытых размеченных данных хватает только на слияние — его я и обучил.</a:t>
             </a:r>
           </a:p>
         </p:txBody>
@@ -8062,7 +8248,7 @@
         <p:spPr>
           <a:xfrm>
             <a:off x="548640" y="6446520"/>
-            <a:ext cx="7315200" cy="274320"/>
+            <a:ext cx="8686800" cy="274320"/>
           </a:xfrm>
           <a:prstGeom prst="rect">
             <a:avLst/>
@@ -8090,7 +8276,7 @@
                 </a:solidFill>
                 <a:latin typeface="Arial"/>
               </a:rPr>
-              <a:t>BS 2.0 · анализ человека по видео · © 2026 AMLAI</a:t>
+              <a:t>BS 2.0 · анализ человека по видео · сделано в Claude Code, модель Fable 5.1, режим Ultracode · © 2026 AMLAI</a:t>
             </a:r>
           </a:p>
         </p:txBody>
@@ -8460,11 +8646,11 @@
         <p:spPr>
           <a:xfrm>
             <a:off x="4434840" y="1554480"/>
-            <a:ext cx="3566160" cy="749808"/>
+            <a:ext cx="3566160" cy="713232"/>
           </a:xfrm>
           <a:prstGeom prst="roundRect">
             <a:avLst>
-              <a:gd name="adj" fmla="val 9756"/>
+              <a:gd name="adj" fmla="val 10256"/>
             </a:avLst>
           </a:prstGeom>
           <a:solidFill>
@@ -8588,7 +8774,7 @@
         <p:spPr>
           <a:xfrm>
             <a:off x="4581144" y="1883664"/>
-            <a:ext cx="3291840" cy="384047"/>
+            <a:ext cx="3291840" cy="347472"/>
           </a:xfrm>
           <a:prstGeom prst="rect">
             <a:avLst/>
@@ -8616,7 +8802,7 @@
                 </a:solidFill>
                 <a:latin typeface="Arial"/>
               </a:rPr>
-              <a:t>OCEAN-AI (лицо 5 кадров в секунду, голос, текст) + своя модель: основная оценка и второе мнение</a:t>
+              <a:t>OCEAN-AI (лицо 5 кадров в секунду, голос, текст) + моя модель: основная оценка и второе мнение</a:t>
             </a:r>
           </a:p>
         </p:txBody>
@@ -8629,8 +8815,8 @@
         </p:nvCxnSpPr>
         <p:spPr>
           <a:xfrm flipV="1">
-            <a:off x="4023360" y="1929384"/>
-            <a:ext cx="411480" cy="1316736"/>
+            <a:off x="4023360" y="1911095"/>
+            <a:ext cx="411480" cy="1335025"/>
           </a:xfrm>
           <a:prstGeom prst="line">
             <a:avLst/>
@@ -8665,12 +8851,12 @@
         </p:nvSpPr>
         <p:spPr>
           <a:xfrm>
-            <a:off x="4434840" y="2423160"/>
-            <a:ext cx="3566160" cy="749808"/>
+            <a:off x="4434840" y="2377440"/>
+            <a:ext cx="3566160" cy="713232"/>
           </a:xfrm>
           <a:prstGeom prst="roundRect">
             <a:avLst>
-              <a:gd name="adj" fmla="val 9756"/>
+              <a:gd name="adj" fmla="val 10256"/>
             </a:avLst>
           </a:prstGeom>
           <a:solidFill>
@@ -8709,7 +8895,7 @@
         </p:nvSpPr>
         <p:spPr>
           <a:xfrm>
-            <a:off x="4581144" y="2542032"/>
+            <a:off x="4581144" y="2496312"/>
             <a:ext cx="146304" cy="146304"/>
           </a:xfrm>
           <a:prstGeom prst="ellipse">
@@ -8751,7 +8937,7 @@
         </p:nvSpPr>
         <p:spPr>
           <a:xfrm>
-            <a:off x="4818888" y="2468879"/>
+            <a:off x="4818888" y="2423160"/>
             <a:ext cx="3063239" cy="274320"/>
           </a:xfrm>
           <a:prstGeom prst="rect">
@@ -8793,8 +8979,8 @@
         </p:nvSpPr>
         <p:spPr>
           <a:xfrm>
-            <a:off x="4581144" y="2752344"/>
-            <a:ext cx="3291840" cy="384047"/>
+            <a:off x="4581144" y="2706624"/>
+            <a:ext cx="3291840" cy="347472"/>
           </a:xfrm>
           <a:prstGeom prst="rect">
             <a:avLst/>
@@ -8835,8 +9021,8 @@
         </p:nvCxnSpPr>
         <p:spPr>
           <a:xfrm flipV="1">
-            <a:off x="4023360" y="2798064"/>
-            <a:ext cx="411480" cy="448056"/>
+            <a:off x="4023360" y="2734056"/>
+            <a:ext cx="411480" cy="512064"/>
           </a:xfrm>
           <a:prstGeom prst="line">
             <a:avLst/>
@@ -8871,12 +9057,12 @@
         </p:nvSpPr>
         <p:spPr>
           <a:xfrm>
-            <a:off x="4434840" y="3291839"/>
-            <a:ext cx="3566160" cy="749808"/>
+            <a:off x="4434840" y="3200400"/>
+            <a:ext cx="3566160" cy="713232"/>
           </a:xfrm>
           <a:prstGeom prst="roundRect">
             <a:avLst>
-              <a:gd name="adj" fmla="val 9756"/>
+              <a:gd name="adj" fmla="val 10256"/>
             </a:avLst>
           </a:prstGeom>
           <a:solidFill>
@@ -8915,7 +9101,7 @@
         </p:nvSpPr>
         <p:spPr>
           <a:xfrm>
-            <a:off x="4581144" y="3410711"/>
+            <a:off x="4581144" y="3319272"/>
             <a:ext cx="146304" cy="146304"/>
           </a:xfrm>
           <a:prstGeom prst="ellipse">
@@ -8957,7 +9143,7 @@
         </p:nvSpPr>
         <p:spPr>
           <a:xfrm>
-            <a:off x="4818888" y="3337559"/>
+            <a:off x="4818888" y="3246120"/>
             <a:ext cx="3063239" cy="274320"/>
           </a:xfrm>
           <a:prstGeom prst="rect">
@@ -8999,8 +9185,8 @@
         </p:nvSpPr>
         <p:spPr>
           <a:xfrm>
-            <a:off x="4581144" y="3621023"/>
-            <a:ext cx="3291840" cy="384047"/>
+            <a:off x="4581144" y="3529584"/>
+            <a:ext cx="3291840" cy="347472"/>
           </a:xfrm>
           <a:prstGeom prst="rect">
             <a:avLst/>
@@ -9042,7 +9228,7 @@
         <p:spPr>
           <a:xfrm>
             <a:off x="4023360" y="3246120"/>
-            <a:ext cx="411480" cy="420624"/>
+            <a:ext cx="411480" cy="310896"/>
           </a:xfrm>
           <a:prstGeom prst="line">
             <a:avLst/>
@@ -9077,12 +9263,12 @@
         </p:nvSpPr>
         <p:spPr>
           <a:xfrm>
-            <a:off x="4434840" y="4160520"/>
-            <a:ext cx="3566160" cy="749808"/>
+            <a:off x="4434840" y="4023360"/>
+            <a:ext cx="3566160" cy="713232"/>
           </a:xfrm>
           <a:prstGeom prst="roundRect">
             <a:avLst>
-              <a:gd name="adj" fmla="val 9756"/>
+              <a:gd name="adj" fmla="val 10256"/>
             </a:avLst>
           </a:prstGeom>
           <a:solidFill>
@@ -9121,7 +9307,7 @@
         </p:nvSpPr>
         <p:spPr>
           <a:xfrm>
-            <a:off x="4581144" y="4279392"/>
+            <a:off x="4581144" y="4142232"/>
             <a:ext cx="146304" cy="146304"/>
           </a:xfrm>
           <a:prstGeom prst="ellipse">
@@ -9163,7 +9349,7 @@
         </p:nvSpPr>
         <p:spPr>
           <a:xfrm>
-            <a:off x="4818888" y="4206240"/>
+            <a:off x="4818888" y="4069080"/>
             <a:ext cx="3063239" cy="274320"/>
           </a:xfrm>
           <a:prstGeom prst="rect">
@@ -9205,8 +9391,8 @@
         </p:nvSpPr>
         <p:spPr>
           <a:xfrm>
-            <a:off x="4581144" y="4489704"/>
-            <a:ext cx="3291840" cy="384047"/>
+            <a:off x="4581144" y="4352544"/>
+            <a:ext cx="3291840" cy="347472"/>
           </a:xfrm>
           <a:prstGeom prst="rect">
             <a:avLst/>
@@ -9248,7 +9434,7 @@
         <p:spPr>
           <a:xfrm>
             <a:off x="4023360" y="3246120"/>
-            <a:ext cx="411480" cy="1289304"/>
+            <a:ext cx="411480" cy="1133856"/>
           </a:xfrm>
           <a:prstGeom prst="line">
             <a:avLst/>
@@ -9283,12 +9469,12 @@
         </p:nvSpPr>
         <p:spPr>
           <a:xfrm>
-            <a:off x="4434840" y="5029200"/>
-            <a:ext cx="3566160" cy="749808"/>
+            <a:off x="4434840" y="4846320"/>
+            <a:ext cx="3566160" cy="713232"/>
           </a:xfrm>
           <a:prstGeom prst="roundRect">
             <a:avLst>
-              <a:gd name="adj" fmla="val 9756"/>
+              <a:gd name="adj" fmla="val 10256"/>
             </a:avLst>
           </a:prstGeom>
           <a:solidFill>
@@ -9327,7 +9513,7 @@
         </p:nvSpPr>
         <p:spPr>
           <a:xfrm>
-            <a:off x="4581144" y="5148072"/>
+            <a:off x="4581144" y="4965192"/>
             <a:ext cx="146304" cy="146304"/>
           </a:xfrm>
           <a:prstGeom prst="ellipse">
@@ -9369,7 +9555,7 @@
         </p:nvSpPr>
         <p:spPr>
           <a:xfrm>
-            <a:off x="4818888" y="5074920"/>
+            <a:off x="4818888" y="4892040"/>
             <a:ext cx="3063239" cy="274320"/>
           </a:xfrm>
           <a:prstGeom prst="rect">
@@ -9411,8 +9597,8 @@
         </p:nvSpPr>
         <p:spPr>
           <a:xfrm>
-            <a:off x="4581144" y="5358384"/>
-            <a:ext cx="3291840" cy="384047"/>
+            <a:off x="4581144" y="5175504"/>
+            <a:ext cx="3291840" cy="347472"/>
           </a:xfrm>
           <a:prstGeom prst="rect">
             <a:avLst/>
@@ -9454,7 +9640,7 @@
         <p:spPr>
           <a:xfrm>
             <a:off x="4023360" y="3246120"/>
-            <a:ext cx="411480" cy="2157984"/>
+            <a:ext cx="411480" cy="1956816"/>
           </a:xfrm>
           <a:prstGeom prst="line">
             <a:avLst/>
@@ -9700,11 +9886,11 @@
         <p:spPr>
           <a:xfrm>
             <a:off x="8412480" y="4206240"/>
-            <a:ext cx="3200400" cy="1554480"/>
+            <a:ext cx="3200400" cy="1463040"/>
           </a:xfrm>
           <a:prstGeom prst="roundRect">
             <a:avLst>
-              <a:gd name="adj" fmla="val 4705"/>
+              <a:gd name="adj" fmla="val 5000"/>
             </a:avLst>
           </a:prstGeom>
           <a:solidFill>
@@ -9744,7 +9930,7 @@
         <p:spPr>
           <a:xfrm>
             <a:off x="8485632" y="4206240"/>
-            <a:ext cx="3054096" cy="1554480"/>
+            <a:ext cx="3054096" cy="1463040"/>
           </a:xfrm>
           <a:prstGeom prst="rect">
             <a:avLst/>
@@ -9804,7 +9990,7 @@
         </p:nvCxnSpPr>
         <p:spPr>
           <a:xfrm>
-            <a:off x="8001000" y="1929384"/>
+            <a:off x="8001000" y="1911095"/>
             <a:ext cx="274320" cy="0"/>
           </a:xfrm>
           <a:prstGeom prst="line">
@@ -9839,7 +10025,7 @@
         </p:nvCxnSpPr>
         <p:spPr>
           <a:xfrm>
-            <a:off x="8001000" y="2798064"/>
+            <a:off x="8001000" y="2734056"/>
             <a:ext cx="274320" cy="0"/>
           </a:xfrm>
           <a:prstGeom prst="line">
@@ -9874,7 +10060,7 @@
         </p:nvCxnSpPr>
         <p:spPr>
           <a:xfrm>
-            <a:off x="8001000" y="3666744"/>
+            <a:off x="8001000" y="3557016"/>
             <a:ext cx="274320" cy="0"/>
           </a:xfrm>
           <a:prstGeom prst="line">
@@ -9909,7 +10095,7 @@
         </p:nvCxnSpPr>
         <p:spPr>
           <a:xfrm>
-            <a:off x="8001000" y="4535424"/>
+            <a:off x="8001000" y="4379976"/>
             <a:ext cx="274320" cy="0"/>
           </a:xfrm>
           <a:prstGeom prst="line">
@@ -9944,7 +10130,7 @@
         </p:nvCxnSpPr>
         <p:spPr>
           <a:xfrm>
-            <a:off x="8001000" y="5404104"/>
+            <a:off x="8001000" y="5202936"/>
             <a:ext cx="274320" cy="0"/>
           </a:xfrm>
           <a:prstGeom prst="line">
@@ -9979,8 +10165,8 @@
         </p:nvCxnSpPr>
         <p:spPr>
           <a:xfrm>
-            <a:off x="8275320" y="1929384"/>
-            <a:ext cx="0" cy="3474720"/>
+            <a:off x="8275320" y="1911095"/>
+            <a:ext cx="0" cy="3291841"/>
           </a:xfrm>
           <a:prstGeom prst="line">
             <a:avLst/>
@@ -10086,7 +10272,7 @@
         </p:nvCxnSpPr>
         <p:spPr>
           <a:xfrm>
-            <a:off x="8275320" y="4983480"/>
+            <a:off x="8275320" y="4937760"/>
             <a:ext cx="137160" cy="0"/>
           </a:xfrm>
           <a:prstGeom prst="line">
@@ -10194,8 +10380,8 @@
         </p:nvSpPr>
         <p:spPr>
           <a:xfrm>
-            <a:off x="548640" y="5989320"/>
-            <a:ext cx="11064240" cy="411480"/>
+            <a:off x="548640" y="5760720"/>
+            <a:ext cx="11064240" cy="685800"/>
           </a:xfrm>
           <a:prstGeom prst="rect">
             <a:avLst/>
@@ -10210,29 +10396,57 @@
           <a:p>
             <a:pPr algn="l">
               <a:lnSpc>
-                <a:spcPct val="110000"/>
-              </a:lnSpc>
-              <a:spcAft>
-                <a:spcPts val="0"/>
-              </a:spcAft>
-            </a:pPr>
-            <a:r>
-              <a:rPr sz="1150" b="1" i="0">
+                <a:spcPct val="105000"/>
+              </a:lnSpc>
+              <a:spcAft>
+                <a:spcPts val="200"/>
+              </a:spcAft>
+            </a:pPr>
+            <a:r>
+              <a:rPr sz="1050" b="1" i="0">
                 <a:solidFill>
                   <a:srgbClr val="27272A"/>
                 </a:solidFill>
                 <a:latin typeface="Arial"/>
               </a:rPr>
+              <a:t>Как смотрю ролик: </a:t>
+            </a:r>
+            <a:r>
+              <a:rPr sz="1050" b="0" i="0">
+                <a:solidFill>
+                  <a:srgbClr val="27272A"/>
+                </a:solidFill>
+                <a:latin typeface="Arial"/>
+              </a:rPr>
+              <a:t>целиком, без пропусков, отрезками по 20 с. Внутри отрезка: лицо — 30 кадров для моей модели и 5 кадров в секунду для OCEAN-AI, описание поведения — по 16 кадрам, мимика — по 12 кадрам, звук и речь — полностью.</a:t>
+            </a:r>
+          </a:p>
+          <a:p>
+            <a:pPr algn="l">
+              <a:lnSpc>
+                <a:spcPct val="105000"/>
+              </a:lnSpc>
+              <a:spcAft>
+                <a:spcPts val="200"/>
+              </a:spcAft>
+            </a:pPr>
+            <a:r>
+              <a:rPr sz="1050" b="1" i="0">
+                <a:solidFill>
+                  <a:srgbClr val="27272A"/>
+                </a:solidFill>
+                <a:latin typeface="Arial"/>
+              </a:rPr>
               <a:t>Всё локально: </a:t>
             </a:r>
             <a:r>
-              <a:rPr sz="1150" b="0" i="0">
+              <a:rPr sz="1050" b="0" i="0">
                 <a:solidFill>
                   <a:srgbClr val="27272A"/>
                 </a:solidFill>
                 <a:latin typeface="Arial"/>
               </a:rPr>
-              <a:t>одна видеокарта, никакие данные не покидают компьютер. Обработка занимает примерно столько же, сколько длится ролик.</a:t>
+              <a:t>одна видеокарта, данные не покидают компьютер. Обработка занимает примерно столько же, сколько длится ролик.</a:t>
             </a:r>
           </a:p>
         </p:txBody>
@@ -10246,7 +10460,7 @@
         <p:spPr>
           <a:xfrm>
             <a:off x="548640" y="6446520"/>
-            <a:ext cx="7315200" cy="274320"/>
+            <a:ext cx="8686800" cy="274320"/>
           </a:xfrm>
           <a:prstGeom prst="rect">
             <a:avLst/>
@@ -10274,7 +10488,7 @@
                 </a:solidFill>
                 <a:latin typeface="Arial"/>
               </a:rPr>
-              <a:t>BS 2.0 · анализ человека по видео · © 2026 AMLAI</a:t>
+              <a:t>BS 2.0 · анализ человека по видео · сделано в Claude Code, модель Fable 5.1, режим Ultracode · © 2026 AMLAI</a:t>
             </a:r>
           </a:p>
         </p:txBody>
@@ -10397,12 +10611,12 @@
         </p:nvSpPr>
         <p:spPr>
           <a:xfrm>
-            <a:off x="548640" y="1508760"/>
-            <a:ext cx="2514600" cy="1508760"/>
+            <a:off x="548640" y="1463040"/>
+            <a:ext cx="2514600" cy="1371600"/>
           </a:xfrm>
           <a:prstGeom prst="roundRect">
             <a:avLst>
-              <a:gd name="adj" fmla="val 4848"/>
+              <a:gd name="adj" fmla="val 5333"/>
             </a:avLst>
           </a:prstGeom>
           <a:solidFill>
@@ -10441,8 +10655,8 @@
         </p:nvSpPr>
         <p:spPr>
           <a:xfrm>
-            <a:off x="731520" y="1618488"/>
-            <a:ext cx="2148840" cy="685800"/>
+            <a:off x="731520" y="1536192"/>
+            <a:ext cx="2148840" cy="640080"/>
           </a:xfrm>
           <a:prstGeom prst="rect">
             <a:avLst/>
@@ -10464,7 +10678,7 @@
               </a:spcAft>
             </a:pPr>
             <a:r>
-              <a:rPr sz="3400" b="1" i="0">
+              <a:rPr sz="3200" b="1" i="0">
                 <a:solidFill>
                   <a:srgbClr val="C2410C"/>
                 </a:solidFill>
@@ -10483,8 +10697,8 @@
         </p:nvSpPr>
         <p:spPr>
           <a:xfrm>
-            <a:off x="731520" y="2331720"/>
-            <a:ext cx="2148840" cy="640080"/>
+            <a:off x="731520" y="2194560"/>
+            <a:ext cx="2148840" cy="594360"/>
           </a:xfrm>
           <a:prstGeom prst="rect">
             <a:avLst/>
@@ -10512,8 +10726,7 @@
                 </a:solidFill>
                 <a:latin typeface="Arial"/>
               </a:rPr>
-              <a:t>точность ансамбля (1 − ошибка) на тестовой части
-First Impressions V2; в статье — 0.918</a:t>
+              <a:t>точность ансамбля** на тестовой части First Impressions V2; в статье — 0.918</a:t>
             </a:r>
           </a:p>
         </p:txBody>
@@ -10526,12 +10739,12 @@
         </p:nvSpPr>
         <p:spPr>
           <a:xfrm>
-            <a:off x="3246120" y="1508760"/>
-            <a:ext cx="2514600" cy="1508760"/>
+            <a:off x="3246120" y="1463040"/>
+            <a:ext cx="2514600" cy="1371600"/>
           </a:xfrm>
           <a:prstGeom prst="roundRect">
             <a:avLst>
-              <a:gd name="adj" fmla="val 4848"/>
+              <a:gd name="adj" fmla="val 5333"/>
             </a:avLst>
           </a:prstGeom>
           <a:solidFill>
@@ -10570,8 +10783,8 @@
         </p:nvSpPr>
         <p:spPr>
           <a:xfrm>
-            <a:off x="3429000" y="1618488"/>
-            <a:ext cx="2148840" cy="685800"/>
+            <a:off x="3429000" y="1536192"/>
+            <a:ext cx="2148840" cy="640080"/>
           </a:xfrm>
           <a:prstGeom prst="rect">
             <a:avLst/>
@@ -10593,7 +10806,7 @@
               </a:spcAft>
             </a:pPr>
             <a:r>
-              <a:rPr sz="3400" b="1" i="0">
+              <a:rPr sz="3200" b="1" i="0">
                 <a:solidFill>
                   <a:srgbClr val="C2410C"/>
                 </a:solidFill>
@@ -10612,8 +10825,8 @@
         </p:nvSpPr>
         <p:spPr>
           <a:xfrm>
-            <a:off x="3429000" y="2331720"/>
-            <a:ext cx="2148840" cy="640080"/>
+            <a:off x="3429000" y="2194560"/>
+            <a:ext cx="2148840" cy="594360"/>
           </a:xfrm>
           <a:prstGeom prst="rect">
             <a:avLst/>
@@ -10655,12 +10868,12 @@
         </p:nvSpPr>
         <p:spPr>
           <a:xfrm>
-            <a:off x="548640" y="3200400"/>
-            <a:ext cx="2514600" cy="1508760"/>
+            <a:off x="548640" y="3017520"/>
+            <a:ext cx="2514600" cy="1371600"/>
           </a:xfrm>
           <a:prstGeom prst="roundRect">
             <a:avLst>
-              <a:gd name="adj" fmla="val 4848"/>
+              <a:gd name="adj" fmla="val 5333"/>
             </a:avLst>
           </a:prstGeom>
           <a:solidFill>
@@ -10699,8 +10912,8 @@
         </p:nvSpPr>
         <p:spPr>
           <a:xfrm>
-            <a:off x="731520" y="3310128"/>
-            <a:ext cx="2148840" cy="685800"/>
+            <a:off x="731520" y="3090672"/>
+            <a:ext cx="2148840" cy="640080"/>
           </a:xfrm>
           <a:prstGeom prst="rect">
             <a:avLst/>
@@ -10722,7 +10935,7 @@
               </a:spcAft>
             </a:pPr>
             <a:r>
-              <a:rPr sz="3400" b="1" i="0">
+              <a:rPr sz="3200" b="1" i="0">
                 <a:solidFill>
                   <a:srgbClr val="C2410C"/>
                 </a:solidFill>
@@ -10741,8 +10954,8 @@
         </p:nvSpPr>
         <p:spPr>
           <a:xfrm>
-            <a:off x="731520" y="4023360"/>
-            <a:ext cx="2148840" cy="640080"/>
+            <a:off x="731520" y="3749039"/>
+            <a:ext cx="2148840" cy="594360"/>
           </a:xfrm>
           <a:prstGeom prst="rect">
             <a:avLst/>
@@ -10784,12 +10997,12 @@
         </p:nvSpPr>
         <p:spPr>
           <a:xfrm>
-            <a:off x="3246120" y="3200400"/>
-            <a:ext cx="2514600" cy="1508760"/>
+            <a:off x="3246120" y="3017520"/>
+            <a:ext cx="2514600" cy="1371600"/>
           </a:xfrm>
           <a:prstGeom prst="roundRect">
             <a:avLst>
-              <a:gd name="adj" fmla="val 4848"/>
+              <a:gd name="adj" fmla="val 5333"/>
             </a:avLst>
           </a:prstGeom>
           <a:solidFill>
@@ -10828,8 +11041,8 @@
         </p:nvSpPr>
         <p:spPr>
           <a:xfrm>
-            <a:off x="3429000" y="3310128"/>
-            <a:ext cx="2148840" cy="685800"/>
+            <a:off x="3429000" y="3090672"/>
+            <a:ext cx="2148840" cy="640080"/>
           </a:xfrm>
           <a:prstGeom prst="rect">
             <a:avLst/>
@@ -10851,7 +11064,7 @@
               </a:spcAft>
             </a:pPr>
             <a:r>
-              <a:rPr sz="3400" b="1" i="0">
+              <a:rPr sz="3200" b="1" i="0">
                 <a:solidFill>
                   <a:srgbClr val="C2410C"/>
                 </a:solidFill>
@@ -10870,8 +11083,8 @@
         </p:nvSpPr>
         <p:spPr>
           <a:xfrm>
-            <a:off x="3429000" y="4023360"/>
-            <a:ext cx="2148840" cy="640080"/>
+            <a:off x="3429000" y="3749039"/>
+            <a:ext cx="2148840" cy="594360"/>
           </a:xfrm>
           <a:prstGeom prst="rect">
             <a:avLst/>
@@ -10914,7 +11127,7 @@
           <p:nvPr/>
         </p:nvGraphicFramePr>
         <p:xfrm>
-          <a:off x="5943600" y="1417320"/>
+          <a:off x="5943600" y="1371600"/>
           <a:ext cx="5669280" cy="3017520"/>
         </p:xfrm>
         <a:graphic>
@@ -10931,8 +11144,8 @@
         </p:nvSpPr>
         <p:spPr>
           <a:xfrm>
-            <a:off x="6035040" y="4453128"/>
-            <a:ext cx="5577840" cy="320040"/>
+            <a:off x="548640" y="4480560"/>
+            <a:ext cx="11064240" cy="566928"/>
           </a:xfrm>
           <a:prstGeom prst="rect">
             <a:avLst/>
@@ -10947,20 +11160,39 @@
           <a:p>
             <a:pPr algn="l">
               <a:lnSpc>
-                <a:spcPct val="110000"/>
-              </a:lnSpc>
-              <a:spcAft>
-                <a:spcPts val="0"/>
-              </a:spcAft>
-            </a:pPr>
-            <a:r>
-              <a:rPr sz="900" b="0" i="0">
+                <a:spcPct val="100000"/>
+              </a:lnSpc>
+              <a:spcAft>
+                <a:spcPts val="200"/>
+              </a:spcAft>
+            </a:pPr>
+            <a:r>
+              <a:rPr sz="850" b="0" i="0">
                 <a:solidFill>
                   <a:srgbClr val="52525B"/>
                 </a:solidFill>
                 <a:latin typeface="Arial"/>
               </a:rPr>
-              <a:t>Ось начинается с 0.5, чтобы различия были видны: все четыре системы близки между собой.</a:t>
+              <a:t>* График построен на тестовой части First Impressions V2: 1997 роликов по 15 с, каждый заранее оценён по пяти чертам группой наблюдателей. Для каждого ролика я сравнил оценки системы с оценками людей; CCC учитывает и уровень, и порядок оценок. Число для статьи — из публикации MM-PSYCHE. Ось начинается с 0.5, чтобы различия были видны.</a:t>
+            </a:r>
+          </a:p>
+          <a:p>
+            <a:pPr algn="l">
+              <a:lnSpc>
+                <a:spcPct val="100000"/>
+              </a:lnSpc>
+              <a:spcAft>
+                <a:spcPts val="200"/>
+              </a:spcAft>
+            </a:pPr>
+            <a:r>
+              <a:rPr sz="850" b="0" i="0">
+                <a:solidFill>
+                  <a:srgbClr val="52525B"/>
+                </a:solidFill>
+                <a:latin typeface="Arial"/>
+              </a:rPr>
+              <a:t>** 0.927 = 1 − средняя ошибка: на тех же 1997 роликах оценка ансамбля отличалась от оценки людей в среднем на 0.073 балла по шкале от 0 до 1 (среднее по пяти чертам). У статьи MM-PSYCHE тот же показатель — 0.918.</a:t>
             </a:r>
           </a:p>
         </p:txBody>
@@ -10973,7 +11205,7 @@
         </p:nvSpPr>
         <p:spPr>
           <a:xfrm>
-            <a:off x="548640" y="4846320"/>
+            <a:off x="548640" y="5074920"/>
             <a:ext cx="11064240" cy="320040"/>
           </a:xfrm>
           <a:prstGeom prst="rect">
@@ -11015,12 +11247,12 @@
         </p:nvSpPr>
         <p:spPr>
           <a:xfrm>
-            <a:off x="548640" y="5212080"/>
-            <a:ext cx="1737360" cy="960120"/>
+            <a:off x="548640" y="5394960"/>
+            <a:ext cx="1737360" cy="914400"/>
           </a:xfrm>
           <a:prstGeom prst="roundRect">
             <a:avLst>
-              <a:gd name="adj" fmla="val 7619"/>
+              <a:gd name="adj" fmla="val 8000"/>
             </a:avLst>
           </a:prstGeom>
           <a:solidFill>
@@ -11059,7 +11291,7 @@
         </p:nvSpPr>
         <p:spPr>
           <a:xfrm>
-            <a:off x="658368" y="5321808"/>
+            <a:off x="658368" y="5504688"/>
             <a:ext cx="109728" cy="109728"/>
           </a:xfrm>
           <a:prstGeom prst="ellipse">
@@ -11101,7 +11333,7 @@
         </p:nvSpPr>
         <p:spPr>
           <a:xfrm>
-            <a:off x="841247" y="5266944"/>
+            <a:off x="841247" y="5449824"/>
             <a:ext cx="1371600" cy="274320"/>
           </a:xfrm>
           <a:prstGeom prst="rect">
@@ -11143,7 +11375,7 @@
         </p:nvSpPr>
         <p:spPr>
           <a:xfrm>
-            <a:off x="658368" y="5596128"/>
+            <a:off x="658368" y="5779008"/>
             <a:ext cx="1517904" cy="548640"/>
           </a:xfrm>
           <a:prstGeom prst="rect">
@@ -11185,12 +11417,12 @@
         </p:nvSpPr>
         <p:spPr>
           <a:xfrm>
-            <a:off x="2414016" y="5212080"/>
-            <a:ext cx="1737360" cy="960120"/>
+            <a:off x="2414016" y="5394960"/>
+            <a:ext cx="1737360" cy="914400"/>
           </a:xfrm>
           <a:prstGeom prst="roundRect">
             <a:avLst>
-              <a:gd name="adj" fmla="val 7619"/>
+              <a:gd name="adj" fmla="val 8000"/>
             </a:avLst>
           </a:prstGeom>
           <a:solidFill>
@@ -11229,7 +11461,7 @@
         </p:nvSpPr>
         <p:spPr>
           <a:xfrm>
-            <a:off x="2523744" y="5321808"/>
+            <a:off x="2523744" y="5504688"/>
             <a:ext cx="109728" cy="109728"/>
           </a:xfrm>
           <a:prstGeom prst="ellipse">
@@ -11271,7 +11503,7 @@
         </p:nvSpPr>
         <p:spPr>
           <a:xfrm>
-            <a:off x="2706624" y="5266944"/>
+            <a:off x="2706624" y="5449824"/>
             <a:ext cx="1371600" cy="274320"/>
           </a:xfrm>
           <a:prstGeom prst="rect">
@@ -11313,7 +11545,7 @@
         </p:nvSpPr>
         <p:spPr>
           <a:xfrm>
-            <a:off x="2523744" y="5596128"/>
+            <a:off x="2523744" y="5779008"/>
             <a:ext cx="1517904" cy="548640"/>
           </a:xfrm>
           <a:prstGeom prst="rect">
@@ -11355,12 +11587,12 @@
         </p:nvSpPr>
         <p:spPr>
           <a:xfrm>
-            <a:off x="4279392" y="5212080"/>
-            <a:ext cx="1737360" cy="960120"/>
+            <a:off x="4279392" y="5394960"/>
+            <a:ext cx="1737360" cy="914400"/>
           </a:xfrm>
           <a:prstGeom prst="roundRect">
             <a:avLst>
-              <a:gd name="adj" fmla="val 7619"/>
+              <a:gd name="adj" fmla="val 8000"/>
             </a:avLst>
           </a:prstGeom>
           <a:solidFill>
@@ -11399,7 +11631,7 @@
         </p:nvSpPr>
         <p:spPr>
           <a:xfrm>
-            <a:off x="4389120" y="5321808"/>
+            <a:off x="4389120" y="5504688"/>
             <a:ext cx="109728" cy="109728"/>
           </a:xfrm>
           <a:prstGeom prst="ellipse">
@@ -11441,7 +11673,7 @@
         </p:nvSpPr>
         <p:spPr>
           <a:xfrm>
-            <a:off x="4572000" y="5266944"/>
+            <a:off x="4572000" y="5449824"/>
             <a:ext cx="1371600" cy="274320"/>
           </a:xfrm>
           <a:prstGeom prst="rect">
@@ -11483,7 +11715,7 @@
         </p:nvSpPr>
         <p:spPr>
           <a:xfrm>
-            <a:off x="4389120" y="5596128"/>
+            <a:off x="4389120" y="5779008"/>
             <a:ext cx="1517904" cy="548640"/>
           </a:xfrm>
           <a:prstGeom prst="rect">
@@ -11525,12 +11757,12 @@
         </p:nvSpPr>
         <p:spPr>
           <a:xfrm>
-            <a:off x="6144768" y="5212080"/>
-            <a:ext cx="1737360" cy="960120"/>
+            <a:off x="6144768" y="5394960"/>
+            <a:ext cx="1737360" cy="914400"/>
           </a:xfrm>
           <a:prstGeom prst="roundRect">
             <a:avLst>
-              <a:gd name="adj" fmla="val 7619"/>
+              <a:gd name="adj" fmla="val 8000"/>
             </a:avLst>
           </a:prstGeom>
           <a:solidFill>
@@ -11569,7 +11801,7 @@
         </p:nvSpPr>
         <p:spPr>
           <a:xfrm>
-            <a:off x="6254496" y="5321808"/>
+            <a:off x="6254496" y="5504688"/>
             <a:ext cx="109728" cy="109728"/>
           </a:xfrm>
           <a:prstGeom prst="ellipse">
@@ -11611,7 +11843,7 @@
         </p:nvSpPr>
         <p:spPr>
           <a:xfrm>
-            <a:off x="6437376" y="5266944"/>
+            <a:off x="6437376" y="5449824"/>
             <a:ext cx="1371600" cy="274320"/>
           </a:xfrm>
           <a:prstGeom prst="rect">
@@ -11653,7 +11885,7 @@
         </p:nvSpPr>
         <p:spPr>
           <a:xfrm>
-            <a:off x="6254496" y="5596128"/>
+            <a:off x="6254496" y="5779008"/>
             <a:ext cx="1517904" cy="548640"/>
           </a:xfrm>
           <a:prstGeom prst="rect">
@@ -11695,12 +11927,12 @@
         </p:nvSpPr>
         <p:spPr>
           <a:xfrm>
-            <a:off x="8010144" y="5212080"/>
-            <a:ext cx="1737360" cy="960120"/>
+            <a:off x="8010144" y="5394960"/>
+            <a:ext cx="1737360" cy="914400"/>
           </a:xfrm>
           <a:prstGeom prst="roundRect">
             <a:avLst>
-              <a:gd name="adj" fmla="val 7619"/>
+              <a:gd name="adj" fmla="val 8000"/>
             </a:avLst>
           </a:prstGeom>
           <a:solidFill>
@@ -11739,7 +11971,7 @@
         </p:nvSpPr>
         <p:spPr>
           <a:xfrm>
-            <a:off x="8119871" y="5321808"/>
+            <a:off x="8119871" y="5504688"/>
             <a:ext cx="109728" cy="109728"/>
           </a:xfrm>
           <a:prstGeom prst="ellipse">
@@ -11781,7 +12013,7 @@
         </p:nvSpPr>
         <p:spPr>
           <a:xfrm>
-            <a:off x="8302752" y="5266944"/>
+            <a:off x="8302752" y="5449824"/>
             <a:ext cx="1371600" cy="274320"/>
           </a:xfrm>
           <a:prstGeom prst="rect">
@@ -11823,7 +12055,7 @@
         </p:nvSpPr>
         <p:spPr>
           <a:xfrm>
-            <a:off x="8119871" y="5596128"/>
+            <a:off x="8119871" y="5779008"/>
             <a:ext cx="1517904" cy="548640"/>
           </a:xfrm>
           <a:prstGeom prst="rect">
@@ -11865,12 +12097,12 @@
         </p:nvSpPr>
         <p:spPr>
           <a:xfrm>
-            <a:off x="9875519" y="5212080"/>
-            <a:ext cx="1737360" cy="960120"/>
+            <a:off x="9875519" y="5394960"/>
+            <a:ext cx="1737360" cy="914400"/>
           </a:xfrm>
           <a:prstGeom prst="roundRect">
             <a:avLst>
-              <a:gd name="adj" fmla="val 7619"/>
+              <a:gd name="adj" fmla="val 8000"/>
             </a:avLst>
           </a:prstGeom>
           <a:solidFill>
@@ -11909,7 +12141,7 @@
         </p:nvSpPr>
         <p:spPr>
           <a:xfrm>
-            <a:off x="9985247" y="5321808"/>
+            <a:off x="9985247" y="5504688"/>
             <a:ext cx="109728" cy="109728"/>
           </a:xfrm>
           <a:prstGeom prst="ellipse">
@@ -11951,7 +12183,7 @@
         </p:nvSpPr>
         <p:spPr>
           <a:xfrm>
-            <a:off x="10168128" y="5266944"/>
+            <a:off x="10168128" y="5449824"/>
             <a:ext cx="1371600" cy="274320"/>
           </a:xfrm>
           <a:prstGeom prst="rect">
@@ -11993,7 +12225,7 @@
         </p:nvSpPr>
         <p:spPr>
           <a:xfrm>
-            <a:off x="9985247" y="5596128"/>
+            <a:off x="9985247" y="5779008"/>
             <a:ext cx="1517904" cy="548640"/>
           </a:xfrm>
           <a:prstGeom prst="rect">
@@ -12036,7 +12268,7 @@
         <p:spPr>
           <a:xfrm>
             <a:off x="548640" y="6446520"/>
-            <a:ext cx="7315200" cy="274320"/>
+            <a:ext cx="8686800" cy="274320"/>
           </a:xfrm>
           <a:prstGeom prst="rect">
             <a:avLst/>
@@ -12064,7 +12296,7 @@
                 </a:solidFill>
                 <a:latin typeface="Arial"/>
               </a:rPr>
-              <a:t>BS 2.0 · анализ человека по видео · © 2026 AMLAI</a:t>
+              <a:t>BS 2.0 · анализ человека по видео · сделано в Claude Code, модель Fable 5.1, режим Ultracode · © 2026 AMLAI</a:t>
             </a:r>
           </a:p>
         </p:txBody>
@@ -12083,7 +12315,7 @@
     <p:bg>
       <p:bgPr>
         <a:solidFill>
-          <a:srgbClr val="27272A"/>
+          <a:srgbClr val="FFFFFF"/>
         </a:solidFill>
         <a:effectLst/>
       </p:bgPr>
@@ -12128,11 +12360,11 @@
             <a:r>
               <a:rPr sz="3200" b="1" i="0">
                 <a:solidFill>
-                  <a:srgbClr val="FFFFFF"/>
-                </a:solidFill>
-                <a:latin typeface="Arial"/>
-              </a:rPr>
-              <a:t>Что нужно от заказчика и коллег</a:t>
+                  <a:srgbClr val="27272A"/>
+                </a:solidFill>
+                <a:latin typeface="Arial"/>
+              </a:rPr>
+              <a:t>Как нам дальше улучшить систему?</a:t>
             </a:r>
           </a:p>
         </p:txBody>
@@ -12170,11 +12402,11 @@
             <a:r>
               <a:rPr sz="1300" b="0" i="0">
                 <a:solidFill>
-                  <a:srgbClr val="D4D4D8"/>
-                </a:solidFill>
-                <a:latin typeface="Arial"/>
-              </a:rPr>
-              <a:t>Девяти роликов от коллег хватило, чтобы запустить систему, но не чтобы сверить её с мнением людей и настроить</a:t>
+                  <a:srgbClr val="52525B"/>
+                </a:solidFill>
+                <a:latin typeface="Arial"/>
+              </a:rPr>
+              <a:t>Девяти роликов хватило, чтобы запустить систему, но не чтобы сверить её с мнением людей и настроить. Вот что для этого нужно</a:t>
             </a:r>
           </a:p>
         </p:txBody>
@@ -12196,7 +12428,7 @@
             </a:avLst>
           </a:prstGeom>
           <a:solidFill>
-            <a:srgbClr val="3F3F46"/>
+            <a:srgbClr val="F4F4F5"/>
           </a:solidFill>
           <a:ln>
             <a:noFill/>
@@ -12238,7 +12470,7 @@
             <a:avLst/>
           </a:prstGeom>
           <a:solidFill>
-            <a:srgbClr val="EA580C"/>
+            <a:srgbClr val="C2410C"/>
           </a:solidFill>
           <a:ln>
             <a:noFill/>
@@ -12309,7 +12541,7 @@
             <a:r>
               <a:rPr sz="1500" b="1" i="0">
                 <a:solidFill>
-                  <a:srgbClr val="FFFFFF"/>
+                  <a:srgbClr val="27272A"/>
                 </a:solidFill>
                 <a:latin typeface="Arial"/>
               </a:rPr>
@@ -12351,7 +12583,7 @@
             <a:r>
               <a:rPr sz="1200" b="1" i="0">
                 <a:solidFill>
-                  <a:srgbClr val="EA580C"/>
+                  <a:srgbClr val="C2410C"/>
                 </a:solidFill>
                 <a:latin typeface="Arial"/>
               </a:rPr>
@@ -12360,11 +12592,11 @@
             <a:r>
               <a:rPr sz="1200" b="0" i="0">
                 <a:solidFill>
-                  <a:srgbClr val="DBEAFE"/>
-                </a:solidFill>
-                <a:latin typeface="Arial"/>
-              </a:rPr>
-              <a:t>Коллеги записывают ещё: человек говорит в камеру, лицо крупно, русская речь, 3–10 минут, разные люди и условия</a:t>
+                  <a:srgbClr val="27272A"/>
+                </a:solidFill>
+                <a:latin typeface="Arial"/>
+              </a:rPr>
+              <a:t>Записать ещё ролики: человек говорит в камеру, лицо крупно, русская речь, 3–10 минут, разные люди и условия</a:t>
             </a:r>
           </a:p>
           <a:p>
@@ -12379,7 +12611,7 @@
             <a:r>
               <a:rPr sz="1200" b="1" i="0">
                 <a:solidFill>
-                  <a:srgbClr val="EA580C"/>
+                  <a:srgbClr val="C2410C"/>
                 </a:solidFill>
                 <a:latin typeface="Arial"/>
               </a:rPr>
@@ -12388,7 +12620,7 @@
             <a:r>
               <a:rPr sz="1200" b="0" i="0">
                 <a:solidFill>
-                  <a:srgbClr val="DBEAFE"/>
+                  <a:srgbClr val="27272A"/>
                 </a:solidFill>
                 <a:latin typeface="Arial"/>
               </a:rPr>
@@ -12407,7 +12639,7 @@
             <a:r>
               <a:rPr sz="1200" b="1" i="0">
                 <a:solidFill>
-                  <a:srgbClr val="EA580C"/>
+                  <a:srgbClr val="C2410C"/>
                 </a:solidFill>
                 <a:latin typeface="Arial"/>
               </a:rPr>
@@ -12416,7 +12648,7 @@
             <a:r>
               <a:rPr sz="1200" b="0" i="0">
                 <a:solidFill>
-                  <a:srgbClr val="DBEAFE"/>
+                  <a:srgbClr val="27272A"/>
                 </a:solidFill>
                 <a:latin typeface="Arial"/>
               </a:rPr>
@@ -12435,7 +12667,7 @@
             <a:r>
               <a:rPr sz="1200" b="1" i="0">
                 <a:solidFill>
-                  <a:srgbClr val="EA580C"/>
+                  <a:srgbClr val="C2410C"/>
                 </a:solidFill>
                 <a:latin typeface="Arial"/>
               </a:rPr>
@@ -12444,7 +12676,7 @@
             <a:r>
               <a:rPr sz="1200" b="0" i="0">
                 <a:solidFill>
-                  <a:srgbClr val="DBEAFE"/>
+                  <a:srgbClr val="27272A"/>
                 </a:solidFill>
                 <a:latin typeface="Arial"/>
               </a:rPr>
@@ -12470,7 +12702,7 @@
             </a:avLst>
           </a:prstGeom>
           <a:solidFill>
-            <a:srgbClr val="3F3F46"/>
+            <a:srgbClr val="F4F4F5"/>
           </a:solidFill>
           <a:ln>
             <a:noFill/>
@@ -12512,7 +12744,7 @@
             <a:avLst/>
           </a:prstGeom>
           <a:solidFill>
-            <a:srgbClr val="EA580C"/>
+            <a:srgbClr val="C2410C"/>
           </a:solidFill>
           <a:ln>
             <a:noFill/>
@@ -12583,7 +12815,7 @@
             <a:r>
               <a:rPr sz="1500" b="1" i="0">
                 <a:solidFill>
-                  <a:srgbClr val="FFFFFF"/>
+                  <a:srgbClr val="27272A"/>
                 </a:solidFill>
                 <a:latin typeface="Arial"/>
               </a:rPr>
@@ -12625,7 +12857,7 @@
             <a:r>
               <a:rPr sz="1200" b="1" i="0">
                 <a:solidFill>
-                  <a:srgbClr val="EA580C"/>
+                  <a:srgbClr val="C2410C"/>
                 </a:solidFill>
                 <a:latin typeface="Arial"/>
               </a:rPr>
@@ -12634,11 +12866,11 @@
             <a:r>
               <a:rPr sz="1200" b="0" i="0">
                 <a:solidFill>
-                  <a:srgbClr val="DBEAFE"/>
-                </a:solidFill>
-                <a:latin typeface="Arial"/>
-              </a:rPr>
-              <a:t>Каждый ролик смотрят не меньше трёх коллег, не знакомых с человеком в кадре</a:t>
+                  <a:srgbClr val="27272A"/>
+                </a:solidFill>
+                <a:latin typeface="Arial"/>
+              </a:rPr>
+              <a:t>Каждый ролик смотрят не меньше трёх человек, не знакомых с тем, кто в кадре</a:t>
             </a:r>
           </a:p>
           <a:p>
@@ -12653,7 +12885,7 @@
             <a:r>
               <a:rPr sz="1200" b="1" i="0">
                 <a:solidFill>
-                  <a:srgbClr val="EA580C"/>
+                  <a:srgbClr val="C2410C"/>
                 </a:solidFill>
                 <a:latin typeface="Arial"/>
               </a:rPr>
@@ -12662,7 +12894,7 @@
             <a:r>
               <a:rPr sz="1200" b="0" i="0">
                 <a:solidFill>
-                  <a:srgbClr val="DBEAFE"/>
+                  <a:srgbClr val="27272A"/>
                 </a:solidFill>
                 <a:latin typeface="Arial"/>
               </a:rPr>
@@ -12681,7 +12913,7 @@
             <a:r>
               <a:rPr sz="1200" b="1" i="0">
                 <a:solidFill>
-                  <a:srgbClr val="EA580C"/>
+                  <a:srgbClr val="C2410C"/>
                 </a:solidFill>
                 <a:latin typeface="Arial"/>
               </a:rPr>
@@ -12690,7 +12922,7 @@
             <a:r>
               <a:rPr sz="1200" b="0" i="0">
                 <a:solidFill>
-                  <a:srgbClr val="DBEAFE"/>
+                  <a:srgbClr val="27272A"/>
                 </a:solidFill>
                 <a:latin typeface="Arial"/>
               </a:rPr>
@@ -12709,7 +12941,7 @@
             <a:r>
               <a:rPr sz="1200" b="1" i="0">
                 <a:solidFill>
-                  <a:srgbClr val="EA580C"/>
+                  <a:srgbClr val="C2410C"/>
                 </a:solidFill>
                 <a:latin typeface="Arial"/>
               </a:rPr>
@@ -12718,11 +12950,11 @@
             <a:r>
               <a:rPr sz="1200" b="0" i="0">
                 <a:solidFill>
-                  <a:srgbClr val="DBEAFE"/>
-                </a:solidFill>
-                <a:latin typeface="Arial"/>
-              </a:rPr>
-              <a:t>Мы делаем таблицу разметки и считаем согласие оценщиков между собой</a:t>
+                  <a:srgbClr val="27272A"/>
+                </a:solidFill>
+                <a:latin typeface="Arial"/>
+              </a:rPr>
+              <a:t>Единая таблица разметки; согласие оценщиков между собой — мера того, чего вообще можно достичь</a:t>
             </a:r>
           </a:p>
         </p:txBody>
@@ -12744,7 +12976,7 @@
             </a:avLst>
           </a:prstGeom>
           <a:solidFill>
-            <a:srgbClr val="3F3F46"/>
+            <a:srgbClr val="F4F4F5"/>
           </a:solidFill>
           <a:ln>
             <a:noFill/>
@@ -12786,7 +13018,7 @@
             <a:avLst/>
           </a:prstGeom>
           <a:solidFill>
-            <a:srgbClr val="EA580C"/>
+            <a:srgbClr val="C2410C"/>
           </a:solidFill>
           <a:ln>
             <a:noFill/>
@@ -12857,7 +13089,7 @@
             <a:r>
               <a:rPr sz="1500" b="1" i="0">
                 <a:solidFill>
-                  <a:srgbClr val="FFFFFF"/>
+                  <a:srgbClr val="27272A"/>
                 </a:solidFill>
                 <a:latin typeface="Arial"/>
               </a:rPr>
@@ -12899,7 +13131,7 @@
             <a:r>
               <a:rPr sz="1200" b="1" i="0">
                 <a:solidFill>
-                  <a:srgbClr val="EA580C"/>
+                  <a:srgbClr val="C2410C"/>
                 </a:solidFill>
                 <a:latin typeface="Arial"/>
               </a:rPr>
@@ -12908,7 +13140,7 @@
             <a:r>
               <a:rPr sz="1200" b="0" i="0">
                 <a:solidFill>
-                  <a:srgbClr val="DBEAFE"/>
+                  <a:srgbClr val="27272A"/>
                 </a:solidFill>
                 <a:latin typeface="Arial"/>
               </a:rPr>
@@ -12927,7 +13159,7 @@
             <a:r>
               <a:rPr sz="1200" b="1" i="0">
                 <a:solidFill>
-                  <a:srgbClr val="EA580C"/>
+                  <a:srgbClr val="C2410C"/>
                 </a:solidFill>
                 <a:latin typeface="Arial"/>
               </a:rPr>
@@ -12936,7 +13168,7 @@
             <a:r>
               <a:rPr sz="1200" b="0" i="0">
                 <a:solidFill>
-                  <a:srgbClr val="DBEAFE"/>
+                  <a:srgbClr val="27272A"/>
                 </a:solidFill>
                 <a:latin typeface="Arial"/>
               </a:rPr>
@@ -12955,7 +13187,7 @@
             <a:r>
               <a:rPr sz="1200" b="1" i="0">
                 <a:solidFill>
-                  <a:srgbClr val="EA580C"/>
+                  <a:srgbClr val="C2410C"/>
                 </a:solidFill>
                 <a:latin typeface="Arial"/>
               </a:rPr>
@@ -12964,7 +13196,7 @@
             <a:r>
               <a:rPr sz="1200" b="0" i="0">
                 <a:solidFill>
-                  <a:srgbClr val="DBEAFE"/>
+                  <a:srgbClr val="27272A"/>
                 </a:solidFill>
                 <a:latin typeface="Arial"/>
               </a:rPr>
@@ -12983,7 +13215,7 @@
             <a:r>
               <a:rPr sz="1200" b="1" i="0">
                 <a:solidFill>
-                  <a:srgbClr val="EA580C"/>
+                  <a:srgbClr val="C2410C"/>
                 </a:solidFill>
                 <a:latin typeface="Arial"/>
               </a:rPr>
@@ -12992,7 +13224,7 @@
             <a:r>
               <a:rPr sz="1200" b="0" i="0">
                 <a:solidFill>
-                  <a:srgbClr val="DBEAFE"/>
+                  <a:srgbClr val="27272A"/>
                 </a:solidFill>
                 <a:latin typeface="Arial"/>
               </a:rPr>
@@ -13034,7 +13266,7 @@
             <a:r>
               <a:rPr sz="1100" b="1" i="0">
                 <a:solidFill>
-                  <a:srgbClr val="EA580C"/>
+                  <a:srgbClr val="C2410C"/>
                 </a:solidFill>
                 <a:latin typeface="Arial"/>
               </a:rPr>
@@ -13043,7 +13275,7 @@
             <a:r>
               <a:rPr sz="1100" b="0" i="0">
                 <a:solidFill>
-                  <a:srgbClr val="FFFFFF"/>
+                  <a:srgbClr val="27272A"/>
                 </a:solidFill>
                 <a:latin typeface="Arial"/>
               </a:rPr>
@@ -13062,16 +13294,16 @@
             <a:r>
               <a:rPr sz="1100" b="1" i="0">
                 <a:solidFill>
-                  <a:srgbClr val="EA580C"/>
-                </a:solidFill>
-                <a:latin typeface="Arial"/>
-              </a:rPr>
-              <a:t>Своя модель для русской речи </a:t>
+                  <a:srgbClr val="C2410C"/>
+                </a:solidFill>
+                <a:latin typeface="Arial"/>
+              </a:rPr>
+              <a:t>Собственная модель для русской речи </a:t>
             </a:r>
             <a:r>
               <a:rPr sz="1100" b="0" i="0">
                 <a:solidFill>
-                  <a:srgbClr val="FFFFFF"/>
+                  <a:srgbClr val="27272A"/>
                 </a:solidFill>
                 <a:latin typeface="Arial"/>
               </a:rPr>
@@ -13089,7 +13321,7 @@
         <p:spPr>
           <a:xfrm>
             <a:off x="548640" y="6446520"/>
-            <a:ext cx="7315200" cy="274320"/>
+            <a:ext cx="8686800" cy="274320"/>
           </a:xfrm>
           <a:prstGeom prst="rect">
             <a:avLst/>
@@ -13117,7 +13349,7 @@
                 </a:solidFill>
                 <a:latin typeface="Arial"/>
               </a:rPr>
-              <a:t>BS 2.0 · анализ человека по видео · © 2026 AMLAI</a:t>
+              <a:t>BS 2.0 · анализ человека по видео · сделано в Claude Code, модель Fable 5.1, режим Ultracode · © 2026 AMLAI</a:t>
             </a:r>
           </a:p>
         </p:txBody>

--- a/BS2_проект_5_слайдов.pptx
+++ b/BS2_проект_5_слайдов.pptx
@@ -4317,7 +4317,7 @@
                 </a:solidFill>
                 <a:latin typeface="Arial"/>
               </a:rPr>
-              <a:t>Готовые модели, которые я не дообучал: CLIP — лицо, CLAP — голос, EmoRoBERTa — текст, Whisper — речь в текст, Qwen-VL — описание поведения по кадрам.</a:t>
+              <a:t>Модели, которые превращают лицо, голос и текст в наборы чисел. Готовые, я их не дообучал: CLIP — лицо, CLAP — голос, EmoRoBERTa — текст, Whisper — речь в текст, Qwen-VL — описание поведения по кадрам.</a:t>
             </a:r>
           </a:p>
         </p:txBody>
@@ -5659,13 +5659,13 @@
               </a:spcAft>
             </a:pPr>
             <a:r>
-              <a:rPr sz="1050" b="0" i="0">
+              <a:rPr sz="1000" b="0" i="0">
                 <a:solidFill>
                   <a:srgbClr val="27272A"/>
                 </a:solidFill>
                 <a:latin typeface="Arial"/>
               </a:rPr>
-              <a:t>30 кадров каждого отрезка → поиск лица (MediaPipe)</a:t>
+              <a:t>каждые 20 с: 30 кадров → поиск лица (MediaPipe)</a:t>
             </a:r>
           </a:p>
         </p:txBody>
@@ -5922,13 +5922,32 @@
               </a:spcAft>
             </a:pPr>
             <a:r>
-              <a:rPr sz="950" b="0" i="0">
+              <a:rPr sz="1000" b="1" i="0">
                 <a:solidFill>
                   <a:srgbClr val="27272A"/>
                 </a:solidFill>
                 <a:latin typeface="Arial"/>
               </a:rPr>
-              <a:t>вектор 1024</a:t>
+              <a:t>1024 числа</a:t>
+            </a:r>
+          </a:p>
+          <a:p>
+            <a:pPr algn="ctr">
+              <a:lnSpc>
+                <a:spcPct val="100000"/>
+              </a:lnSpc>
+              <a:spcAft>
+                <a:spcPts val="0"/>
+              </a:spcAft>
+            </a:pPr>
+            <a:r>
+              <a:rPr sz="800" b="0" i="0">
+                <a:solidFill>
+                  <a:srgbClr val="52525B"/>
+                </a:solidFill>
+                <a:latin typeface="Arial"/>
+              </a:rPr>
+              <a:t>признаки лица</a:t>
             </a:r>
           </a:p>
         </p:txBody>
@@ -6202,13 +6221,13 @@
               </a:spcAft>
             </a:pPr>
             <a:r>
-              <a:rPr sz="1050" b="0" i="0">
+              <a:rPr sz="1000" b="0" i="0">
                 <a:solidFill>
                   <a:srgbClr val="27272A"/>
                 </a:solidFill>
                 <a:latin typeface="Arial"/>
               </a:rPr>
-              <a:t>звуковая дорожка отрезка целиком</a:t>
+              <a:t>каждые 20 с: звук этих 20 секунд целиком</a:t>
             </a:r>
           </a:p>
         </p:txBody>
@@ -6465,13 +6484,32 @@
               </a:spcAft>
             </a:pPr>
             <a:r>
-              <a:rPr sz="950" b="0" i="0">
+              <a:rPr sz="1000" b="1" i="0">
                 <a:solidFill>
                   <a:srgbClr val="27272A"/>
                 </a:solidFill>
                 <a:latin typeface="Arial"/>
               </a:rPr>
-              <a:t>вектор 1536</a:t>
+              <a:t>1536 чисел</a:t>
+            </a:r>
+          </a:p>
+          <a:p>
+            <a:pPr algn="ctr">
+              <a:lnSpc>
+                <a:spcPct val="100000"/>
+              </a:lnSpc>
+              <a:spcAft>
+                <a:spcPts val="0"/>
+              </a:spcAft>
+            </a:pPr>
+            <a:r>
+              <a:rPr sz="800" b="0" i="0">
+                <a:solidFill>
+                  <a:srgbClr val="52525B"/>
+                </a:solidFill>
+                <a:latin typeface="Arial"/>
+              </a:rPr>
+              <a:t>признаки голоса</a:t>
             </a:r>
           </a:p>
         </p:txBody>
@@ -6745,13 +6783,13 @@
               </a:spcAft>
             </a:pPr>
             <a:r>
-              <a:rPr sz="1050" b="0" i="0">
+              <a:rPr sz="1000" b="0" i="0">
                 <a:solidFill>
                   <a:srgbClr val="27272A"/>
                 </a:solidFill>
                 <a:latin typeface="Arial"/>
               </a:rPr>
-              <a:t>Whisper → транскрипт всей речи отрезка</a:t>
+              <a:t>каждые 20 с: вся речь → Whisper → текст</a:t>
             </a:r>
           </a:p>
         </p:txBody>
@@ -7008,13 +7046,32 @@
               </a:spcAft>
             </a:pPr>
             <a:r>
-              <a:rPr sz="950" b="0" i="0">
+              <a:rPr sz="1000" b="1" i="0">
                 <a:solidFill>
                   <a:srgbClr val="27272A"/>
                 </a:solidFill>
                 <a:latin typeface="Arial"/>
               </a:rPr>
-              <a:t>вектор 1536</a:t>
+              <a:t>1536 чисел</a:t>
+            </a:r>
+          </a:p>
+          <a:p>
+            <a:pPr algn="ctr">
+              <a:lnSpc>
+                <a:spcPct val="100000"/>
+              </a:lnSpc>
+              <a:spcAft>
+                <a:spcPts val="0"/>
+              </a:spcAft>
+            </a:pPr>
+            <a:r>
+              <a:rPr sz="800" b="0" i="0">
+                <a:solidFill>
+                  <a:srgbClr val="52525B"/>
+                </a:solidFill>
+                <a:latin typeface="Arial"/>
+              </a:rPr>
+              <a:t>признаки текста</a:t>
             </a:r>
           </a:p>
         </p:txBody>
@@ -7288,13 +7345,13 @@
               </a:spcAft>
             </a:pPr>
             <a:r>
-              <a:rPr sz="1050" b="0" i="0">
+              <a:rPr sz="1000" b="0" i="0">
                 <a:solidFill>
                   <a:srgbClr val="27272A"/>
                 </a:solidFill>
                 <a:latin typeface="Arial"/>
               </a:rPr>
-              <a:t>16 кадров отрезка → Qwen-VL пишет описание</a:t>
+              <a:t>каждые 20 с: 16 кадров → Qwen-VL пишет, что делает человек</a:t>
             </a:r>
           </a:p>
         </p:txBody>
@@ -7551,13 +7608,32 @@
               </a:spcAft>
             </a:pPr>
             <a:r>
-              <a:rPr sz="950" b="0" i="0">
+              <a:rPr sz="1000" b="1" i="0">
                 <a:solidFill>
                   <a:srgbClr val="27272A"/>
                 </a:solidFill>
                 <a:latin typeface="Arial"/>
               </a:rPr>
-              <a:t>вектор 1536</a:t>
+              <a:t>1536 чисел</a:t>
+            </a:r>
+          </a:p>
+          <a:p>
+            <a:pPr algn="ctr">
+              <a:lnSpc>
+                <a:spcPct val="100000"/>
+              </a:lnSpc>
+              <a:spcAft>
+                <a:spcPts val="0"/>
+              </a:spcAft>
+            </a:pPr>
+            <a:r>
+              <a:rPr sz="800" b="0" i="0">
+                <a:solidFill>
+                  <a:srgbClr val="52525B"/>
+                </a:solidFill>
+                <a:latin typeface="Arial"/>
+              </a:rPr>
+              <a:t>признаки описания</a:t>
             </a:r>
           </a:p>
         </p:txBody>
@@ -8179,6 +8255,24 @@
                 </a:solidFill>
                 <a:latin typeface="Arial"/>
               </a:rPr>
+              <a:t>Что такое «1024 числа»: </a:t>
+            </a:r>
+            <a:r>
+              <a:rPr sz="1050" b="0" i="0">
+                <a:solidFill>
+                  <a:srgbClr val="27272A"/>
+                </a:solidFill>
+                <a:latin typeface="Arial"/>
+              </a:rPr>
+              <a:t>кодировщик сжимает лицо, голос или текст каждого 20-секундного отрезка в набор чисел фиксированной длины; слияние работает только с этими наборами. </a:t>
+            </a:r>
+            <a:r>
+              <a:rPr sz="1050" b="1" i="0">
+                <a:solidFill>
+                  <a:srgbClr val="27272A"/>
+                </a:solidFill>
+                <a:latin typeface="Arial"/>
+              </a:rPr>
               <a:t>Как обучал: </a:t>
             </a:r>
             <a:r>
@@ -8188,25 +8282,7 @@
                 </a:solidFill>
                 <a:latin typeface="Arial"/>
               </a:rPr>
-              <a:t>на 6000 роликах First Impressions V2, пять запусков и усреднение; </a:t>
-            </a:r>
-            <a:r>
-              <a:rPr sz="1050" b="1" i="0">
-                <a:solidFill>
-                  <a:srgbClr val="27272A"/>
-                </a:solidFill>
-                <a:latin typeface="Arial"/>
-              </a:rPr>
-              <a:t>ансамбль с OCEAN-AI </a:t>
-            </a:r>
-            <a:r>
-              <a:rPr sz="1050" b="0" i="0">
-                <a:solidFill>
-                  <a:srgbClr val="27272A"/>
-                </a:solidFill>
-                <a:latin typeface="Arial"/>
-              </a:rPr>
-              <a:t>точнее любой из двух систем по отдельности.</a:t>
+              <a:t>на 6000 роликах First Impressions V2, пять запусков и усреднение; ансамбль с OCEAN-AI точнее любой из двух систем.</a:t>
             </a:r>
           </a:p>
           <a:p>
@@ -8802,7 +8878,7 @@
                 </a:solidFill>
                 <a:latin typeface="Arial"/>
               </a:rPr>
-              <a:t>OCEAN-AI (лицо 5 кадров в секунду, голос, текст) + моя модель: основная оценка и второе мнение</a:t>
+              <a:t>каждые 20 с: OCEAN-AI (лицо 5 кадров в секунду, голос, текст) + моя модель — основная оценка и второе мнение</a:t>
             </a:r>
           </a:p>
         </p:txBody>
@@ -9008,7 +9084,7 @@
                 </a:solidFill>
                 <a:latin typeface="Arial"/>
               </a:rPr>
-              <a:t>EmoRoBERTa — семь эмоций по транскрипту каждого отрезка</a:t>
+              <a:t>каждые 20 с: EmoRoBERTa читает сказанное → семь эмоций</a:t>
             </a:r>
           </a:p>
         </p:txBody>
@@ -9214,7 +9290,7 @@
                 </a:solidFill>
                 <a:latin typeface="Arial"/>
               </a:rPr>
-              <a:t>wav2vec2 (audeering) — возбуждение, уверенность, позитивность</a:t>
+              <a:t>каждые 20 с: wav2vec2 слушает голос → возбуждение, уверенность, позитивность</a:t>
             </a:r>
           </a:p>
         </p:txBody>
@@ -9420,7 +9496,7 @@
                 </a:solidFill>
                 <a:latin typeface="Arial"/>
               </a:rPr>
-              <a:t>выражения лица (7 классов) по кадрам + движение головы</a:t>
+              <a:t>каждые 20 с: 12 кадров → выражение лица (7 классов) + движение головы</a:t>
             </a:r>
           </a:p>
         </p:txBody>
@@ -9626,7 +9702,7 @@
                 </a:solidFill>
                 <a:latin typeface="Arial"/>
               </a:rPr>
-              <a:t>темп, паузы, слова-заполнители, длина фразы, словарь — по транскрипту</a:t>
+              <a:t>по всему транскрипту: темп, паузы, слова-заполнители, длина фразы, словарь</a:t>
             </a:r>
           </a:p>
         </p:txBody>

--- a/BS2_проект_5_слайдов.pptx
+++ b/BS2_проект_5_слайдов.pptx
@@ -10,6 +10,8 @@
     <p:sldId id="258" r:id="rId9"/>
     <p:sldId id="259" r:id="rId10"/>
     <p:sldId id="260" r:id="rId11"/>
+    <p:sldId id="261" r:id="rId12"/>
+    <p:sldId id="262" r:id="rId13"/>
   </p:sldIdLst>
   <p:sldSz cx="12191695" cy="6858000" type="screen4x3"/>
   <p:notesSz cx="6858000" cy="9144000"/>
@@ -342,6 +344,273 @@
         <c:crossAx val="-2068027336"/>
         <c:crosses val="autoZero"/>
         <c:majorUnit val="0.1"/>
+      </c:valAx>
+    </c:plotArea>
+    <c:dispBlanksAs val="gap"/>
+  </c:chart>
+  <c:txPr>
+    <a:bodyPr/>
+    <a:lstStyle/>
+    <a:p>
+      <a:pPr>
+        <a:defRPr sz="1800"/>
+      </a:pPr>
+      <a:endParaRPr lang="en-US"/>
+    </a:p>
+  </c:txPr>
+  <c:externalData r:id="rId1">
+    <c:autoUpdate val="0"/>
+  </c:externalData>
+</c:chartSpace>
+</file>
+
+<file path=ppt/charts/chart2.xml><?xml version="1.0" encoding="utf-8"?>
+<c:chartSpace xmlns:c="http://schemas.openxmlformats.org/drawingml/2006/chart" xmlns:a="http://schemas.openxmlformats.org/drawingml/2006/main" xmlns:r="http://schemas.openxmlformats.org/officeDocument/2006/relationships">
+  <c:date1904 val="0"/>
+  <c:chart>
+    <c:title>
+      <c:tx>
+        <c:rich>
+          <a:bodyPr/>
+          <a:lstStyle/>
+          <a:p>
+            <a:r>
+              <a:rPr sz="1100" b="1">
+                <a:solidFill>
+                  <a:srgbClr val="27272A"/>
+                </a:solidFill>
+                <a:latin typeface="Arial"/>
+              </a:rPr>
+              <a:t>Что подняло совпадение с людьми (CCC на 1997 тестовых роликах)</a:t>
+            </a:r>
+          </a:p>
+        </c:rich>
+      </c:tx>
+      <c:layout/>
+      <c:overlay val="0"/>
+    </c:title>
+    <c:autoTitleDeleted val="0"/>
+    <c:plotArea>
+      <c:barChart>
+        <c:barDir val="col"/>
+        <c:grouping val="clustered"/>
+        <c:ser>
+          <c:idx val="0"/>
+          <c:order val="0"/>
+          <c:tx>
+            <c:strRef>
+              <c:f>Sheet1!$B$1</c:f>
+              <c:strCache>
+                <c:ptCount val="1"/>
+                <c:pt idx="0">
+                  <c:v>CCC</c:v>
+                </c:pt>
+              </c:strCache>
+            </c:strRef>
+          </c:tx>
+          <c:dPt>
+            <c:idx val="0"/>
+            <c:spPr>
+              <a:solidFill>
+                <a:srgbClr val="71717A"/>
+              </a:solidFill>
+            </c:spPr>
+          </c:dPt>
+          <c:dPt>
+            <c:idx val="1"/>
+            <c:spPr>
+              <a:solidFill>
+                <a:srgbClr val="0F766E"/>
+              </a:solidFill>
+            </c:spPr>
+          </c:dPt>
+          <c:dPt>
+            <c:idx val="2"/>
+            <c:spPr>
+              <a:solidFill>
+                <a:srgbClr val="0F766E"/>
+              </a:solidFill>
+            </c:spPr>
+          </c:dPt>
+          <c:dPt>
+            <c:idx val="3"/>
+            <c:spPr>
+              <a:solidFill>
+                <a:srgbClr val="0F766E"/>
+              </a:solidFill>
+            </c:spPr>
+          </c:dPt>
+          <c:dPt>
+            <c:idx val="4"/>
+            <c:spPr>
+              <a:solidFill>
+                <a:srgbClr val="C2410C"/>
+              </a:solidFill>
+            </c:spPr>
+          </c:dPt>
+          <c:cat>
+            <c:strRef>
+              <c:f>Sheet1!$A$2:$A$6</c:f>
+              <c:strCache>
+                <c:ptCount val="5"/>
+                <c:pt idx="0">
+                  <c:v>OCEAN-AI
+одна</c:v>
+                </c:pt>
+                <c:pt idx="1">
+                  <c:v>Моя: только
+лицо</c:v>
+                </c:pt>
+                <c:pt idx="2">
+                  <c:v>Моя: все 4
+модальности</c:v>
+                </c:pt>
+                <c:pt idx="3">
+                  <c:v>Моя: среднее
+5 запусков</c:v>
+                </c:pt>
+                <c:pt idx="4">
+                  <c:v>Среднее
+с OCEAN-AI</c:v>
+                </c:pt>
+              </c:strCache>
+            </c:strRef>
+          </c:cat>
+          <c:val>
+            <c:numRef>
+              <c:f>Sheet1!$B$2:$B$6</c:f>
+              <c:numCache>
+                <c:formatCode>General</c:formatCode>
+                <c:ptCount val="5"/>
+                <c:pt idx="0">
+                  <c:v>0.703</c:v>
+                </c:pt>
+                <c:pt idx="1">
+                  <c:v>0.69</c:v>
+                </c:pt>
+                <c:pt idx="2">
+                  <c:v>0.704</c:v>
+                </c:pt>
+                <c:pt idx="3">
+                  <c:v>0.715</c:v>
+                </c:pt>
+                <c:pt idx="4">
+                  <c:v>0.733</c:v>
+                </c:pt>
+              </c:numCache>
+            </c:numRef>
+          </c:val>
+        </c:ser>
+        <c:dLbls>
+          <c:numFmt formatCode="0.000" sourceLinked="0"/>
+          <c:txPr>
+            <a:bodyPr/>
+            <a:lstStyle/>
+            <a:p>
+              <a:pPr>
+                <a:defRPr sz="1050" b="1">
+                  <a:solidFill>
+                    <a:srgbClr val="27272A"/>
+                  </a:solidFill>
+                  <a:latin typeface="Arial"/>
+                </a:defRPr>
+              </a:pPr>
+            </a:p>
+          </c:txPr>
+          <c:dLblPos val="outEnd"/>
+          <c:showLegendKey val="0"/>
+          <c:showVal val="1"/>
+          <c:showCatName val="0"/>
+          <c:showSerName val="0"/>
+          <c:showPercent val="0"/>
+          <c:showBubbleSize val="0"/>
+          <c:showLeaderLines val="1"/>
+        </c:dLbls>
+        <c:gapWidth val="70"/>
+        <c:axId val="-2068027336"/>
+        <c:axId val="-2113994440"/>
+      </c:barChart>
+      <c:catAx>
+        <c:axId val="-2068027336"/>
+        <c:scaling>
+          <c:orientation val="minMax"/>
+        </c:scaling>
+        <c:delete val="0"/>
+        <c:axPos val="b"/>
+        <c:majorTickMark val="out"/>
+        <c:minorTickMark val="none"/>
+        <c:tickLblPos val="nextTo"/>
+        <c:spPr>
+          <a:ln>
+            <a:solidFill>
+              <a:srgbClr val="D4D4D8"/>
+            </a:solidFill>
+          </a:ln>
+        </c:spPr>
+        <c:txPr>
+          <a:bodyPr/>
+          <a:lstStyle/>
+          <a:p>
+            <a:pPr>
+              <a:defRPr sz="900">
+                <a:solidFill>
+                  <a:srgbClr val="27272A"/>
+                </a:solidFill>
+                <a:latin typeface="Arial"/>
+              </a:defRPr>
+            </a:pPr>
+          </a:p>
+        </c:txPr>
+        <c:crossAx val="-2113994440"/>
+        <c:crosses val="autoZero"/>
+        <c:auto val="1"/>
+        <c:lblAlgn val="ctr"/>
+        <c:lblOffset val="100"/>
+        <c:noMultiLvlLbl val="0"/>
+      </c:catAx>
+      <c:valAx>
+        <c:axId val="-2113994440"/>
+        <c:scaling>
+          <c:max val="0.76"/>
+          <c:min val="0.6"/>
+        </c:scaling>
+        <c:delete val="0"/>
+        <c:axPos val="l"/>
+        <c:majorGridlines>
+          <c:spPr>
+            <a:ln>
+              <a:solidFill>
+                <a:srgbClr val="D4D4D8"/>
+              </a:solidFill>
+            </a:ln>
+          </c:spPr>
+        </c:majorGridlines>
+        <c:numFmt formatCode="0.00" sourceLinked="0"/>
+        <c:majorTickMark val="out"/>
+        <c:minorTickMark val="none"/>
+        <c:tickLblPos val="nextTo"/>
+        <c:spPr>
+          <a:ln>
+            <a:noFill/>
+          </a:ln>
+        </c:spPr>
+        <c:txPr>
+          <a:bodyPr/>
+          <a:lstStyle/>
+          <a:p>
+            <a:pPr>
+              <a:defRPr sz="900">
+                <a:solidFill>
+                  <a:srgbClr val="52525B"/>
+                </a:solidFill>
+                <a:latin typeface="Arial"/>
+              </a:defRPr>
+            </a:pPr>
+          </a:p>
+        </c:txPr>
+        <c:crossAx val="-2068027336"/>
+        <c:crosses val="autoZero"/>
+        <c:majorUnit val="0.04"/>
       </c:valAx>
     </c:plotArea>
     <c:dispBlanksAs val="gap"/>
@@ -13391,6 +13660,4117 @@
       <p:sp>
         <p:nvSpPr>
           <p:cNvPr id="17" name="TextBox 16"/>
+          <p:cNvSpPr txBox="1"/>
+          <p:nvPr/>
+        </p:nvSpPr>
+        <p:spPr>
+          <a:xfrm>
+            <a:off x="548640" y="6446520"/>
+            <a:ext cx="8686800" cy="274320"/>
+          </a:xfrm>
+          <a:prstGeom prst="rect">
+            <a:avLst/>
+          </a:prstGeom>
+          <a:noFill/>
+        </p:spPr>
+        <p:txBody>
+          <a:bodyPr wrap="square" anchor="t" lIns="0" rIns="0" tIns="0" bIns="0">
+            <a:spAutoFit/>
+          </a:bodyPr>
+          <a:lstStyle/>
+          <a:p>
+            <a:pPr algn="l">
+              <a:lnSpc>
+                <a:spcPct val="110000"/>
+              </a:lnSpc>
+              <a:spcAft>
+                <a:spcPts val="0"/>
+              </a:spcAft>
+            </a:pPr>
+            <a:r>
+              <a:rPr sz="900" b="0" i="0">
+                <a:solidFill>
+                  <a:srgbClr val="71717A"/>
+                </a:solidFill>
+                <a:latin typeface="Arial"/>
+              </a:rPr>
+              <a:t>BS 2.0 · анализ человека по видео · сделано в Claude Code, модель Fable 5.1, режим Ultracode · © 2026 AMLAI</a:t>
+            </a:r>
+          </a:p>
+        </p:txBody>
+      </p:sp>
+    </p:spTree>
+  </p:cSld>
+  <p:clrMapOvr>
+    <a:masterClrMapping/>
+  </p:clrMapOvr>
+</p:sld>
+</file>
+
+<file path=ppt/slides/slide6.xml><?xml version="1.0" encoding="utf-8"?>
+<p:sld xmlns:a="http://schemas.openxmlformats.org/drawingml/2006/main" xmlns:p="http://schemas.openxmlformats.org/presentationml/2006/main" xmlns:r="http://schemas.openxmlformats.org/officeDocument/2006/relationships">
+  <p:cSld>
+    <p:bg>
+      <p:bgPr>
+        <a:solidFill>
+          <a:srgbClr val="FFFFFF"/>
+        </a:solidFill>
+        <a:effectLst/>
+      </p:bgPr>
+    </p:bg>
+    <p:spTree>
+      <p:nvGrpSpPr>
+        <p:cNvPr id="1" name=""/>
+        <p:cNvGrpSpPr/>
+        <p:nvPr/>
+      </p:nvGrpSpPr>
+      <p:grpSpPr/>
+      <p:sp>
+        <p:nvSpPr>
+          <p:cNvPr id="2" name="TextBox 1"/>
+          <p:cNvSpPr txBox="1"/>
+          <p:nvPr/>
+        </p:nvSpPr>
+        <p:spPr>
+          <a:xfrm>
+            <a:off x="548640" y="320040"/>
+            <a:ext cx="11064240" cy="640080"/>
+          </a:xfrm>
+          <a:prstGeom prst="rect">
+            <a:avLst/>
+          </a:prstGeom>
+          <a:noFill/>
+        </p:spPr>
+        <p:txBody>
+          <a:bodyPr wrap="square" anchor="t" lIns="0" rIns="0" tIns="0" bIns="0">
+            <a:spAutoFit/>
+          </a:bodyPr>
+          <a:lstStyle/>
+          <a:p>
+            <a:pPr algn="l">
+              <a:lnSpc>
+                <a:spcPct val="110000"/>
+              </a:lnSpc>
+              <a:spcAft>
+                <a:spcPts val="0"/>
+              </a:spcAft>
+            </a:pPr>
+            <a:r>
+              <a:rPr sz="3200" b="1" i="0">
+                <a:solidFill>
+                  <a:srgbClr val="27272A"/>
+                </a:solidFill>
+                <a:latin typeface="Arial"/>
+              </a:rPr>
+              <a:t>Моя модель: как обучал и что подняло точность</a:t>
+            </a:r>
+          </a:p>
+        </p:txBody>
+      </p:sp>
+      <p:sp>
+        <p:nvSpPr>
+          <p:cNvPr id="3" name="TextBox 2"/>
+          <p:cNvSpPr txBox="1"/>
+          <p:nvPr/>
+        </p:nvSpPr>
+        <p:spPr>
+          <a:xfrm>
+            <a:off x="548640" y="932688"/>
+            <a:ext cx="11064240" cy="365760"/>
+          </a:xfrm>
+          <a:prstGeom prst="rect">
+            <a:avLst/>
+          </a:prstGeom>
+          <a:noFill/>
+        </p:spPr>
+        <p:txBody>
+          <a:bodyPr wrap="square" anchor="t" lIns="0" rIns="0" tIns="0" bIns="0">
+            <a:spAutoFit/>
+          </a:bodyPr>
+          <a:lstStyle/>
+          <a:p>
+            <a:pPr algn="l">
+              <a:lnSpc>
+                <a:spcPct val="110000"/>
+              </a:lnSpc>
+              <a:spcAft>
+                <a:spcPts val="0"/>
+              </a:spcAft>
+            </a:pPr>
+            <a:r>
+              <a:rPr sz="1300" b="0" i="0">
+                <a:solidFill>
+                  <a:srgbClr val="52525B"/>
+                </a:solidFill>
+                <a:latin typeface="Arial"/>
+              </a:rPr>
+              <a:t>Обучение и проверка — на First Impressions V2; точность — совпадение с оценками людей на роликах, которых модель не видела</a:t>
+            </a:r>
+          </a:p>
+        </p:txBody>
+      </p:sp>
+      <p:sp>
+        <p:nvSpPr>
+          <p:cNvPr id="4" name="TextBox 3"/>
+          <p:cNvSpPr txBox="1"/>
+          <p:nvPr/>
+        </p:nvSpPr>
+        <p:spPr>
+          <a:xfrm>
+            <a:off x="548640" y="1463040"/>
+            <a:ext cx="11064240" cy="292608"/>
+          </a:xfrm>
+          <a:prstGeom prst="rect">
+            <a:avLst/>
+          </a:prstGeom>
+          <a:noFill/>
+        </p:spPr>
+        <p:txBody>
+          <a:bodyPr wrap="square" anchor="t" lIns="0" rIns="0" tIns="0" bIns="0">
+            <a:spAutoFit/>
+          </a:bodyPr>
+          <a:lstStyle/>
+          <a:p>
+            <a:pPr algn="l">
+              <a:lnSpc>
+                <a:spcPct val="110000"/>
+              </a:lnSpc>
+              <a:spcAft>
+                <a:spcPts val="0"/>
+              </a:spcAft>
+            </a:pPr>
+            <a:r>
+              <a:rPr sz="1200" b="1" i="0">
+                <a:solidFill>
+                  <a:srgbClr val="27272A"/>
+                </a:solidFill>
+                <a:latin typeface="Arial"/>
+              </a:rPr>
+              <a:t>Данные: 10 000 роликов по 15 с, заранее разделены составителями набора на три части</a:t>
+            </a:r>
+          </a:p>
+        </p:txBody>
+      </p:sp>
+      <p:sp>
+        <p:nvSpPr>
+          <p:cNvPr id="5" name="Rounded Rectangle 4"/>
+          <p:cNvSpPr/>
+          <p:nvPr/>
+        </p:nvSpPr>
+        <p:spPr>
+          <a:xfrm>
+            <a:off x="548640" y="1810512"/>
+            <a:ext cx="6600139" cy="420624"/>
+          </a:xfrm>
+          <a:prstGeom prst="roundRect">
+            <a:avLst>
+              <a:gd name="adj" fmla="val 13043"/>
+            </a:avLst>
+          </a:prstGeom>
+          <a:solidFill>
+            <a:srgbClr val="C2410C"/>
+          </a:solidFill>
+          <a:ln>
+            <a:noFill/>
+          </a:ln>
+          <a:effectLst/>
+        </p:spPr>
+        <p:style>
+          <a:lnRef idx="1">
+            <a:schemeClr val="accent1"/>
+          </a:lnRef>
+          <a:fillRef idx="3">
+            <a:schemeClr val="accent1"/>
+          </a:fillRef>
+          <a:effectRef idx="2">
+            <a:schemeClr val="accent1"/>
+          </a:effectRef>
+          <a:fontRef idx="minor">
+            <a:schemeClr val="lt1"/>
+          </a:fontRef>
+        </p:style>
+        <p:txBody>
+          <a:bodyPr rtlCol="0" anchor="ctr"/>
+          <a:lstStyle/>
+          <a:p/>
+        </p:txBody>
+      </p:sp>
+      <p:sp>
+        <p:nvSpPr>
+          <p:cNvPr id="6" name="TextBox 5"/>
+          <p:cNvSpPr txBox="1"/>
+          <p:nvPr/>
+        </p:nvSpPr>
+        <p:spPr>
+          <a:xfrm>
+            <a:off x="548640" y="1810512"/>
+            <a:ext cx="6600139" cy="420624"/>
+          </a:xfrm>
+          <a:prstGeom prst="rect">
+            <a:avLst/>
+          </a:prstGeom>
+          <a:noFill/>
+        </p:spPr>
+        <p:txBody>
+          <a:bodyPr wrap="square" anchor="ctr" lIns="0" rIns="0" tIns="0" bIns="0">
+            <a:spAutoFit/>
+          </a:bodyPr>
+          <a:lstStyle/>
+          <a:p>
+            <a:pPr algn="ctr">
+              <a:lnSpc>
+                <a:spcPct val="110000"/>
+              </a:lnSpc>
+              <a:spcAft>
+                <a:spcPts val="0"/>
+              </a:spcAft>
+            </a:pPr>
+            <a:r>
+              <a:rPr sz="1100" b="1" i="0">
+                <a:solidFill>
+                  <a:srgbClr val="FFFFFF"/>
+                </a:solidFill>
+                <a:latin typeface="Arial"/>
+              </a:rPr>
+              <a:t>Обучение — 6000 роликов (шаг 2)</a:t>
+            </a:r>
+          </a:p>
+        </p:txBody>
+      </p:sp>
+      <p:sp>
+        <p:nvSpPr>
+          <p:cNvPr id="7" name="Rounded Rectangle 6"/>
+          <p:cNvSpPr/>
+          <p:nvPr/>
+        </p:nvSpPr>
+        <p:spPr>
+          <a:xfrm>
+            <a:off x="7194499" y="1810512"/>
+            <a:ext cx="2200046" cy="420624"/>
+          </a:xfrm>
+          <a:prstGeom prst="roundRect">
+            <a:avLst>
+              <a:gd name="adj" fmla="val 13043"/>
+            </a:avLst>
+          </a:prstGeom>
+          <a:solidFill>
+            <a:srgbClr val="71717A"/>
+          </a:solidFill>
+          <a:ln>
+            <a:noFill/>
+          </a:ln>
+          <a:effectLst/>
+        </p:spPr>
+        <p:style>
+          <a:lnRef idx="1">
+            <a:schemeClr val="accent1"/>
+          </a:lnRef>
+          <a:fillRef idx="3">
+            <a:schemeClr val="accent1"/>
+          </a:fillRef>
+          <a:effectRef idx="2">
+            <a:schemeClr val="accent1"/>
+          </a:effectRef>
+          <a:fontRef idx="minor">
+            <a:schemeClr val="lt1"/>
+          </a:fontRef>
+        </p:style>
+        <p:txBody>
+          <a:bodyPr rtlCol="0" anchor="ctr"/>
+          <a:lstStyle/>
+          <a:p/>
+        </p:txBody>
+      </p:sp>
+      <p:sp>
+        <p:nvSpPr>
+          <p:cNvPr id="8" name="TextBox 7"/>
+          <p:cNvSpPr txBox="1"/>
+          <p:nvPr/>
+        </p:nvSpPr>
+        <p:spPr>
+          <a:xfrm>
+            <a:off x="7194499" y="1810512"/>
+            <a:ext cx="2200046" cy="420624"/>
+          </a:xfrm>
+          <a:prstGeom prst="rect">
+            <a:avLst/>
+          </a:prstGeom>
+          <a:noFill/>
+        </p:spPr>
+        <p:txBody>
+          <a:bodyPr wrap="square" anchor="ctr" lIns="0" rIns="0" tIns="0" bIns="0">
+            <a:spAutoFit/>
+          </a:bodyPr>
+          <a:lstStyle/>
+          <a:p>
+            <a:pPr algn="ctr">
+              <a:lnSpc>
+                <a:spcPct val="110000"/>
+              </a:lnSpc>
+              <a:spcAft>
+                <a:spcPts val="0"/>
+              </a:spcAft>
+            </a:pPr>
+            <a:r>
+              <a:rPr sz="1100" b="1" i="0">
+                <a:solidFill>
+                  <a:srgbClr val="FFFFFF"/>
+                </a:solidFill>
+                <a:latin typeface="Arial"/>
+              </a:rPr>
+              <a:t>Проверка — 2000 (шаг 3)</a:t>
+            </a:r>
+          </a:p>
+        </p:txBody>
+      </p:sp>
+      <p:sp>
+        <p:nvSpPr>
+          <p:cNvPr id="9" name="Rounded Rectangle 8"/>
+          <p:cNvSpPr/>
+          <p:nvPr/>
+        </p:nvSpPr>
+        <p:spPr>
+          <a:xfrm>
+            <a:off x="9440265" y="1810512"/>
+            <a:ext cx="2200046" cy="420624"/>
+          </a:xfrm>
+          <a:prstGeom prst="roundRect">
+            <a:avLst>
+              <a:gd name="adj" fmla="val 13043"/>
+            </a:avLst>
+          </a:prstGeom>
+          <a:solidFill>
+            <a:srgbClr val="27272A"/>
+          </a:solidFill>
+          <a:ln>
+            <a:noFill/>
+          </a:ln>
+          <a:effectLst/>
+        </p:spPr>
+        <p:style>
+          <a:lnRef idx="1">
+            <a:schemeClr val="accent1"/>
+          </a:lnRef>
+          <a:fillRef idx="3">
+            <a:schemeClr val="accent1"/>
+          </a:fillRef>
+          <a:effectRef idx="2">
+            <a:schemeClr val="accent1"/>
+          </a:effectRef>
+          <a:fontRef idx="minor">
+            <a:schemeClr val="lt1"/>
+          </a:fontRef>
+        </p:style>
+        <p:txBody>
+          <a:bodyPr rtlCol="0" anchor="ctr"/>
+          <a:lstStyle/>
+          <a:p/>
+        </p:txBody>
+      </p:sp>
+      <p:sp>
+        <p:nvSpPr>
+          <p:cNvPr id="10" name="TextBox 9"/>
+          <p:cNvSpPr txBox="1"/>
+          <p:nvPr/>
+        </p:nvSpPr>
+        <p:spPr>
+          <a:xfrm>
+            <a:off x="9440265" y="1810512"/>
+            <a:ext cx="2200046" cy="420624"/>
+          </a:xfrm>
+          <a:prstGeom prst="rect">
+            <a:avLst/>
+          </a:prstGeom>
+          <a:noFill/>
+        </p:spPr>
+        <p:txBody>
+          <a:bodyPr wrap="square" anchor="ctr" lIns="0" rIns="0" tIns="0" bIns="0">
+            <a:spAutoFit/>
+          </a:bodyPr>
+          <a:lstStyle/>
+          <a:p>
+            <a:pPr algn="ctr">
+              <a:lnSpc>
+                <a:spcPct val="110000"/>
+              </a:lnSpc>
+              <a:spcAft>
+                <a:spcPts val="0"/>
+              </a:spcAft>
+            </a:pPr>
+            <a:r>
+              <a:rPr sz="1100" b="1" i="0">
+                <a:solidFill>
+                  <a:srgbClr val="FFFFFF"/>
+                </a:solidFill>
+                <a:latin typeface="Arial"/>
+              </a:rPr>
+              <a:t>Тест — 2000 (шаг 5)</a:t>
+            </a:r>
+          </a:p>
+        </p:txBody>
+      </p:sp>
+      <p:sp>
+        <p:nvSpPr>
+          <p:cNvPr id="11" name="TextBox 10"/>
+          <p:cNvSpPr txBox="1"/>
+          <p:nvPr/>
+        </p:nvSpPr>
+        <p:spPr>
+          <a:xfrm>
+            <a:off x="548640" y="2304288"/>
+            <a:ext cx="11064240" cy="411480"/>
+          </a:xfrm>
+          <a:prstGeom prst="rect">
+            <a:avLst/>
+          </a:prstGeom>
+          <a:noFill/>
+        </p:spPr>
+        <p:txBody>
+          <a:bodyPr wrap="square" anchor="t" lIns="0" rIns="0" tIns="0" bIns="0">
+            <a:spAutoFit/>
+          </a:bodyPr>
+          <a:lstStyle/>
+          <a:p>
+            <a:pPr algn="l">
+              <a:lnSpc>
+                <a:spcPct val="105000"/>
+              </a:lnSpc>
+              <a:spcAft>
+                <a:spcPts val="0"/>
+              </a:spcAft>
+            </a:pPr>
+            <a:r>
+              <a:rPr sz="1000" b="0" i="0">
+                <a:solidFill>
+                  <a:srgbClr val="52525B"/>
+                </a:solidFill>
+                <a:latin typeface="Arial"/>
+              </a:rPr>
+              <a:t>Англоязычные блогеры говорят в камеру. Оценки людей: наблюдатели на Amazon Mechanical Turk сравнивали пары роликов («кто из двоих кажется общительнее»), из сравнений получена оценка от 0 до 1 по пяти чертам и «собеседованию».</a:t>
+            </a:r>
+          </a:p>
+        </p:txBody>
+      </p:sp>
+      <p:sp>
+        <p:nvSpPr>
+          <p:cNvPr id="12" name="TextBox 11"/>
+          <p:cNvSpPr txBox="1"/>
+          <p:nvPr/>
+        </p:nvSpPr>
+        <p:spPr>
+          <a:xfrm>
+            <a:off x="548640" y="2834640"/>
+            <a:ext cx="5303520" cy="274320"/>
+          </a:xfrm>
+          <a:prstGeom prst="rect">
+            <a:avLst/>
+          </a:prstGeom>
+          <a:noFill/>
+        </p:spPr>
+        <p:txBody>
+          <a:bodyPr wrap="square" anchor="t" lIns="0" rIns="0" tIns="0" bIns="0">
+            <a:spAutoFit/>
+          </a:bodyPr>
+          <a:lstStyle/>
+          <a:p>
+            <a:pPr algn="l">
+              <a:lnSpc>
+                <a:spcPct val="110000"/>
+              </a:lnSpc>
+              <a:spcAft>
+                <a:spcPts val="0"/>
+              </a:spcAft>
+            </a:pPr>
+            <a:r>
+              <a:rPr sz="1200" b="1" i="0">
+                <a:solidFill>
+                  <a:srgbClr val="27272A"/>
+                </a:solidFill>
+                <a:latin typeface="Arial"/>
+              </a:rPr>
+              <a:t>Как шло обучение</a:t>
+            </a:r>
+          </a:p>
+        </p:txBody>
+      </p:sp>
+      <p:sp>
+        <p:nvSpPr>
+          <p:cNvPr id="13" name="Oval 12"/>
+          <p:cNvSpPr/>
+          <p:nvPr/>
+        </p:nvSpPr>
+        <p:spPr>
+          <a:xfrm>
+            <a:off x="548640" y="3200400"/>
+            <a:ext cx="292608" cy="292608"/>
+          </a:xfrm>
+          <a:prstGeom prst="ellipse">
+            <a:avLst/>
+          </a:prstGeom>
+          <a:solidFill>
+            <a:srgbClr val="C2410C"/>
+          </a:solidFill>
+          <a:ln>
+            <a:noFill/>
+          </a:ln>
+          <a:effectLst/>
+        </p:spPr>
+        <p:style>
+          <a:lnRef idx="1">
+            <a:schemeClr val="accent1"/>
+          </a:lnRef>
+          <a:fillRef idx="3">
+            <a:schemeClr val="accent1"/>
+          </a:fillRef>
+          <a:effectRef idx="2">
+            <a:schemeClr val="accent1"/>
+          </a:effectRef>
+          <a:fontRef idx="minor">
+            <a:schemeClr val="lt1"/>
+          </a:fontRef>
+        </p:style>
+        <p:txBody>
+          <a:bodyPr rtlCol="0" anchor="ctr" lIns="0" rIns="0" tIns="0" bIns="0"/>
+          <a:lstStyle/>
+          <a:p>
+            <a:pPr algn="ctr"/>
+            <a:r>
+              <a:rPr sz="1100" b="1">
+                <a:solidFill>
+                  <a:srgbClr val="FFFFFF"/>
+                </a:solidFill>
+                <a:latin typeface="Arial"/>
+              </a:rPr>
+              <a:t>1</a:t>
+            </a:r>
+          </a:p>
+        </p:txBody>
+      </p:sp>
+      <p:sp>
+        <p:nvSpPr>
+          <p:cNvPr id="14" name="TextBox 13"/>
+          <p:cNvSpPr txBox="1"/>
+          <p:nvPr/>
+        </p:nvSpPr>
+        <p:spPr>
+          <a:xfrm>
+            <a:off x="960120" y="3182112"/>
+            <a:ext cx="4754880" cy="475488"/>
+          </a:xfrm>
+          <a:prstGeom prst="rect">
+            <a:avLst/>
+          </a:prstGeom>
+          <a:noFill/>
+        </p:spPr>
+        <p:txBody>
+          <a:bodyPr wrap="square" anchor="t" lIns="0" rIns="0" tIns="0" bIns="0">
+            <a:spAutoFit/>
+          </a:bodyPr>
+          <a:lstStyle/>
+          <a:p>
+            <a:pPr algn="l">
+              <a:lnSpc>
+                <a:spcPct val="105000"/>
+              </a:lnSpc>
+              <a:spcAft>
+                <a:spcPts val="0"/>
+              </a:spcAft>
+            </a:pPr>
+            <a:r>
+              <a:rPr sz="1000" b="1" i="0">
+                <a:solidFill>
+                  <a:srgbClr val="27272A"/>
+                </a:solidFill>
+                <a:latin typeface="Arial"/>
+              </a:rPr>
+              <a:t>Признаки — один раз. </a:t>
+            </a:r>
+            <a:r>
+              <a:rPr sz="1000" b="0" i="0">
+                <a:solidFill>
+                  <a:srgbClr val="52525B"/>
+                </a:solidFill>
+                <a:latin typeface="Arial"/>
+              </a:rPr>
+              <a:t>Готовые модели превратили все 10 000 роликов в наборы чисел за 48 минут; сами они не менялись.</a:t>
+            </a:r>
+          </a:p>
+        </p:txBody>
+      </p:sp>
+      <p:sp>
+        <p:nvSpPr>
+          <p:cNvPr id="15" name="Oval 14"/>
+          <p:cNvSpPr/>
+          <p:nvPr/>
+        </p:nvSpPr>
+        <p:spPr>
+          <a:xfrm>
+            <a:off x="548640" y="3657600"/>
+            <a:ext cx="292608" cy="292608"/>
+          </a:xfrm>
+          <a:prstGeom prst="ellipse">
+            <a:avLst/>
+          </a:prstGeom>
+          <a:solidFill>
+            <a:srgbClr val="C2410C"/>
+          </a:solidFill>
+          <a:ln>
+            <a:noFill/>
+          </a:ln>
+          <a:effectLst/>
+        </p:spPr>
+        <p:style>
+          <a:lnRef idx="1">
+            <a:schemeClr val="accent1"/>
+          </a:lnRef>
+          <a:fillRef idx="3">
+            <a:schemeClr val="accent1"/>
+          </a:fillRef>
+          <a:effectRef idx="2">
+            <a:schemeClr val="accent1"/>
+          </a:effectRef>
+          <a:fontRef idx="minor">
+            <a:schemeClr val="lt1"/>
+          </a:fontRef>
+        </p:style>
+        <p:txBody>
+          <a:bodyPr rtlCol="0" anchor="ctr" lIns="0" rIns="0" tIns="0" bIns="0"/>
+          <a:lstStyle/>
+          <a:p>
+            <a:pPr algn="ctr"/>
+            <a:r>
+              <a:rPr sz="1100" b="1">
+                <a:solidFill>
+                  <a:srgbClr val="FFFFFF"/>
+                </a:solidFill>
+                <a:latin typeface="Arial"/>
+              </a:rPr>
+              <a:t>2</a:t>
+            </a:r>
+          </a:p>
+        </p:txBody>
+      </p:sp>
+      <p:sp>
+        <p:nvSpPr>
+          <p:cNvPr id="16" name="TextBox 15"/>
+          <p:cNvSpPr txBox="1"/>
+          <p:nvPr/>
+        </p:nvSpPr>
+        <p:spPr>
+          <a:xfrm>
+            <a:off x="960120" y="3639312"/>
+            <a:ext cx="4754880" cy="475488"/>
+          </a:xfrm>
+          <a:prstGeom prst="rect">
+            <a:avLst/>
+          </a:prstGeom>
+          <a:noFill/>
+        </p:spPr>
+        <p:txBody>
+          <a:bodyPr wrap="square" anchor="t" lIns="0" rIns="0" tIns="0" bIns="0">
+            <a:spAutoFit/>
+          </a:bodyPr>
+          <a:lstStyle/>
+          <a:p>
+            <a:pPr algn="l">
+              <a:lnSpc>
+                <a:spcPct val="105000"/>
+              </a:lnSpc>
+              <a:spcAft>
+                <a:spcPts val="0"/>
+              </a:spcAft>
+            </a:pPr>
+            <a:r>
+              <a:rPr sz="1000" b="1" i="0">
+                <a:solidFill>
+                  <a:srgbClr val="27272A"/>
+                </a:solidFill>
+                <a:latin typeface="Arial"/>
+              </a:rPr>
+              <a:t>Обучение слияния </a:t>
+            </a:r>
+            <a:r>
+              <a:rPr sz="1000" b="0" i="0">
+                <a:solidFill>
+                  <a:srgbClr val="52525B"/>
+                </a:solidFill>
+                <a:latin typeface="Arial"/>
+              </a:rPr>
+              <a:t>на 5992 роликах: сеть выдаёт шесть оценок, сравнивает их с оценками людей и уменьшает ошибку.</a:t>
+            </a:r>
+          </a:p>
+        </p:txBody>
+      </p:sp>
+      <p:sp>
+        <p:nvSpPr>
+          <p:cNvPr id="17" name="Oval 16"/>
+          <p:cNvSpPr/>
+          <p:nvPr/>
+        </p:nvSpPr>
+        <p:spPr>
+          <a:xfrm>
+            <a:off x="548640" y="4114800"/>
+            <a:ext cx="292608" cy="292608"/>
+          </a:xfrm>
+          <a:prstGeom prst="ellipse">
+            <a:avLst/>
+          </a:prstGeom>
+          <a:solidFill>
+            <a:srgbClr val="C2410C"/>
+          </a:solidFill>
+          <a:ln>
+            <a:noFill/>
+          </a:ln>
+          <a:effectLst/>
+        </p:spPr>
+        <p:style>
+          <a:lnRef idx="1">
+            <a:schemeClr val="accent1"/>
+          </a:lnRef>
+          <a:fillRef idx="3">
+            <a:schemeClr val="accent1"/>
+          </a:fillRef>
+          <a:effectRef idx="2">
+            <a:schemeClr val="accent1"/>
+          </a:effectRef>
+          <a:fontRef idx="minor">
+            <a:schemeClr val="lt1"/>
+          </a:fontRef>
+        </p:style>
+        <p:txBody>
+          <a:bodyPr rtlCol="0" anchor="ctr" lIns="0" rIns="0" tIns="0" bIns="0"/>
+          <a:lstStyle/>
+          <a:p>
+            <a:pPr algn="ctr"/>
+            <a:r>
+              <a:rPr sz="1100" b="1">
+                <a:solidFill>
+                  <a:srgbClr val="FFFFFF"/>
+                </a:solidFill>
+                <a:latin typeface="Arial"/>
+              </a:rPr>
+              <a:t>3</a:t>
+            </a:r>
+          </a:p>
+        </p:txBody>
+      </p:sp>
+      <p:sp>
+        <p:nvSpPr>
+          <p:cNvPr id="18" name="TextBox 17"/>
+          <p:cNvSpPr txBox="1"/>
+          <p:nvPr/>
+        </p:nvSpPr>
+        <p:spPr>
+          <a:xfrm>
+            <a:off x="960120" y="4096512"/>
+            <a:ext cx="4754880" cy="475488"/>
+          </a:xfrm>
+          <a:prstGeom prst="rect">
+            <a:avLst/>
+          </a:prstGeom>
+          <a:noFill/>
+        </p:spPr>
+        <p:txBody>
+          <a:bodyPr wrap="square" anchor="t" lIns="0" rIns="0" tIns="0" bIns="0">
+            <a:spAutoFit/>
+          </a:bodyPr>
+          <a:lstStyle/>
+          <a:p>
+            <a:pPr algn="l">
+              <a:lnSpc>
+                <a:spcPct val="105000"/>
+              </a:lnSpc>
+              <a:spcAft>
+                <a:spcPts val="0"/>
+              </a:spcAft>
+            </a:pPr>
+            <a:r>
+              <a:rPr sz="1000" b="1" i="0">
+                <a:solidFill>
+                  <a:srgbClr val="27272A"/>
+                </a:solidFill>
+                <a:latin typeface="Arial"/>
+              </a:rPr>
+              <a:t>Выбор лучшей эпохи </a:t>
+            </a:r>
+            <a:r>
+              <a:rPr sz="1000" b="0" i="0">
+                <a:solidFill>
+                  <a:srgbClr val="52525B"/>
+                </a:solidFill>
+                <a:latin typeface="Arial"/>
+              </a:rPr>
+              <a:t>по проверочной части; если 15 эпох подряд лучше не становится — стоп.</a:t>
+            </a:r>
+          </a:p>
+        </p:txBody>
+      </p:sp>
+      <p:sp>
+        <p:nvSpPr>
+          <p:cNvPr id="19" name="Oval 18"/>
+          <p:cNvSpPr/>
+          <p:nvPr/>
+        </p:nvSpPr>
+        <p:spPr>
+          <a:xfrm>
+            <a:off x="548640" y="4572000"/>
+            <a:ext cx="292608" cy="292608"/>
+          </a:xfrm>
+          <a:prstGeom prst="ellipse">
+            <a:avLst/>
+          </a:prstGeom>
+          <a:solidFill>
+            <a:srgbClr val="C2410C"/>
+          </a:solidFill>
+          <a:ln>
+            <a:noFill/>
+          </a:ln>
+          <a:effectLst/>
+        </p:spPr>
+        <p:style>
+          <a:lnRef idx="1">
+            <a:schemeClr val="accent1"/>
+          </a:lnRef>
+          <a:fillRef idx="3">
+            <a:schemeClr val="accent1"/>
+          </a:fillRef>
+          <a:effectRef idx="2">
+            <a:schemeClr val="accent1"/>
+          </a:effectRef>
+          <a:fontRef idx="minor">
+            <a:schemeClr val="lt1"/>
+          </a:fontRef>
+        </p:style>
+        <p:txBody>
+          <a:bodyPr rtlCol="0" anchor="ctr" lIns="0" rIns="0" tIns="0" bIns="0"/>
+          <a:lstStyle/>
+          <a:p>
+            <a:pPr algn="ctr"/>
+            <a:r>
+              <a:rPr sz="1100" b="1">
+                <a:solidFill>
+                  <a:srgbClr val="FFFFFF"/>
+                </a:solidFill>
+                <a:latin typeface="Arial"/>
+              </a:rPr>
+              <a:t>4</a:t>
+            </a:r>
+          </a:p>
+        </p:txBody>
+      </p:sp>
+      <p:sp>
+        <p:nvSpPr>
+          <p:cNvPr id="20" name="TextBox 19"/>
+          <p:cNvSpPr txBox="1"/>
+          <p:nvPr/>
+        </p:nvSpPr>
+        <p:spPr>
+          <a:xfrm>
+            <a:off x="960120" y="4553712"/>
+            <a:ext cx="4754880" cy="475488"/>
+          </a:xfrm>
+          <a:prstGeom prst="rect">
+            <a:avLst/>
+          </a:prstGeom>
+          <a:noFill/>
+        </p:spPr>
+        <p:txBody>
+          <a:bodyPr wrap="square" anchor="t" lIns="0" rIns="0" tIns="0" bIns="0">
+            <a:spAutoFit/>
+          </a:bodyPr>
+          <a:lstStyle/>
+          <a:p>
+            <a:pPr algn="l">
+              <a:lnSpc>
+                <a:spcPct val="105000"/>
+              </a:lnSpc>
+              <a:spcAft>
+                <a:spcPts val="0"/>
+              </a:spcAft>
+            </a:pPr>
+            <a:r>
+              <a:rPr sz="1000" b="1" i="0">
+                <a:solidFill>
+                  <a:srgbClr val="27272A"/>
+                </a:solidFill>
+                <a:latin typeface="Arial"/>
+              </a:rPr>
+              <a:t>Пять запусков </a:t>
+            </a:r>
+            <a:r>
+              <a:rPr sz="1000" b="0" i="0">
+                <a:solidFill>
+                  <a:srgbClr val="52525B"/>
+                </a:solidFill>
+                <a:latin typeface="Arial"/>
+              </a:rPr>
+              <a:t>с разными случайными начальными весами, их оценки усредняются.</a:t>
+            </a:r>
+          </a:p>
+        </p:txBody>
+      </p:sp>
+      <p:sp>
+        <p:nvSpPr>
+          <p:cNvPr id="21" name="Oval 20"/>
+          <p:cNvSpPr/>
+          <p:nvPr/>
+        </p:nvSpPr>
+        <p:spPr>
+          <a:xfrm>
+            <a:off x="548640" y="5029200"/>
+            <a:ext cx="292608" cy="292608"/>
+          </a:xfrm>
+          <a:prstGeom prst="ellipse">
+            <a:avLst/>
+          </a:prstGeom>
+          <a:solidFill>
+            <a:srgbClr val="C2410C"/>
+          </a:solidFill>
+          <a:ln>
+            <a:noFill/>
+          </a:ln>
+          <a:effectLst/>
+        </p:spPr>
+        <p:style>
+          <a:lnRef idx="1">
+            <a:schemeClr val="accent1"/>
+          </a:lnRef>
+          <a:fillRef idx="3">
+            <a:schemeClr val="accent1"/>
+          </a:fillRef>
+          <a:effectRef idx="2">
+            <a:schemeClr val="accent1"/>
+          </a:effectRef>
+          <a:fontRef idx="minor">
+            <a:schemeClr val="lt1"/>
+          </a:fontRef>
+        </p:style>
+        <p:txBody>
+          <a:bodyPr rtlCol="0" anchor="ctr" lIns="0" rIns="0" tIns="0" bIns="0"/>
+          <a:lstStyle/>
+          <a:p>
+            <a:pPr algn="ctr"/>
+            <a:r>
+              <a:rPr sz="1100" b="1">
+                <a:solidFill>
+                  <a:srgbClr val="FFFFFF"/>
+                </a:solidFill>
+                <a:latin typeface="Arial"/>
+              </a:rPr>
+              <a:t>5</a:t>
+            </a:r>
+          </a:p>
+        </p:txBody>
+      </p:sp>
+      <p:sp>
+        <p:nvSpPr>
+          <p:cNvPr id="22" name="TextBox 21"/>
+          <p:cNvSpPr txBox="1"/>
+          <p:nvPr/>
+        </p:nvSpPr>
+        <p:spPr>
+          <a:xfrm>
+            <a:off x="960120" y="5010912"/>
+            <a:ext cx="4754880" cy="475488"/>
+          </a:xfrm>
+          <a:prstGeom prst="rect">
+            <a:avLst/>
+          </a:prstGeom>
+          <a:noFill/>
+        </p:spPr>
+        <p:txBody>
+          <a:bodyPr wrap="square" anchor="t" lIns="0" rIns="0" tIns="0" bIns="0">
+            <a:spAutoFit/>
+          </a:bodyPr>
+          <a:lstStyle/>
+          <a:p>
+            <a:pPr algn="l">
+              <a:lnSpc>
+                <a:spcPct val="105000"/>
+              </a:lnSpc>
+              <a:spcAft>
+                <a:spcPts val="0"/>
+              </a:spcAft>
+            </a:pPr>
+            <a:r>
+              <a:rPr sz="1000" b="1" i="0">
+                <a:solidFill>
+                  <a:srgbClr val="27272A"/>
+                </a:solidFill>
+                <a:latin typeface="Arial"/>
+              </a:rPr>
+              <a:t>Тест — один раз, в конце: </a:t>
+            </a:r>
+            <a:r>
+              <a:rPr sz="1000" b="0" i="0">
+                <a:solidFill>
+                  <a:srgbClr val="52525B"/>
+                </a:solidFill>
+                <a:latin typeface="Arial"/>
+              </a:rPr>
+              <a:t>1997 роликов, которых модель не видела; OCEAN-AI проверена на тех же роликах. На тесте ничего не подбиралось.</a:t>
+            </a:r>
+          </a:p>
+        </p:txBody>
+      </p:sp>
+      <p:graphicFrame>
+        <p:nvGraphicFramePr>
+          <p:cNvPr id="23" name="Chart 22"/>
+          <p:cNvGraphicFramePr>
+            <a:graphicFrameLocks noGrp="1"/>
+          </p:cNvGraphicFramePr>
+          <p:nvPr/>
+        </p:nvGraphicFramePr>
+        <p:xfrm>
+          <a:off x="5989320" y="2788920"/>
+          <a:ext cx="5669280" cy="2194560"/>
+        </p:xfrm>
+        <a:graphic>
+          <a:graphicData uri="http://schemas.openxmlformats.org/drawingml/2006/chart">
+            <c:chart xmlns:c="http://schemas.openxmlformats.org/drawingml/2006/chart" r:id="rId2"/>
+          </a:graphicData>
+        </a:graphic>
+      </p:graphicFrame>
+      <p:sp>
+        <p:nvSpPr>
+          <p:cNvPr id="24" name="TextBox 23"/>
+          <p:cNvSpPr txBox="1"/>
+          <p:nvPr/>
+        </p:nvSpPr>
+        <p:spPr>
+          <a:xfrm>
+            <a:off x="6080760" y="5001768"/>
+            <a:ext cx="5532120" cy="457200"/>
+          </a:xfrm>
+          <a:prstGeom prst="rect">
+            <a:avLst/>
+          </a:prstGeom>
+          <a:noFill/>
+        </p:spPr>
+        <p:txBody>
+          <a:bodyPr wrap="square" anchor="t" lIns="0" rIns="0" tIns="0" bIns="0">
+            <a:spAutoFit/>
+          </a:bodyPr>
+          <a:lstStyle/>
+          <a:p>
+            <a:pPr algn="l">
+              <a:lnSpc>
+                <a:spcPct val="103000"/>
+              </a:lnSpc>
+              <a:spcAft>
+                <a:spcPts val="0"/>
+              </a:spcAft>
+            </a:pPr>
+            <a:r>
+              <a:rPr sz="900" b="1" i="0">
+                <a:solidFill>
+                  <a:srgbClr val="52525B"/>
+                </a:solidFill>
+                <a:latin typeface="Arial"/>
+              </a:rPr>
+              <a:t>Голос, текст и описание </a:t>
+            </a:r>
+            <a:r>
+              <a:rPr sz="900" b="0" i="0">
+                <a:solidFill>
+                  <a:srgbClr val="52525B"/>
+                </a:solidFill>
+                <a:latin typeface="Arial"/>
+              </a:rPr>
+              <a:t>вместе добавили к лицу около 0.014, каждый по отдельности — в пределах случайного разброса. </a:t>
+            </a:r>
+            <a:r>
+              <a:rPr sz="900" b="1" i="0">
+                <a:solidFill>
+                  <a:srgbClr val="52525B"/>
+                </a:solidFill>
+                <a:latin typeface="Arial"/>
+              </a:rPr>
+              <a:t>Пять запусков </a:t>
+            </a:r>
+            <a:r>
+              <a:rPr sz="900" b="0" i="0">
+                <a:solidFill>
+                  <a:srgbClr val="52525B"/>
+                </a:solidFill>
+                <a:latin typeface="Arial"/>
+              </a:rPr>
+              <a:t>— ещё около 0.01. </a:t>
+            </a:r>
+            <a:r>
+              <a:rPr sz="900" b="1" i="0">
+                <a:solidFill>
+                  <a:srgbClr val="C2410C"/>
+                </a:solidFill>
+                <a:latin typeface="Arial"/>
+              </a:rPr>
+              <a:t>Сложение с OCEAN-AI </a:t>
+            </a:r>
+            <a:r>
+              <a:rPr sz="900" b="0" i="0">
+                <a:solidFill>
+                  <a:srgbClr val="52525B"/>
+                </a:solidFill>
+                <a:latin typeface="Arial"/>
+              </a:rPr>
+              <a:t>— +0.018, самый большой шаг. Ось начинается с 0.6.</a:t>
+            </a:r>
+          </a:p>
+        </p:txBody>
+      </p:sp>
+      <p:sp>
+        <p:nvSpPr>
+          <p:cNvPr id="25" name="Rounded Rectangle 24"/>
+          <p:cNvSpPr/>
+          <p:nvPr/>
+        </p:nvSpPr>
+        <p:spPr>
+          <a:xfrm>
+            <a:off x="548640" y="5559552"/>
+            <a:ext cx="5440680" cy="804672"/>
+          </a:xfrm>
+          <a:prstGeom prst="roundRect">
+            <a:avLst>
+              <a:gd name="adj" fmla="val 9090"/>
+            </a:avLst>
+          </a:prstGeom>
+          <a:solidFill>
+            <a:srgbClr val="F4F4F5"/>
+          </a:solidFill>
+          <a:ln>
+            <a:noFill/>
+          </a:ln>
+          <a:effectLst/>
+        </p:spPr>
+        <p:style>
+          <a:lnRef idx="1">
+            <a:schemeClr val="accent1"/>
+          </a:lnRef>
+          <a:fillRef idx="3">
+            <a:schemeClr val="accent1"/>
+          </a:fillRef>
+          <a:effectRef idx="2">
+            <a:schemeClr val="accent1"/>
+          </a:effectRef>
+          <a:fontRef idx="minor">
+            <a:schemeClr val="lt1"/>
+          </a:fontRef>
+        </p:style>
+        <p:txBody>
+          <a:bodyPr rtlCol="0" anchor="ctr"/>
+          <a:lstStyle/>
+          <a:p/>
+        </p:txBody>
+      </p:sp>
+      <p:sp>
+        <p:nvSpPr>
+          <p:cNvPr id="26" name="TextBox 25"/>
+          <p:cNvSpPr txBox="1"/>
+          <p:nvPr/>
+        </p:nvSpPr>
+        <p:spPr>
+          <a:xfrm>
+            <a:off x="713232" y="5596128"/>
+            <a:ext cx="5120640" cy="731520"/>
+          </a:xfrm>
+          <a:prstGeom prst="rect">
+            <a:avLst/>
+          </a:prstGeom>
+          <a:noFill/>
+        </p:spPr>
+        <p:txBody>
+          <a:bodyPr wrap="square" anchor="ctr" lIns="0" rIns="0" tIns="0" bIns="0">
+            <a:spAutoFit/>
+          </a:bodyPr>
+          <a:lstStyle/>
+          <a:p>
+            <a:pPr algn="l">
+              <a:lnSpc>
+                <a:spcPct val="105000"/>
+              </a:lnSpc>
+              <a:spcAft>
+                <a:spcPts val="0"/>
+              </a:spcAft>
+            </a:pPr>
+            <a:r>
+              <a:rPr sz="950" b="1" i="0">
+                <a:solidFill>
+                  <a:srgbClr val="C2410C"/>
+                </a:solidFill>
+                <a:latin typeface="Arial"/>
+              </a:rPr>
+              <a:t>Проверка, что это не случайность. </a:t>
+            </a:r>
+            <a:r>
+              <a:rPr sz="950" b="0" i="0">
+                <a:solidFill>
+                  <a:srgbClr val="27272A"/>
+                </a:solidFill>
+                <a:latin typeface="Arial"/>
+              </a:rPr>
+              <a:t>5000 раз перевыбрал тестовые ролики: ансамбль лучше OCEAN-AI во всех 5000 случаях, CCC +0.031 (от +0.024 до +0.037), рост у всех пяти черт. По средней ошибке выигрыш надёжный, но маленький: 0.0745 → 0.0726.</a:t>
+            </a:r>
+          </a:p>
+        </p:txBody>
+      </p:sp>
+      <p:sp>
+        <p:nvSpPr>
+          <p:cNvPr id="27" name="Rounded Rectangle 26"/>
+          <p:cNvSpPr/>
+          <p:nvPr/>
+        </p:nvSpPr>
+        <p:spPr>
+          <a:xfrm>
+            <a:off x="6199632" y="5559552"/>
+            <a:ext cx="5440680" cy="804672"/>
+          </a:xfrm>
+          <a:prstGeom prst="roundRect">
+            <a:avLst>
+              <a:gd name="adj" fmla="val 9090"/>
+            </a:avLst>
+          </a:prstGeom>
+          <a:solidFill>
+            <a:srgbClr val="F4F4F5"/>
+          </a:solidFill>
+          <a:ln>
+            <a:noFill/>
+          </a:ln>
+          <a:effectLst/>
+        </p:spPr>
+        <p:style>
+          <a:lnRef idx="1">
+            <a:schemeClr val="accent1"/>
+          </a:lnRef>
+          <a:fillRef idx="3">
+            <a:schemeClr val="accent1"/>
+          </a:fillRef>
+          <a:effectRef idx="2">
+            <a:schemeClr val="accent1"/>
+          </a:effectRef>
+          <a:fontRef idx="minor">
+            <a:schemeClr val="lt1"/>
+          </a:fontRef>
+        </p:style>
+        <p:txBody>
+          <a:bodyPr rtlCol="0" anchor="ctr"/>
+          <a:lstStyle/>
+          <a:p/>
+        </p:txBody>
+      </p:sp>
+      <p:sp>
+        <p:nvSpPr>
+          <p:cNvPr id="28" name="TextBox 27"/>
+          <p:cNvSpPr txBox="1"/>
+          <p:nvPr/>
+        </p:nvSpPr>
+        <p:spPr>
+          <a:xfrm>
+            <a:off x="6364224" y="5596128"/>
+            <a:ext cx="5120640" cy="731520"/>
+          </a:xfrm>
+          <a:prstGeom prst="rect">
+            <a:avLst/>
+          </a:prstGeom>
+          <a:noFill/>
+        </p:spPr>
+        <p:txBody>
+          <a:bodyPr wrap="square" anchor="ctr" lIns="0" rIns="0" tIns="0" bIns="0">
+            <a:spAutoFit/>
+          </a:bodyPr>
+          <a:lstStyle/>
+          <a:p>
+            <a:pPr algn="l">
+              <a:lnSpc>
+                <a:spcPct val="105000"/>
+              </a:lnSpc>
+              <a:spcAft>
+                <a:spcPts val="0"/>
+              </a:spcAft>
+            </a:pPr>
+            <a:r>
+              <a:rPr sz="950" b="1" i="0">
+                <a:solidFill>
+                  <a:srgbClr val="C2410C"/>
+                </a:solidFill>
+                <a:latin typeface="Arial"/>
+              </a:rPr>
+              <a:t>Чего эти цифры не говорят. </a:t>
+            </a:r>
+            <a:r>
+              <a:rPr sz="950" b="0" i="0">
+                <a:solidFill>
+                  <a:srgbClr val="27272A"/>
+                </a:solidFill>
+                <a:latin typeface="Arial"/>
+              </a:rPr>
+              <a:t>Это английские 15-секундные ролики с расшифровками речи, сделанными людьми; в программе расшифровка от Whisper и описания от Qwen2.5-VL стоят 0.1–0.3 п.п. точности. Для русской речи основная оценка сейчас — OCEAN-AI с весами MuPTA, моя модель — второе мнение.</a:t>
+            </a:r>
+          </a:p>
+        </p:txBody>
+      </p:sp>
+      <p:sp>
+        <p:nvSpPr>
+          <p:cNvPr id="29" name="TextBox 28"/>
+          <p:cNvSpPr txBox="1"/>
+          <p:nvPr/>
+        </p:nvSpPr>
+        <p:spPr>
+          <a:xfrm>
+            <a:off x="548640" y="6446520"/>
+            <a:ext cx="8686800" cy="274320"/>
+          </a:xfrm>
+          <a:prstGeom prst="rect">
+            <a:avLst/>
+          </a:prstGeom>
+          <a:noFill/>
+        </p:spPr>
+        <p:txBody>
+          <a:bodyPr wrap="square" anchor="t" lIns="0" rIns="0" tIns="0" bIns="0">
+            <a:spAutoFit/>
+          </a:bodyPr>
+          <a:lstStyle/>
+          <a:p>
+            <a:pPr algn="l">
+              <a:lnSpc>
+                <a:spcPct val="110000"/>
+              </a:lnSpc>
+              <a:spcAft>
+                <a:spcPts val="0"/>
+              </a:spcAft>
+            </a:pPr>
+            <a:r>
+              <a:rPr sz="900" b="0" i="0">
+                <a:solidFill>
+                  <a:srgbClr val="71717A"/>
+                </a:solidFill>
+                <a:latin typeface="Arial"/>
+              </a:rPr>
+              <a:t>BS 2.0 · анализ человека по видео · сделано в Claude Code, модель Fable 5.1, режим Ultracode · © 2026 AMLAI</a:t>
+            </a:r>
+          </a:p>
+        </p:txBody>
+      </p:sp>
+    </p:spTree>
+  </p:cSld>
+  <p:clrMapOvr>
+    <a:masterClrMapping/>
+  </p:clrMapOvr>
+</p:sld>
+</file>
+
+<file path=ppt/slides/slide7.xml><?xml version="1.0" encoding="utf-8"?>
+<p:sld xmlns:a="http://schemas.openxmlformats.org/drawingml/2006/main" xmlns:p="http://schemas.openxmlformats.org/presentationml/2006/main" xmlns:r="http://schemas.openxmlformats.org/officeDocument/2006/relationships">
+  <p:cSld>
+    <p:bg>
+      <p:bgPr>
+        <a:solidFill>
+          <a:srgbClr val="FFFFFF"/>
+        </a:solidFill>
+        <a:effectLst/>
+      </p:bgPr>
+    </p:bg>
+    <p:spTree>
+      <p:nvGrpSpPr>
+        <p:cNvPr id="1" name=""/>
+        <p:cNvGrpSpPr/>
+        <p:nvPr/>
+      </p:nvGrpSpPr>
+      <p:grpSpPr/>
+      <p:sp>
+        <p:nvSpPr>
+          <p:cNvPr id="2" name="TextBox 1"/>
+          <p:cNvSpPr txBox="1"/>
+          <p:nvPr/>
+        </p:nvSpPr>
+        <p:spPr>
+          <a:xfrm>
+            <a:off x="548640" y="320040"/>
+            <a:ext cx="11064240" cy="640080"/>
+          </a:xfrm>
+          <a:prstGeom prst="rect">
+            <a:avLst/>
+          </a:prstGeom>
+          <a:noFill/>
+        </p:spPr>
+        <p:txBody>
+          <a:bodyPr wrap="square" anchor="t" lIns="0" rIns="0" tIns="0" bIns="0">
+            <a:spAutoFit/>
+          </a:bodyPr>
+          <a:lstStyle/>
+          <a:p>
+            <a:pPr algn="l">
+              <a:lnSpc>
+                <a:spcPct val="110000"/>
+              </a:lnSpc>
+              <a:spcAft>
+                <a:spcPts val="0"/>
+              </a:spcAft>
+            </a:pPr>
+            <a:r>
+              <a:rPr sz="3200" b="1" i="0">
+                <a:solidFill>
+                  <a:srgbClr val="27272A"/>
+                </a:solidFill>
+                <a:latin typeface="Arial"/>
+              </a:rPr>
+              <a:t>OCEAN-AI: как она смотрит ролик</a:t>
+            </a:r>
+          </a:p>
+        </p:txBody>
+      </p:sp>
+      <p:sp>
+        <p:nvSpPr>
+          <p:cNvPr id="3" name="TextBox 2"/>
+          <p:cNvSpPr txBox="1"/>
+          <p:nvPr/>
+        </p:nvSpPr>
+        <p:spPr>
+          <a:xfrm>
+            <a:off x="548640" y="932688"/>
+            <a:ext cx="11064240" cy="365760"/>
+          </a:xfrm>
+          <a:prstGeom prst="rect">
+            <a:avLst/>
+          </a:prstGeom>
+          <a:noFill/>
+        </p:spPr>
+        <p:txBody>
+          <a:bodyPr wrap="square" anchor="t" lIns="0" rIns="0" tIns="0" bIns="0">
+            <a:spAutoFit/>
+          </a:bodyPr>
+          <a:lstStyle/>
+          <a:p>
+            <a:pPr algn="l">
+              <a:lnSpc>
+                <a:spcPct val="110000"/>
+              </a:lnSpc>
+              <a:spcAft>
+                <a:spcPts val="0"/>
+              </a:spcAft>
+            </a:pPr>
+            <a:r>
+              <a:rPr sz="1300" b="0" i="0">
+                <a:solidFill>
+                  <a:srgbClr val="52525B"/>
+                </a:solidFill>
+                <a:latin typeface="Arial"/>
+              </a:rPr>
+              <a:t>Готовая система авторов из СПб ФИЦ РАН: ролик раскладывается на кадры, звук и текст, у каждого потока своя сеть, в конце — слияние</a:t>
+            </a:r>
+          </a:p>
+        </p:txBody>
+      </p:sp>
+      <p:sp>
+        <p:nvSpPr>
+          <p:cNvPr id="4" name="Rounded Rectangle 3"/>
+          <p:cNvSpPr/>
+          <p:nvPr/>
+        </p:nvSpPr>
+        <p:spPr>
+          <a:xfrm>
+            <a:off x="548640" y="1481328"/>
+            <a:ext cx="1051560" cy="603504"/>
+          </a:xfrm>
+          <a:prstGeom prst="roundRect">
+            <a:avLst>
+              <a:gd name="adj" fmla="val 12121"/>
+            </a:avLst>
+          </a:prstGeom>
+          <a:solidFill>
+            <a:srgbClr val="1D4ED8"/>
+          </a:solidFill>
+          <a:ln>
+            <a:noFill/>
+          </a:ln>
+          <a:effectLst/>
+        </p:spPr>
+        <p:style>
+          <a:lnRef idx="1">
+            <a:schemeClr val="accent1"/>
+          </a:lnRef>
+          <a:fillRef idx="3">
+            <a:schemeClr val="accent1"/>
+          </a:fillRef>
+          <a:effectRef idx="2">
+            <a:schemeClr val="accent1"/>
+          </a:effectRef>
+          <a:fontRef idx="minor">
+            <a:schemeClr val="lt1"/>
+          </a:fontRef>
+        </p:style>
+        <p:txBody>
+          <a:bodyPr rtlCol="0" anchor="ctr"/>
+          <a:lstStyle/>
+          <a:p/>
+        </p:txBody>
+      </p:sp>
+      <p:sp>
+        <p:nvSpPr>
+          <p:cNvPr id="5" name="TextBox 4"/>
+          <p:cNvSpPr txBox="1"/>
+          <p:nvPr/>
+        </p:nvSpPr>
+        <p:spPr>
+          <a:xfrm>
+            <a:off x="621792" y="1481328"/>
+            <a:ext cx="905255" cy="603504"/>
+          </a:xfrm>
+          <a:prstGeom prst="rect">
+            <a:avLst/>
+          </a:prstGeom>
+          <a:noFill/>
+        </p:spPr>
+        <p:txBody>
+          <a:bodyPr wrap="square" anchor="ctr" lIns="0" rIns="0" tIns="0" bIns="0">
+            <a:spAutoFit/>
+          </a:bodyPr>
+          <a:lstStyle/>
+          <a:p>
+            <a:pPr algn="ctr">
+              <a:lnSpc>
+                <a:spcPct val="100000"/>
+              </a:lnSpc>
+              <a:spcAft>
+                <a:spcPts val="0"/>
+              </a:spcAft>
+            </a:pPr>
+            <a:r>
+              <a:rPr sz="1200" b="1" i="0">
+                <a:solidFill>
+                  <a:srgbClr val="FFFFFF"/>
+                </a:solidFill>
+                <a:latin typeface="Arial"/>
+              </a:rPr>
+              <a:t>Лицо</a:t>
+            </a:r>
+          </a:p>
+        </p:txBody>
+      </p:sp>
+      <p:sp>
+        <p:nvSpPr>
+          <p:cNvPr id="6" name="Rounded Rectangle 5"/>
+          <p:cNvSpPr/>
+          <p:nvPr/>
+        </p:nvSpPr>
+        <p:spPr>
+          <a:xfrm>
+            <a:off x="1783080" y="1481328"/>
+            <a:ext cx="2240280" cy="603504"/>
+          </a:xfrm>
+          <a:prstGeom prst="roundRect">
+            <a:avLst>
+              <a:gd name="adj" fmla="val 12121"/>
+            </a:avLst>
+          </a:prstGeom>
+          <a:solidFill>
+            <a:srgbClr val="F4F4F5"/>
+          </a:solidFill>
+          <a:ln>
+            <a:noFill/>
+          </a:ln>
+          <a:effectLst/>
+        </p:spPr>
+        <p:style>
+          <a:lnRef idx="1">
+            <a:schemeClr val="accent1"/>
+          </a:lnRef>
+          <a:fillRef idx="3">
+            <a:schemeClr val="accent1"/>
+          </a:fillRef>
+          <a:effectRef idx="2">
+            <a:schemeClr val="accent1"/>
+          </a:effectRef>
+          <a:fontRef idx="minor">
+            <a:schemeClr val="lt1"/>
+          </a:fontRef>
+        </p:style>
+        <p:txBody>
+          <a:bodyPr rtlCol="0" anchor="ctr"/>
+          <a:lstStyle/>
+          <a:p/>
+        </p:txBody>
+      </p:sp>
+      <p:sp>
+        <p:nvSpPr>
+          <p:cNvPr id="7" name="TextBox 6"/>
+          <p:cNvSpPr txBox="1"/>
+          <p:nvPr/>
+        </p:nvSpPr>
+        <p:spPr>
+          <a:xfrm>
+            <a:off x="1856231" y="1481328"/>
+            <a:ext cx="2093976" cy="603504"/>
+          </a:xfrm>
+          <a:prstGeom prst="rect">
+            <a:avLst/>
+          </a:prstGeom>
+          <a:noFill/>
+        </p:spPr>
+        <p:txBody>
+          <a:bodyPr wrap="square" anchor="ctr" lIns="0" rIns="0" tIns="0" bIns="0">
+            <a:spAutoFit/>
+          </a:bodyPr>
+          <a:lstStyle/>
+          <a:p>
+            <a:pPr algn="ctr">
+              <a:lnSpc>
+                <a:spcPct val="100000"/>
+              </a:lnSpc>
+              <a:spcAft>
+                <a:spcPts val="0"/>
+              </a:spcAft>
+            </a:pPr>
+            <a:r>
+              <a:rPr sz="950" b="0" i="0">
+                <a:solidFill>
+                  <a:srgbClr val="27272A"/>
+                </a:solidFill>
+                <a:latin typeface="Arial"/>
+              </a:rPr>
+              <a:t>5 кадров в секунду → 468 точек лица (MediaPipe FaceMesh)</a:t>
+            </a:r>
+          </a:p>
+        </p:txBody>
+      </p:sp>
+      <p:sp>
+        <p:nvSpPr>
+          <p:cNvPr id="8" name="Rounded Rectangle 7"/>
+          <p:cNvSpPr/>
+          <p:nvPr/>
+        </p:nvSpPr>
+        <p:spPr>
+          <a:xfrm>
+            <a:off x="4206240" y="1481328"/>
+            <a:ext cx="2514600" cy="603504"/>
+          </a:xfrm>
+          <a:prstGeom prst="roundRect">
+            <a:avLst>
+              <a:gd name="adj" fmla="val 12121"/>
+            </a:avLst>
+          </a:prstGeom>
+          <a:solidFill>
+            <a:srgbClr val="F4F4F5"/>
+          </a:solidFill>
+          <a:ln>
+            <a:noFill/>
+          </a:ln>
+          <a:effectLst/>
+        </p:spPr>
+        <p:style>
+          <a:lnRef idx="1">
+            <a:schemeClr val="accent1"/>
+          </a:lnRef>
+          <a:fillRef idx="3">
+            <a:schemeClr val="accent1"/>
+          </a:fillRef>
+          <a:effectRef idx="2">
+            <a:schemeClr val="accent1"/>
+          </a:effectRef>
+          <a:fontRef idx="minor">
+            <a:schemeClr val="lt1"/>
+          </a:fontRef>
+        </p:style>
+        <p:txBody>
+          <a:bodyPr rtlCol="0" anchor="ctr"/>
+          <a:lstStyle/>
+          <a:p/>
+        </p:txBody>
+      </p:sp>
+      <p:sp>
+        <p:nvSpPr>
+          <p:cNvPr id="9" name="TextBox 8"/>
+          <p:cNvSpPr txBox="1"/>
+          <p:nvPr/>
+        </p:nvSpPr>
+        <p:spPr>
+          <a:xfrm>
+            <a:off x="4279392" y="1481328"/>
+            <a:ext cx="2368296" cy="603504"/>
+          </a:xfrm>
+          <a:prstGeom prst="rect">
+            <a:avLst/>
+          </a:prstGeom>
+          <a:noFill/>
+        </p:spPr>
+        <p:txBody>
+          <a:bodyPr wrap="square" anchor="ctr" lIns="0" rIns="0" tIns="0" bIns="0">
+            <a:spAutoFit/>
+          </a:bodyPr>
+          <a:lstStyle/>
+          <a:p>
+            <a:pPr algn="ctr">
+              <a:lnSpc>
+                <a:spcPct val="100000"/>
+              </a:lnSpc>
+              <a:spcAft>
+                <a:spcPts val="0"/>
+              </a:spcAft>
+            </a:pPr>
+            <a:r>
+              <a:rPr sz="950" b="0" i="0">
+                <a:solidFill>
+                  <a:srgbClr val="27272A"/>
+                </a:solidFill>
+                <a:latin typeface="Arial"/>
+              </a:rPr>
+              <a:t>расстояния между точками + картинка лица через ResNet50</a:t>
+            </a:r>
+          </a:p>
+        </p:txBody>
+      </p:sp>
+      <p:sp>
+        <p:nvSpPr>
+          <p:cNvPr id="10" name="Rounded Rectangle 9"/>
+          <p:cNvSpPr/>
+          <p:nvPr/>
+        </p:nvSpPr>
+        <p:spPr>
+          <a:xfrm>
+            <a:off x="6903720" y="1481328"/>
+            <a:ext cx="1874519" cy="603504"/>
+          </a:xfrm>
+          <a:prstGeom prst="roundRect">
+            <a:avLst>
+              <a:gd name="adj" fmla="val 12121"/>
+            </a:avLst>
+          </a:prstGeom>
+          <a:solidFill>
+            <a:srgbClr val="DBEAFE"/>
+          </a:solidFill>
+          <a:ln>
+            <a:noFill/>
+          </a:ln>
+          <a:effectLst/>
+        </p:spPr>
+        <p:style>
+          <a:lnRef idx="1">
+            <a:schemeClr val="accent1"/>
+          </a:lnRef>
+          <a:fillRef idx="3">
+            <a:schemeClr val="accent1"/>
+          </a:fillRef>
+          <a:effectRef idx="2">
+            <a:schemeClr val="accent1"/>
+          </a:effectRef>
+          <a:fontRef idx="minor">
+            <a:schemeClr val="lt1"/>
+          </a:fontRef>
+        </p:style>
+        <p:txBody>
+          <a:bodyPr rtlCol="0" anchor="ctr"/>
+          <a:lstStyle/>
+          <a:p/>
+        </p:txBody>
+      </p:sp>
+      <p:sp>
+        <p:nvSpPr>
+          <p:cNvPr id="11" name="TextBox 10"/>
+          <p:cNvSpPr txBox="1"/>
+          <p:nvPr/>
+        </p:nvSpPr>
+        <p:spPr>
+          <a:xfrm>
+            <a:off x="6976872" y="1481328"/>
+            <a:ext cx="1728216" cy="603504"/>
+          </a:xfrm>
+          <a:prstGeom prst="rect">
+            <a:avLst/>
+          </a:prstGeom>
+          <a:noFill/>
+        </p:spPr>
+        <p:txBody>
+          <a:bodyPr wrap="square" anchor="ctr" lIns="0" rIns="0" tIns="0" bIns="0">
+            <a:spAutoFit/>
+          </a:bodyPr>
+          <a:lstStyle/>
+          <a:p>
+            <a:pPr algn="ctr">
+              <a:lnSpc>
+                <a:spcPct val="100000"/>
+              </a:lnSpc>
+              <a:spcAft>
+                <a:spcPts val="0"/>
+              </a:spcAft>
+            </a:pPr>
+            <a:r>
+              <a:rPr sz="950" b="0" i="0">
+                <a:solidFill>
+                  <a:srgbClr val="27272A"/>
+                </a:solidFill>
+                <a:latin typeface="Arial"/>
+              </a:rPr>
+              <a:t>LSTM по окнам 2 с: видит, как меняется мимика</a:t>
+            </a:r>
+          </a:p>
+          <a:p>
+            <a:pPr algn="ctr">
+              <a:lnSpc>
+                <a:spcPct val="100000"/>
+              </a:lnSpc>
+              <a:spcAft>
+                <a:spcPts val="0"/>
+              </a:spcAft>
+            </a:pPr>
+            <a:r>
+              <a:rPr sz="800" b="0" i="0">
+                <a:solidFill>
+                  <a:srgbClr val="52525B"/>
+                </a:solidFill>
+                <a:latin typeface="Arial"/>
+              </a:rPr>
+              <a:t>готовые веса</a:t>
+            </a:r>
+          </a:p>
+        </p:txBody>
+      </p:sp>
+      <p:cxnSp>
+        <p:nvCxnSpPr>
+          <p:cNvPr id="12" name="Connector 11"/>
+          <p:cNvCxnSpPr/>
+          <p:nvPr/>
+        </p:nvCxnSpPr>
+        <p:spPr>
+          <a:xfrm>
+            <a:off x="1627632" y="1783080"/>
+            <a:ext cx="128016" cy="0"/>
+          </a:xfrm>
+          <a:prstGeom prst="line">
+            <a:avLst/>
+          </a:prstGeom>
+          <a:ln w="19050">
+            <a:solidFill>
+              <a:srgbClr val="71717A"/>
+            </a:solidFill>
+            <a:tailEnd type="triangle" w="med" len="med"/>
+          </a:ln>
+        </p:spPr>
+        <p:style>
+          <a:lnRef idx="2">
+            <a:schemeClr val="accent1"/>
+          </a:lnRef>
+          <a:fillRef idx="0">
+            <a:schemeClr val="accent1"/>
+          </a:fillRef>
+          <a:effectRef idx="1">
+            <a:schemeClr val="accent1"/>
+          </a:effectRef>
+          <a:fontRef idx="minor">
+            <a:schemeClr val="tx1"/>
+          </a:fontRef>
+        </p:style>
+      </p:cxnSp>
+      <p:cxnSp>
+        <p:nvCxnSpPr>
+          <p:cNvPr id="13" name="Connector 12"/>
+          <p:cNvCxnSpPr/>
+          <p:nvPr/>
+        </p:nvCxnSpPr>
+        <p:spPr>
+          <a:xfrm>
+            <a:off x="4050792" y="1783080"/>
+            <a:ext cx="128015" cy="0"/>
+          </a:xfrm>
+          <a:prstGeom prst="line">
+            <a:avLst/>
+          </a:prstGeom>
+          <a:ln w="19050">
+            <a:solidFill>
+              <a:srgbClr val="71717A"/>
+            </a:solidFill>
+            <a:tailEnd type="triangle" w="med" len="med"/>
+          </a:ln>
+        </p:spPr>
+        <p:style>
+          <a:lnRef idx="2">
+            <a:schemeClr val="accent1"/>
+          </a:lnRef>
+          <a:fillRef idx="0">
+            <a:schemeClr val="accent1"/>
+          </a:fillRef>
+          <a:effectRef idx="1">
+            <a:schemeClr val="accent1"/>
+          </a:effectRef>
+          <a:fontRef idx="minor">
+            <a:schemeClr val="tx1"/>
+          </a:fontRef>
+        </p:style>
+      </p:cxnSp>
+      <p:cxnSp>
+        <p:nvCxnSpPr>
+          <p:cNvPr id="14" name="Connector 13"/>
+          <p:cNvCxnSpPr/>
+          <p:nvPr/>
+        </p:nvCxnSpPr>
+        <p:spPr>
+          <a:xfrm>
+            <a:off x="6748272" y="1783080"/>
+            <a:ext cx="128016" cy="0"/>
+          </a:xfrm>
+          <a:prstGeom prst="line">
+            <a:avLst/>
+          </a:prstGeom>
+          <a:ln w="19050">
+            <a:solidFill>
+              <a:srgbClr val="71717A"/>
+            </a:solidFill>
+            <a:tailEnd type="triangle" w="med" len="med"/>
+          </a:ln>
+        </p:spPr>
+        <p:style>
+          <a:lnRef idx="2">
+            <a:schemeClr val="accent1"/>
+          </a:lnRef>
+          <a:fillRef idx="0">
+            <a:schemeClr val="accent1"/>
+          </a:fillRef>
+          <a:effectRef idx="1">
+            <a:schemeClr val="accent1"/>
+          </a:effectRef>
+          <a:fontRef idx="minor">
+            <a:schemeClr val="tx1"/>
+          </a:fontRef>
+        </p:style>
+      </p:cxnSp>
+      <p:cxnSp>
+        <p:nvCxnSpPr>
+          <p:cNvPr id="15" name="Connector 14"/>
+          <p:cNvCxnSpPr/>
+          <p:nvPr/>
+        </p:nvCxnSpPr>
+        <p:spPr>
+          <a:xfrm>
+            <a:off x="8805672" y="1783080"/>
+            <a:ext cx="219456" cy="0"/>
+          </a:xfrm>
+          <a:prstGeom prst="line">
+            <a:avLst/>
+          </a:prstGeom>
+          <a:ln w="19050">
+            <a:solidFill>
+              <a:srgbClr val="71717A"/>
+            </a:solidFill>
+            <a:tailEnd type="triangle" w="med" len="med"/>
+          </a:ln>
+        </p:spPr>
+        <p:style>
+          <a:lnRef idx="2">
+            <a:schemeClr val="accent1"/>
+          </a:lnRef>
+          <a:fillRef idx="0">
+            <a:schemeClr val="accent1"/>
+          </a:fillRef>
+          <a:effectRef idx="1">
+            <a:schemeClr val="accent1"/>
+          </a:effectRef>
+          <a:fontRef idx="minor">
+            <a:schemeClr val="tx1"/>
+          </a:fontRef>
+        </p:style>
+      </p:cxnSp>
+      <p:sp>
+        <p:nvSpPr>
+          <p:cNvPr id="16" name="Rounded Rectangle 15"/>
+          <p:cNvSpPr/>
+          <p:nvPr/>
+        </p:nvSpPr>
+        <p:spPr>
+          <a:xfrm>
+            <a:off x="548640" y="2231136"/>
+            <a:ext cx="1051560" cy="603504"/>
+          </a:xfrm>
+          <a:prstGeom prst="roundRect">
+            <a:avLst>
+              <a:gd name="adj" fmla="val 12121"/>
+            </a:avLst>
+          </a:prstGeom>
+          <a:solidFill>
+            <a:srgbClr val="0F766E"/>
+          </a:solidFill>
+          <a:ln>
+            <a:noFill/>
+          </a:ln>
+          <a:effectLst/>
+        </p:spPr>
+        <p:style>
+          <a:lnRef idx="1">
+            <a:schemeClr val="accent1"/>
+          </a:lnRef>
+          <a:fillRef idx="3">
+            <a:schemeClr val="accent1"/>
+          </a:fillRef>
+          <a:effectRef idx="2">
+            <a:schemeClr val="accent1"/>
+          </a:effectRef>
+          <a:fontRef idx="minor">
+            <a:schemeClr val="lt1"/>
+          </a:fontRef>
+        </p:style>
+        <p:txBody>
+          <a:bodyPr rtlCol="0" anchor="ctr"/>
+          <a:lstStyle/>
+          <a:p/>
+        </p:txBody>
+      </p:sp>
+      <p:sp>
+        <p:nvSpPr>
+          <p:cNvPr id="17" name="TextBox 16"/>
+          <p:cNvSpPr txBox="1"/>
+          <p:nvPr/>
+        </p:nvSpPr>
+        <p:spPr>
+          <a:xfrm>
+            <a:off x="621792" y="2231136"/>
+            <a:ext cx="905255" cy="603504"/>
+          </a:xfrm>
+          <a:prstGeom prst="rect">
+            <a:avLst/>
+          </a:prstGeom>
+          <a:noFill/>
+        </p:spPr>
+        <p:txBody>
+          <a:bodyPr wrap="square" anchor="ctr" lIns="0" rIns="0" tIns="0" bIns="0">
+            <a:spAutoFit/>
+          </a:bodyPr>
+          <a:lstStyle/>
+          <a:p>
+            <a:pPr algn="ctr">
+              <a:lnSpc>
+                <a:spcPct val="100000"/>
+              </a:lnSpc>
+              <a:spcAft>
+                <a:spcPts val="0"/>
+              </a:spcAft>
+            </a:pPr>
+            <a:r>
+              <a:rPr sz="1200" b="1" i="0">
+                <a:solidFill>
+                  <a:srgbClr val="FFFFFF"/>
+                </a:solidFill>
+                <a:latin typeface="Arial"/>
+              </a:rPr>
+              <a:t>Голос</a:t>
+            </a:r>
+          </a:p>
+        </p:txBody>
+      </p:sp>
+      <p:sp>
+        <p:nvSpPr>
+          <p:cNvPr id="18" name="Rounded Rectangle 17"/>
+          <p:cNvSpPr/>
+          <p:nvPr/>
+        </p:nvSpPr>
+        <p:spPr>
+          <a:xfrm>
+            <a:off x="1783080" y="2231136"/>
+            <a:ext cx="2240280" cy="603504"/>
+          </a:xfrm>
+          <a:prstGeom prst="roundRect">
+            <a:avLst>
+              <a:gd name="adj" fmla="val 12121"/>
+            </a:avLst>
+          </a:prstGeom>
+          <a:solidFill>
+            <a:srgbClr val="F4F4F5"/>
+          </a:solidFill>
+          <a:ln>
+            <a:noFill/>
+          </a:ln>
+          <a:effectLst/>
+        </p:spPr>
+        <p:style>
+          <a:lnRef idx="1">
+            <a:schemeClr val="accent1"/>
+          </a:lnRef>
+          <a:fillRef idx="3">
+            <a:schemeClr val="accent1"/>
+          </a:fillRef>
+          <a:effectRef idx="2">
+            <a:schemeClr val="accent1"/>
+          </a:effectRef>
+          <a:fontRef idx="minor">
+            <a:schemeClr val="lt1"/>
+          </a:fontRef>
+        </p:style>
+        <p:txBody>
+          <a:bodyPr rtlCol="0" anchor="ctr"/>
+          <a:lstStyle/>
+          <a:p/>
+        </p:txBody>
+      </p:sp>
+      <p:sp>
+        <p:nvSpPr>
+          <p:cNvPr id="19" name="TextBox 18"/>
+          <p:cNvSpPr txBox="1"/>
+          <p:nvPr/>
+        </p:nvSpPr>
+        <p:spPr>
+          <a:xfrm>
+            <a:off x="1856231" y="2231136"/>
+            <a:ext cx="2093976" cy="603504"/>
+          </a:xfrm>
+          <a:prstGeom prst="rect">
+            <a:avLst/>
+          </a:prstGeom>
+          <a:noFill/>
+        </p:spPr>
+        <p:txBody>
+          <a:bodyPr wrap="square" anchor="ctr" lIns="0" rIns="0" tIns="0" bIns="0">
+            <a:spAutoFit/>
+          </a:bodyPr>
+          <a:lstStyle/>
+          <a:p>
+            <a:pPr algn="ctr">
+              <a:lnSpc>
+                <a:spcPct val="100000"/>
+              </a:lnSpc>
+              <a:spcAft>
+                <a:spcPts val="0"/>
+              </a:spcAft>
+            </a:pPr>
+            <a:r>
+              <a:rPr sz="950" b="0" i="0">
+                <a:solidFill>
+                  <a:srgbClr val="27272A"/>
+                </a:solidFill>
+                <a:latin typeface="Arial"/>
+              </a:rPr>
+              <a:t>звук ролика</a:t>
+            </a:r>
+          </a:p>
+        </p:txBody>
+      </p:sp>
+      <p:sp>
+        <p:nvSpPr>
+          <p:cNvPr id="20" name="Rounded Rectangle 19"/>
+          <p:cNvSpPr/>
+          <p:nvPr/>
+        </p:nvSpPr>
+        <p:spPr>
+          <a:xfrm>
+            <a:off x="4206240" y="2231136"/>
+            <a:ext cx="2514600" cy="603504"/>
+          </a:xfrm>
+          <a:prstGeom prst="roundRect">
+            <a:avLst>
+              <a:gd name="adj" fmla="val 12121"/>
+            </a:avLst>
+          </a:prstGeom>
+          <a:solidFill>
+            <a:srgbClr val="F4F4F5"/>
+          </a:solidFill>
+          <a:ln>
+            <a:noFill/>
+          </a:ln>
+          <a:effectLst/>
+        </p:spPr>
+        <p:style>
+          <a:lnRef idx="1">
+            <a:schemeClr val="accent1"/>
+          </a:lnRef>
+          <a:fillRef idx="3">
+            <a:schemeClr val="accent1"/>
+          </a:fillRef>
+          <a:effectRef idx="2">
+            <a:schemeClr val="accent1"/>
+          </a:effectRef>
+          <a:fontRef idx="minor">
+            <a:schemeClr val="lt1"/>
+          </a:fontRef>
+        </p:style>
+        <p:txBody>
+          <a:bodyPr rtlCol="0" anchor="ctr"/>
+          <a:lstStyle/>
+          <a:p/>
+        </p:txBody>
+      </p:sp>
+      <p:sp>
+        <p:nvSpPr>
+          <p:cNvPr id="21" name="TextBox 20"/>
+          <p:cNvSpPr txBox="1"/>
+          <p:nvPr/>
+        </p:nvSpPr>
+        <p:spPr>
+          <a:xfrm>
+            <a:off x="4279392" y="2231136"/>
+            <a:ext cx="2368296" cy="603504"/>
+          </a:xfrm>
+          <a:prstGeom prst="rect">
+            <a:avLst/>
+          </a:prstGeom>
+          <a:noFill/>
+        </p:spPr>
+        <p:txBody>
+          <a:bodyPr wrap="square" anchor="ctr" lIns="0" rIns="0" tIns="0" bIns="0">
+            <a:spAutoFit/>
+          </a:bodyPr>
+          <a:lstStyle/>
+          <a:p>
+            <a:pPr algn="ctr">
+              <a:lnSpc>
+                <a:spcPct val="100000"/>
+              </a:lnSpc>
+              <a:spcAft>
+                <a:spcPts val="0"/>
+              </a:spcAft>
+            </a:pPr>
+            <a:r>
+              <a:rPr sz="950" b="0" i="0">
+                <a:solidFill>
+                  <a:srgbClr val="27272A"/>
+                </a:solidFill>
+                <a:latin typeface="Arial"/>
+              </a:rPr>
+              <a:t>openSMILE (высота, громкость, тембр) + спектрограмма</a:t>
+            </a:r>
+          </a:p>
+        </p:txBody>
+      </p:sp>
+      <p:sp>
+        <p:nvSpPr>
+          <p:cNvPr id="22" name="Rounded Rectangle 21"/>
+          <p:cNvSpPr/>
+          <p:nvPr/>
+        </p:nvSpPr>
+        <p:spPr>
+          <a:xfrm>
+            <a:off x="6903720" y="2231136"/>
+            <a:ext cx="1874519" cy="603504"/>
+          </a:xfrm>
+          <a:prstGeom prst="roundRect">
+            <a:avLst>
+              <a:gd name="adj" fmla="val 12121"/>
+            </a:avLst>
+          </a:prstGeom>
+          <a:solidFill>
+            <a:srgbClr val="DBEAFE"/>
+          </a:solidFill>
+          <a:ln>
+            <a:noFill/>
+          </a:ln>
+          <a:effectLst/>
+        </p:spPr>
+        <p:style>
+          <a:lnRef idx="1">
+            <a:schemeClr val="accent1"/>
+          </a:lnRef>
+          <a:fillRef idx="3">
+            <a:schemeClr val="accent1"/>
+          </a:fillRef>
+          <a:effectRef idx="2">
+            <a:schemeClr val="accent1"/>
+          </a:effectRef>
+          <a:fontRef idx="minor">
+            <a:schemeClr val="lt1"/>
+          </a:fontRef>
+        </p:style>
+        <p:txBody>
+          <a:bodyPr rtlCol="0" anchor="ctr"/>
+          <a:lstStyle/>
+          <a:p/>
+        </p:txBody>
+      </p:sp>
+      <p:sp>
+        <p:nvSpPr>
+          <p:cNvPr id="23" name="TextBox 22"/>
+          <p:cNvSpPr txBox="1"/>
+          <p:nvPr/>
+        </p:nvSpPr>
+        <p:spPr>
+          <a:xfrm>
+            <a:off x="6976872" y="2231136"/>
+            <a:ext cx="1728216" cy="603504"/>
+          </a:xfrm>
+          <a:prstGeom prst="rect">
+            <a:avLst/>
+          </a:prstGeom>
+          <a:noFill/>
+        </p:spPr>
+        <p:txBody>
+          <a:bodyPr wrap="square" anchor="ctr" lIns="0" rIns="0" tIns="0" bIns="0">
+            <a:spAutoFit/>
+          </a:bodyPr>
+          <a:lstStyle/>
+          <a:p>
+            <a:pPr algn="ctr">
+              <a:lnSpc>
+                <a:spcPct val="100000"/>
+              </a:lnSpc>
+              <a:spcAft>
+                <a:spcPts val="0"/>
+              </a:spcAft>
+            </a:pPr>
+            <a:r>
+              <a:rPr sz="950" b="0" i="0">
+                <a:solidFill>
+                  <a:srgbClr val="27272A"/>
+                </a:solidFill>
+                <a:latin typeface="Arial"/>
+              </a:rPr>
+              <a:t>сеть по окнам 2 с</a:t>
+            </a:r>
+          </a:p>
+          <a:p>
+            <a:pPr algn="ctr">
+              <a:lnSpc>
+                <a:spcPct val="100000"/>
+              </a:lnSpc>
+              <a:spcAft>
+                <a:spcPts val="0"/>
+              </a:spcAft>
+            </a:pPr>
+            <a:r>
+              <a:rPr sz="800" b="0" i="0">
+                <a:solidFill>
+                  <a:srgbClr val="52525B"/>
+                </a:solidFill>
+                <a:latin typeface="Arial"/>
+              </a:rPr>
+              <a:t>готовые веса</a:t>
+            </a:r>
+          </a:p>
+        </p:txBody>
+      </p:sp>
+      <p:cxnSp>
+        <p:nvCxnSpPr>
+          <p:cNvPr id="24" name="Connector 23"/>
+          <p:cNvCxnSpPr/>
+          <p:nvPr/>
+        </p:nvCxnSpPr>
+        <p:spPr>
+          <a:xfrm>
+            <a:off x="1627632" y="2532888"/>
+            <a:ext cx="128016" cy="0"/>
+          </a:xfrm>
+          <a:prstGeom prst="line">
+            <a:avLst/>
+          </a:prstGeom>
+          <a:ln w="19050">
+            <a:solidFill>
+              <a:srgbClr val="71717A"/>
+            </a:solidFill>
+            <a:tailEnd type="triangle" w="med" len="med"/>
+          </a:ln>
+        </p:spPr>
+        <p:style>
+          <a:lnRef idx="2">
+            <a:schemeClr val="accent1"/>
+          </a:lnRef>
+          <a:fillRef idx="0">
+            <a:schemeClr val="accent1"/>
+          </a:fillRef>
+          <a:effectRef idx="1">
+            <a:schemeClr val="accent1"/>
+          </a:effectRef>
+          <a:fontRef idx="minor">
+            <a:schemeClr val="tx1"/>
+          </a:fontRef>
+        </p:style>
+      </p:cxnSp>
+      <p:cxnSp>
+        <p:nvCxnSpPr>
+          <p:cNvPr id="25" name="Connector 24"/>
+          <p:cNvCxnSpPr/>
+          <p:nvPr/>
+        </p:nvCxnSpPr>
+        <p:spPr>
+          <a:xfrm>
+            <a:off x="4050792" y="2532888"/>
+            <a:ext cx="128015" cy="0"/>
+          </a:xfrm>
+          <a:prstGeom prst="line">
+            <a:avLst/>
+          </a:prstGeom>
+          <a:ln w="19050">
+            <a:solidFill>
+              <a:srgbClr val="71717A"/>
+            </a:solidFill>
+            <a:tailEnd type="triangle" w="med" len="med"/>
+          </a:ln>
+        </p:spPr>
+        <p:style>
+          <a:lnRef idx="2">
+            <a:schemeClr val="accent1"/>
+          </a:lnRef>
+          <a:fillRef idx="0">
+            <a:schemeClr val="accent1"/>
+          </a:fillRef>
+          <a:effectRef idx="1">
+            <a:schemeClr val="accent1"/>
+          </a:effectRef>
+          <a:fontRef idx="minor">
+            <a:schemeClr val="tx1"/>
+          </a:fontRef>
+        </p:style>
+      </p:cxnSp>
+      <p:cxnSp>
+        <p:nvCxnSpPr>
+          <p:cNvPr id="26" name="Connector 25"/>
+          <p:cNvCxnSpPr/>
+          <p:nvPr/>
+        </p:nvCxnSpPr>
+        <p:spPr>
+          <a:xfrm>
+            <a:off x="6748272" y="2532888"/>
+            <a:ext cx="128016" cy="0"/>
+          </a:xfrm>
+          <a:prstGeom prst="line">
+            <a:avLst/>
+          </a:prstGeom>
+          <a:ln w="19050">
+            <a:solidFill>
+              <a:srgbClr val="71717A"/>
+            </a:solidFill>
+            <a:tailEnd type="triangle" w="med" len="med"/>
+          </a:ln>
+        </p:spPr>
+        <p:style>
+          <a:lnRef idx="2">
+            <a:schemeClr val="accent1"/>
+          </a:lnRef>
+          <a:fillRef idx="0">
+            <a:schemeClr val="accent1"/>
+          </a:fillRef>
+          <a:effectRef idx="1">
+            <a:schemeClr val="accent1"/>
+          </a:effectRef>
+          <a:fontRef idx="minor">
+            <a:schemeClr val="tx1"/>
+          </a:fontRef>
+        </p:style>
+      </p:cxnSp>
+      <p:cxnSp>
+        <p:nvCxnSpPr>
+          <p:cNvPr id="27" name="Connector 26"/>
+          <p:cNvCxnSpPr/>
+          <p:nvPr/>
+        </p:nvCxnSpPr>
+        <p:spPr>
+          <a:xfrm>
+            <a:off x="8805672" y="2532888"/>
+            <a:ext cx="219456" cy="0"/>
+          </a:xfrm>
+          <a:prstGeom prst="line">
+            <a:avLst/>
+          </a:prstGeom>
+          <a:ln w="19050">
+            <a:solidFill>
+              <a:srgbClr val="71717A"/>
+            </a:solidFill>
+            <a:tailEnd type="triangle" w="med" len="med"/>
+          </a:ln>
+        </p:spPr>
+        <p:style>
+          <a:lnRef idx="2">
+            <a:schemeClr val="accent1"/>
+          </a:lnRef>
+          <a:fillRef idx="0">
+            <a:schemeClr val="accent1"/>
+          </a:fillRef>
+          <a:effectRef idx="1">
+            <a:schemeClr val="accent1"/>
+          </a:effectRef>
+          <a:fontRef idx="minor">
+            <a:schemeClr val="tx1"/>
+          </a:fontRef>
+        </p:style>
+      </p:cxnSp>
+      <p:sp>
+        <p:nvSpPr>
+          <p:cNvPr id="28" name="Rounded Rectangle 27"/>
+          <p:cNvSpPr/>
+          <p:nvPr/>
+        </p:nvSpPr>
+        <p:spPr>
+          <a:xfrm>
+            <a:off x="548640" y="2980944"/>
+            <a:ext cx="1051560" cy="603504"/>
+          </a:xfrm>
+          <a:prstGeom prst="roundRect">
+            <a:avLst>
+              <a:gd name="adj" fmla="val 12121"/>
+            </a:avLst>
+          </a:prstGeom>
+          <a:solidFill>
+            <a:srgbClr val="7E22CE"/>
+          </a:solidFill>
+          <a:ln>
+            <a:noFill/>
+          </a:ln>
+          <a:effectLst/>
+        </p:spPr>
+        <p:style>
+          <a:lnRef idx="1">
+            <a:schemeClr val="accent1"/>
+          </a:lnRef>
+          <a:fillRef idx="3">
+            <a:schemeClr val="accent1"/>
+          </a:fillRef>
+          <a:effectRef idx="2">
+            <a:schemeClr val="accent1"/>
+          </a:effectRef>
+          <a:fontRef idx="minor">
+            <a:schemeClr val="lt1"/>
+          </a:fontRef>
+        </p:style>
+        <p:txBody>
+          <a:bodyPr rtlCol="0" anchor="ctr"/>
+          <a:lstStyle/>
+          <a:p/>
+        </p:txBody>
+      </p:sp>
+      <p:sp>
+        <p:nvSpPr>
+          <p:cNvPr id="29" name="TextBox 28"/>
+          <p:cNvSpPr txBox="1"/>
+          <p:nvPr/>
+        </p:nvSpPr>
+        <p:spPr>
+          <a:xfrm>
+            <a:off x="621792" y="2980944"/>
+            <a:ext cx="905255" cy="603504"/>
+          </a:xfrm>
+          <a:prstGeom prst="rect">
+            <a:avLst/>
+          </a:prstGeom>
+          <a:noFill/>
+        </p:spPr>
+        <p:txBody>
+          <a:bodyPr wrap="square" anchor="ctr" lIns="0" rIns="0" tIns="0" bIns="0">
+            <a:spAutoFit/>
+          </a:bodyPr>
+          <a:lstStyle/>
+          <a:p>
+            <a:pPr algn="ctr">
+              <a:lnSpc>
+                <a:spcPct val="100000"/>
+              </a:lnSpc>
+              <a:spcAft>
+                <a:spcPts val="0"/>
+              </a:spcAft>
+            </a:pPr>
+            <a:r>
+              <a:rPr sz="1200" b="1" i="0">
+                <a:solidFill>
+                  <a:srgbClr val="FFFFFF"/>
+                </a:solidFill>
+                <a:latin typeface="Arial"/>
+              </a:rPr>
+              <a:t>Речь</a:t>
+            </a:r>
+          </a:p>
+        </p:txBody>
+      </p:sp>
+      <p:sp>
+        <p:nvSpPr>
+          <p:cNvPr id="30" name="Rounded Rectangle 29"/>
+          <p:cNvSpPr/>
+          <p:nvPr/>
+        </p:nvSpPr>
+        <p:spPr>
+          <a:xfrm>
+            <a:off x="1783080" y="2980944"/>
+            <a:ext cx="2240280" cy="603504"/>
+          </a:xfrm>
+          <a:prstGeom prst="roundRect">
+            <a:avLst>
+              <a:gd name="adj" fmla="val 12121"/>
+            </a:avLst>
+          </a:prstGeom>
+          <a:solidFill>
+            <a:srgbClr val="F4F4F5"/>
+          </a:solidFill>
+          <a:ln>
+            <a:noFill/>
+          </a:ln>
+          <a:effectLst/>
+        </p:spPr>
+        <p:style>
+          <a:lnRef idx="1">
+            <a:schemeClr val="accent1"/>
+          </a:lnRef>
+          <a:fillRef idx="3">
+            <a:schemeClr val="accent1"/>
+          </a:fillRef>
+          <a:effectRef idx="2">
+            <a:schemeClr val="accent1"/>
+          </a:effectRef>
+          <a:fontRef idx="minor">
+            <a:schemeClr val="lt1"/>
+          </a:fontRef>
+        </p:style>
+        <p:txBody>
+          <a:bodyPr rtlCol="0" anchor="ctr"/>
+          <a:lstStyle/>
+          <a:p/>
+        </p:txBody>
+      </p:sp>
+      <p:sp>
+        <p:nvSpPr>
+          <p:cNvPr id="31" name="TextBox 30"/>
+          <p:cNvSpPr txBox="1"/>
+          <p:nvPr/>
+        </p:nvSpPr>
+        <p:spPr>
+          <a:xfrm>
+            <a:off x="1856231" y="2980944"/>
+            <a:ext cx="2093976" cy="603504"/>
+          </a:xfrm>
+          <a:prstGeom prst="rect">
+            <a:avLst/>
+          </a:prstGeom>
+          <a:noFill/>
+        </p:spPr>
+        <p:txBody>
+          <a:bodyPr wrap="square" anchor="ctr" lIns="0" rIns="0" tIns="0" bIns="0">
+            <a:spAutoFit/>
+          </a:bodyPr>
+          <a:lstStyle/>
+          <a:p>
+            <a:pPr algn="ctr">
+              <a:lnSpc>
+                <a:spcPct val="100000"/>
+              </a:lnSpc>
+              <a:spcAft>
+                <a:spcPts val="0"/>
+              </a:spcAft>
+            </a:pPr>
+            <a:r>
+              <a:rPr sz="950" b="0" i="0">
+                <a:solidFill>
+                  <a:srgbClr val="27272A"/>
+                </a:solidFill>
+                <a:latin typeface="Arial"/>
+              </a:rPr>
+              <a:t>Whisper → текст; русский переводится на английский</a:t>
+            </a:r>
+          </a:p>
+        </p:txBody>
+      </p:sp>
+      <p:sp>
+        <p:nvSpPr>
+          <p:cNvPr id="32" name="Rounded Rectangle 31"/>
+          <p:cNvSpPr/>
+          <p:nvPr/>
+        </p:nvSpPr>
+        <p:spPr>
+          <a:xfrm>
+            <a:off x="4206240" y="2980944"/>
+            <a:ext cx="2514600" cy="603504"/>
+          </a:xfrm>
+          <a:prstGeom prst="roundRect">
+            <a:avLst>
+              <a:gd name="adj" fmla="val 12121"/>
+            </a:avLst>
+          </a:prstGeom>
+          <a:solidFill>
+            <a:srgbClr val="F4F4F5"/>
+          </a:solidFill>
+          <a:ln>
+            <a:noFill/>
+          </a:ln>
+          <a:effectLst/>
+        </p:spPr>
+        <p:style>
+          <a:lnRef idx="1">
+            <a:schemeClr val="accent1"/>
+          </a:lnRef>
+          <a:fillRef idx="3">
+            <a:schemeClr val="accent1"/>
+          </a:fillRef>
+          <a:effectRef idx="2">
+            <a:schemeClr val="accent1"/>
+          </a:effectRef>
+          <a:fontRef idx="minor">
+            <a:schemeClr val="lt1"/>
+          </a:fontRef>
+        </p:style>
+        <p:txBody>
+          <a:bodyPr rtlCol="0" anchor="ctr"/>
+          <a:lstStyle/>
+          <a:p/>
+        </p:txBody>
+      </p:sp>
+      <p:sp>
+        <p:nvSpPr>
+          <p:cNvPr id="33" name="TextBox 32"/>
+          <p:cNvSpPr txBox="1"/>
+          <p:nvPr/>
+        </p:nvSpPr>
+        <p:spPr>
+          <a:xfrm>
+            <a:off x="4279392" y="2980944"/>
+            <a:ext cx="2368296" cy="603504"/>
+          </a:xfrm>
+          <a:prstGeom prst="rect">
+            <a:avLst/>
+          </a:prstGeom>
+          <a:noFill/>
+        </p:spPr>
+        <p:txBody>
+          <a:bodyPr wrap="square" anchor="ctr" lIns="0" rIns="0" tIns="0" bIns="0">
+            <a:spAutoFit/>
+          </a:bodyPr>
+          <a:lstStyle/>
+          <a:p>
+            <a:pPr algn="ctr">
+              <a:lnSpc>
+                <a:spcPct val="100000"/>
+              </a:lnSpc>
+              <a:spcAft>
+                <a:spcPts val="0"/>
+              </a:spcAft>
+            </a:pPr>
+            <a:r>
+              <a:rPr sz="950" b="0" i="0">
+                <a:solidFill>
+                  <a:srgbClr val="27272A"/>
+                </a:solidFill>
+                <a:latin typeface="Arial"/>
+              </a:rPr>
+              <a:t>BERT + словарные признаки</a:t>
+            </a:r>
+          </a:p>
+        </p:txBody>
+      </p:sp>
+      <p:sp>
+        <p:nvSpPr>
+          <p:cNvPr id="34" name="Rounded Rectangle 33"/>
+          <p:cNvSpPr/>
+          <p:nvPr/>
+        </p:nvSpPr>
+        <p:spPr>
+          <a:xfrm>
+            <a:off x="6903720" y="2980944"/>
+            <a:ext cx="1874519" cy="603504"/>
+          </a:xfrm>
+          <a:prstGeom prst="roundRect">
+            <a:avLst>
+              <a:gd name="adj" fmla="val 12121"/>
+            </a:avLst>
+          </a:prstGeom>
+          <a:solidFill>
+            <a:srgbClr val="DBEAFE"/>
+          </a:solidFill>
+          <a:ln>
+            <a:noFill/>
+          </a:ln>
+          <a:effectLst/>
+        </p:spPr>
+        <p:style>
+          <a:lnRef idx="1">
+            <a:schemeClr val="accent1"/>
+          </a:lnRef>
+          <a:fillRef idx="3">
+            <a:schemeClr val="accent1"/>
+          </a:fillRef>
+          <a:effectRef idx="2">
+            <a:schemeClr val="accent1"/>
+          </a:effectRef>
+          <a:fontRef idx="minor">
+            <a:schemeClr val="lt1"/>
+          </a:fontRef>
+        </p:style>
+        <p:txBody>
+          <a:bodyPr rtlCol="0" anchor="ctr"/>
+          <a:lstStyle/>
+          <a:p/>
+        </p:txBody>
+      </p:sp>
+      <p:sp>
+        <p:nvSpPr>
+          <p:cNvPr id="35" name="TextBox 34"/>
+          <p:cNvSpPr txBox="1"/>
+          <p:nvPr/>
+        </p:nvSpPr>
+        <p:spPr>
+          <a:xfrm>
+            <a:off x="6976872" y="2980944"/>
+            <a:ext cx="1728216" cy="603504"/>
+          </a:xfrm>
+          <a:prstGeom prst="rect">
+            <a:avLst/>
+          </a:prstGeom>
+          <a:noFill/>
+        </p:spPr>
+        <p:txBody>
+          <a:bodyPr wrap="square" anchor="ctr" lIns="0" rIns="0" tIns="0" bIns="0">
+            <a:spAutoFit/>
+          </a:bodyPr>
+          <a:lstStyle/>
+          <a:p>
+            <a:pPr algn="ctr">
+              <a:lnSpc>
+                <a:spcPct val="100000"/>
+              </a:lnSpc>
+              <a:spcAft>
+                <a:spcPts val="0"/>
+              </a:spcAft>
+            </a:pPr>
+            <a:r>
+              <a:rPr sz="950" b="0" i="0">
+                <a:solidFill>
+                  <a:srgbClr val="27272A"/>
+                </a:solidFill>
+                <a:latin typeface="Arial"/>
+              </a:rPr>
+              <a:t>сеть по тексту</a:t>
+            </a:r>
+          </a:p>
+          <a:p>
+            <a:pPr algn="ctr">
+              <a:lnSpc>
+                <a:spcPct val="100000"/>
+              </a:lnSpc>
+              <a:spcAft>
+                <a:spcPts val="0"/>
+              </a:spcAft>
+            </a:pPr>
+            <a:r>
+              <a:rPr sz="800" b="0" i="0">
+                <a:solidFill>
+                  <a:srgbClr val="52525B"/>
+                </a:solidFill>
+                <a:latin typeface="Arial"/>
+              </a:rPr>
+              <a:t>готовые веса</a:t>
+            </a:r>
+          </a:p>
+        </p:txBody>
+      </p:sp>
+      <p:cxnSp>
+        <p:nvCxnSpPr>
+          <p:cNvPr id="36" name="Connector 35"/>
+          <p:cNvCxnSpPr/>
+          <p:nvPr/>
+        </p:nvCxnSpPr>
+        <p:spPr>
+          <a:xfrm>
+            <a:off x="1627632" y="3282696"/>
+            <a:ext cx="128016" cy="0"/>
+          </a:xfrm>
+          <a:prstGeom prst="line">
+            <a:avLst/>
+          </a:prstGeom>
+          <a:ln w="19050">
+            <a:solidFill>
+              <a:srgbClr val="71717A"/>
+            </a:solidFill>
+            <a:tailEnd type="triangle" w="med" len="med"/>
+          </a:ln>
+        </p:spPr>
+        <p:style>
+          <a:lnRef idx="2">
+            <a:schemeClr val="accent1"/>
+          </a:lnRef>
+          <a:fillRef idx="0">
+            <a:schemeClr val="accent1"/>
+          </a:fillRef>
+          <a:effectRef idx="1">
+            <a:schemeClr val="accent1"/>
+          </a:effectRef>
+          <a:fontRef idx="minor">
+            <a:schemeClr val="tx1"/>
+          </a:fontRef>
+        </p:style>
+      </p:cxnSp>
+      <p:cxnSp>
+        <p:nvCxnSpPr>
+          <p:cNvPr id="37" name="Connector 36"/>
+          <p:cNvCxnSpPr/>
+          <p:nvPr/>
+        </p:nvCxnSpPr>
+        <p:spPr>
+          <a:xfrm>
+            <a:off x="4050792" y="3282696"/>
+            <a:ext cx="128015" cy="0"/>
+          </a:xfrm>
+          <a:prstGeom prst="line">
+            <a:avLst/>
+          </a:prstGeom>
+          <a:ln w="19050">
+            <a:solidFill>
+              <a:srgbClr val="71717A"/>
+            </a:solidFill>
+            <a:tailEnd type="triangle" w="med" len="med"/>
+          </a:ln>
+        </p:spPr>
+        <p:style>
+          <a:lnRef idx="2">
+            <a:schemeClr val="accent1"/>
+          </a:lnRef>
+          <a:fillRef idx="0">
+            <a:schemeClr val="accent1"/>
+          </a:fillRef>
+          <a:effectRef idx="1">
+            <a:schemeClr val="accent1"/>
+          </a:effectRef>
+          <a:fontRef idx="minor">
+            <a:schemeClr val="tx1"/>
+          </a:fontRef>
+        </p:style>
+      </p:cxnSp>
+      <p:cxnSp>
+        <p:nvCxnSpPr>
+          <p:cNvPr id="38" name="Connector 37"/>
+          <p:cNvCxnSpPr/>
+          <p:nvPr/>
+        </p:nvCxnSpPr>
+        <p:spPr>
+          <a:xfrm>
+            <a:off x="6748272" y="3282696"/>
+            <a:ext cx="128016" cy="0"/>
+          </a:xfrm>
+          <a:prstGeom prst="line">
+            <a:avLst/>
+          </a:prstGeom>
+          <a:ln w="19050">
+            <a:solidFill>
+              <a:srgbClr val="71717A"/>
+            </a:solidFill>
+            <a:tailEnd type="triangle" w="med" len="med"/>
+          </a:ln>
+        </p:spPr>
+        <p:style>
+          <a:lnRef idx="2">
+            <a:schemeClr val="accent1"/>
+          </a:lnRef>
+          <a:fillRef idx="0">
+            <a:schemeClr val="accent1"/>
+          </a:fillRef>
+          <a:effectRef idx="1">
+            <a:schemeClr val="accent1"/>
+          </a:effectRef>
+          <a:fontRef idx="minor">
+            <a:schemeClr val="tx1"/>
+          </a:fontRef>
+        </p:style>
+      </p:cxnSp>
+      <p:cxnSp>
+        <p:nvCxnSpPr>
+          <p:cNvPr id="39" name="Connector 38"/>
+          <p:cNvCxnSpPr/>
+          <p:nvPr/>
+        </p:nvCxnSpPr>
+        <p:spPr>
+          <a:xfrm>
+            <a:off x="8805672" y="3282696"/>
+            <a:ext cx="219456" cy="0"/>
+          </a:xfrm>
+          <a:prstGeom prst="line">
+            <a:avLst/>
+          </a:prstGeom>
+          <a:ln w="19050">
+            <a:solidFill>
+              <a:srgbClr val="71717A"/>
+            </a:solidFill>
+            <a:tailEnd type="triangle" w="med" len="med"/>
+          </a:ln>
+        </p:spPr>
+        <p:style>
+          <a:lnRef idx="2">
+            <a:schemeClr val="accent1"/>
+          </a:lnRef>
+          <a:fillRef idx="0">
+            <a:schemeClr val="accent1"/>
+          </a:fillRef>
+          <a:effectRef idx="1">
+            <a:schemeClr val="accent1"/>
+          </a:effectRef>
+          <a:fontRef idx="minor">
+            <a:schemeClr val="tx1"/>
+          </a:fontRef>
+        </p:style>
+      </p:cxnSp>
+      <p:sp>
+        <p:nvSpPr>
+          <p:cNvPr id="40" name="Rounded Rectangle 39"/>
+          <p:cNvSpPr/>
+          <p:nvPr/>
+        </p:nvSpPr>
+        <p:spPr>
+          <a:xfrm>
+            <a:off x="9052560" y="1481328"/>
+            <a:ext cx="1325880" cy="2103120"/>
+          </a:xfrm>
+          <a:prstGeom prst="roundRect">
+            <a:avLst>
+              <a:gd name="adj" fmla="val 5517"/>
+            </a:avLst>
+          </a:prstGeom>
+          <a:solidFill>
+            <a:srgbClr val="DBEAFE"/>
+          </a:solidFill>
+          <a:ln>
+            <a:noFill/>
+          </a:ln>
+          <a:effectLst/>
+        </p:spPr>
+        <p:style>
+          <a:lnRef idx="1">
+            <a:schemeClr val="accent1"/>
+          </a:lnRef>
+          <a:fillRef idx="3">
+            <a:schemeClr val="accent1"/>
+          </a:fillRef>
+          <a:effectRef idx="2">
+            <a:schemeClr val="accent1"/>
+          </a:effectRef>
+          <a:fontRef idx="minor">
+            <a:schemeClr val="lt1"/>
+          </a:fontRef>
+        </p:style>
+        <p:txBody>
+          <a:bodyPr rtlCol="0" anchor="ctr"/>
+          <a:lstStyle/>
+          <a:p/>
+        </p:txBody>
+      </p:sp>
+      <p:sp>
+        <p:nvSpPr>
+          <p:cNvPr id="41" name="TextBox 40"/>
+          <p:cNvSpPr txBox="1"/>
+          <p:nvPr/>
+        </p:nvSpPr>
+        <p:spPr>
+          <a:xfrm>
+            <a:off x="9125712" y="1481328"/>
+            <a:ext cx="1179576" cy="2103120"/>
+          </a:xfrm>
+          <a:prstGeom prst="rect">
+            <a:avLst/>
+          </a:prstGeom>
+          <a:noFill/>
+        </p:spPr>
+        <p:txBody>
+          <a:bodyPr wrap="square" anchor="ctr" lIns="0" rIns="0" tIns="0" bIns="0">
+            <a:spAutoFit/>
+          </a:bodyPr>
+          <a:lstStyle/>
+          <a:p>
+            <a:pPr algn="ctr">
+              <a:lnSpc>
+                <a:spcPct val="100000"/>
+              </a:lnSpc>
+              <a:spcAft>
+                <a:spcPts val="0"/>
+              </a:spcAft>
+            </a:pPr>
+            <a:r>
+              <a:rPr sz="1100" b="1" i="0">
+                <a:solidFill>
+                  <a:srgbClr val="27272A"/>
+                </a:solidFill>
+                <a:latin typeface="Arial"/>
+              </a:rPr>
+              <a:t>Слияние трёх потоков</a:t>
+            </a:r>
+          </a:p>
+          <a:p>
+            <a:pPr algn="ctr">
+              <a:lnSpc>
+                <a:spcPct val="100000"/>
+              </a:lnSpc>
+              <a:spcAft>
+                <a:spcPts val="0"/>
+              </a:spcAft>
+            </a:pPr>
+            <a:r>
+              <a:rPr sz="850" b="0" i="0">
+                <a:solidFill>
+                  <a:srgbClr val="52525B"/>
+                </a:solidFill>
+                <a:latin typeface="Arial"/>
+              </a:rPr>
+              <a:t>готовые веса</a:t>
+            </a:r>
+          </a:p>
+        </p:txBody>
+      </p:sp>
+      <p:sp>
+        <p:nvSpPr>
+          <p:cNvPr id="42" name="Rounded Rectangle 41"/>
+          <p:cNvSpPr/>
+          <p:nvPr/>
+        </p:nvSpPr>
+        <p:spPr>
+          <a:xfrm>
+            <a:off x="10607040" y="2167128"/>
+            <a:ext cx="1005840" cy="731520"/>
+          </a:xfrm>
+          <a:prstGeom prst="roundRect">
+            <a:avLst>
+              <a:gd name="adj" fmla="val 10000"/>
+            </a:avLst>
+          </a:prstGeom>
+          <a:solidFill>
+            <a:srgbClr val="27272A"/>
+          </a:solidFill>
+          <a:ln>
+            <a:noFill/>
+          </a:ln>
+          <a:effectLst/>
+        </p:spPr>
+        <p:style>
+          <a:lnRef idx="1">
+            <a:schemeClr val="accent1"/>
+          </a:lnRef>
+          <a:fillRef idx="3">
+            <a:schemeClr val="accent1"/>
+          </a:fillRef>
+          <a:effectRef idx="2">
+            <a:schemeClr val="accent1"/>
+          </a:effectRef>
+          <a:fontRef idx="minor">
+            <a:schemeClr val="lt1"/>
+          </a:fontRef>
+        </p:style>
+        <p:txBody>
+          <a:bodyPr rtlCol="0" anchor="ctr"/>
+          <a:lstStyle/>
+          <a:p/>
+        </p:txBody>
+      </p:sp>
+      <p:sp>
+        <p:nvSpPr>
+          <p:cNvPr id="43" name="TextBox 42"/>
+          <p:cNvSpPr txBox="1"/>
+          <p:nvPr/>
+        </p:nvSpPr>
+        <p:spPr>
+          <a:xfrm>
+            <a:off x="10680192" y="2167128"/>
+            <a:ext cx="859536" cy="731520"/>
+          </a:xfrm>
+          <a:prstGeom prst="rect">
+            <a:avLst/>
+          </a:prstGeom>
+          <a:noFill/>
+        </p:spPr>
+        <p:txBody>
+          <a:bodyPr wrap="square" anchor="ctr" lIns="0" rIns="0" tIns="0" bIns="0">
+            <a:spAutoFit/>
+          </a:bodyPr>
+          <a:lstStyle/>
+          <a:p>
+            <a:pPr algn="ctr">
+              <a:lnSpc>
+                <a:spcPct val="100000"/>
+              </a:lnSpc>
+              <a:spcAft>
+                <a:spcPts val="0"/>
+              </a:spcAft>
+            </a:pPr>
+            <a:r>
+              <a:rPr sz="1100" b="1" i="0">
+                <a:solidFill>
+                  <a:srgbClr val="FFFFFF"/>
+                </a:solidFill>
+                <a:latin typeface="Arial"/>
+              </a:rPr>
+              <a:t>Big Five</a:t>
+            </a:r>
+          </a:p>
+          <a:p>
+            <a:pPr algn="ctr">
+              <a:lnSpc>
+                <a:spcPct val="100000"/>
+              </a:lnSpc>
+              <a:spcAft>
+                <a:spcPts val="0"/>
+              </a:spcAft>
+            </a:pPr>
+            <a:r>
+              <a:rPr sz="850" b="0" i="0">
+                <a:solidFill>
+                  <a:srgbClr val="FFFFFF"/>
+                </a:solidFill>
+                <a:latin typeface="Arial"/>
+              </a:rPr>
+              <a:t>5 черт</a:t>
+            </a:r>
+          </a:p>
+        </p:txBody>
+      </p:sp>
+      <p:cxnSp>
+        <p:nvCxnSpPr>
+          <p:cNvPr id="44" name="Connector 43"/>
+          <p:cNvCxnSpPr/>
+          <p:nvPr/>
+        </p:nvCxnSpPr>
+        <p:spPr>
+          <a:xfrm>
+            <a:off x="10405872" y="2532888"/>
+            <a:ext cx="173736" cy="0"/>
+          </a:xfrm>
+          <a:prstGeom prst="line">
+            <a:avLst/>
+          </a:prstGeom>
+          <a:ln w="19050">
+            <a:solidFill>
+              <a:srgbClr val="71717A"/>
+            </a:solidFill>
+            <a:tailEnd type="triangle" w="med" len="med"/>
+          </a:ln>
+        </p:spPr>
+        <p:style>
+          <a:lnRef idx="2">
+            <a:schemeClr val="accent1"/>
+          </a:lnRef>
+          <a:fillRef idx="0">
+            <a:schemeClr val="accent1"/>
+          </a:fillRef>
+          <a:effectRef idx="1">
+            <a:schemeClr val="accent1"/>
+          </a:effectRef>
+          <a:fontRef idx="minor">
+            <a:schemeClr val="tx1"/>
+          </a:fontRef>
+        </p:style>
+      </p:cxnSp>
+      <p:sp>
+        <p:nvSpPr>
+          <p:cNvPr id="45" name="Rounded Rectangle 44"/>
+          <p:cNvSpPr/>
+          <p:nvPr/>
+        </p:nvSpPr>
+        <p:spPr>
+          <a:xfrm>
+            <a:off x="548640" y="3749039"/>
+            <a:ext cx="274320" cy="182880"/>
+          </a:xfrm>
+          <a:prstGeom prst="roundRect">
+            <a:avLst>
+              <a:gd name="adj" fmla="val 40000"/>
+            </a:avLst>
+          </a:prstGeom>
+          <a:solidFill>
+            <a:srgbClr val="DBEAFE"/>
+          </a:solidFill>
+          <a:ln>
+            <a:noFill/>
+          </a:ln>
+          <a:effectLst/>
+        </p:spPr>
+        <p:style>
+          <a:lnRef idx="1">
+            <a:schemeClr val="accent1"/>
+          </a:lnRef>
+          <a:fillRef idx="3">
+            <a:schemeClr val="accent1"/>
+          </a:fillRef>
+          <a:effectRef idx="2">
+            <a:schemeClr val="accent1"/>
+          </a:effectRef>
+          <a:fontRef idx="minor">
+            <a:schemeClr val="lt1"/>
+          </a:fontRef>
+        </p:style>
+        <p:txBody>
+          <a:bodyPr rtlCol="0" anchor="ctr"/>
+          <a:lstStyle/>
+          <a:p/>
+        </p:txBody>
+      </p:sp>
+      <p:sp>
+        <p:nvSpPr>
+          <p:cNvPr id="46" name="TextBox 45"/>
+          <p:cNvSpPr txBox="1"/>
+          <p:nvPr/>
+        </p:nvSpPr>
+        <p:spPr>
+          <a:xfrm>
+            <a:off x="896112" y="3703320"/>
+            <a:ext cx="3840480" cy="274320"/>
+          </a:xfrm>
+          <a:prstGeom prst="rect">
+            <a:avLst/>
+          </a:prstGeom>
+          <a:noFill/>
+        </p:spPr>
+        <p:txBody>
+          <a:bodyPr wrap="square" anchor="t" lIns="0" rIns="0" tIns="0" bIns="0">
+            <a:spAutoFit/>
+          </a:bodyPr>
+          <a:lstStyle/>
+          <a:p>
+            <a:pPr algn="l">
+              <a:lnSpc>
+                <a:spcPct val="110000"/>
+              </a:lnSpc>
+              <a:spcAft>
+                <a:spcPts val="0"/>
+              </a:spcAft>
+            </a:pPr>
+            <a:r>
+              <a:rPr sz="1000" b="0" i="0">
+                <a:solidFill>
+                  <a:srgbClr val="52525B"/>
+                </a:solidFill>
+                <a:latin typeface="Arial"/>
+              </a:rPr>
+              <a:t>голубой — готовые веса авторов, я их не дообучал</a:t>
+            </a:r>
+          </a:p>
+        </p:txBody>
+      </p:sp>
+      <p:sp>
+        <p:nvSpPr>
+          <p:cNvPr id="47" name="Rounded Rectangle 46"/>
+          <p:cNvSpPr/>
+          <p:nvPr/>
+        </p:nvSpPr>
+        <p:spPr>
+          <a:xfrm>
+            <a:off x="4846320" y="3749039"/>
+            <a:ext cx="274320" cy="182880"/>
+          </a:xfrm>
+          <a:prstGeom prst="roundRect">
+            <a:avLst>
+              <a:gd name="adj" fmla="val 40000"/>
+            </a:avLst>
+          </a:prstGeom>
+          <a:solidFill>
+            <a:srgbClr val="F4F4F5"/>
+          </a:solidFill>
+          <a:ln w="12700">
+            <a:solidFill>
+              <a:srgbClr val="D4D4D8"/>
+            </a:solidFill>
+          </a:ln>
+          <a:effectLst/>
+        </p:spPr>
+        <p:style>
+          <a:lnRef idx="1">
+            <a:schemeClr val="accent1"/>
+          </a:lnRef>
+          <a:fillRef idx="3">
+            <a:schemeClr val="accent1"/>
+          </a:fillRef>
+          <a:effectRef idx="2">
+            <a:schemeClr val="accent1"/>
+          </a:effectRef>
+          <a:fontRef idx="minor">
+            <a:schemeClr val="lt1"/>
+          </a:fontRef>
+        </p:style>
+        <p:txBody>
+          <a:bodyPr rtlCol="0" anchor="ctr"/>
+          <a:lstStyle/>
+          <a:p/>
+        </p:txBody>
+      </p:sp>
+      <p:sp>
+        <p:nvSpPr>
+          <p:cNvPr id="48" name="TextBox 47"/>
+          <p:cNvSpPr txBox="1"/>
+          <p:nvPr/>
+        </p:nvSpPr>
+        <p:spPr>
+          <a:xfrm>
+            <a:off x="5193792" y="3703320"/>
+            <a:ext cx="2926080" cy="274320"/>
+          </a:xfrm>
+          <a:prstGeom prst="rect">
+            <a:avLst/>
+          </a:prstGeom>
+          <a:noFill/>
+        </p:spPr>
+        <p:txBody>
+          <a:bodyPr wrap="square" anchor="t" lIns="0" rIns="0" tIns="0" bIns="0">
+            <a:spAutoFit/>
+          </a:bodyPr>
+          <a:lstStyle/>
+          <a:p>
+            <a:pPr algn="l">
+              <a:lnSpc>
+                <a:spcPct val="110000"/>
+              </a:lnSpc>
+              <a:spcAft>
+                <a:spcPts val="0"/>
+              </a:spcAft>
+            </a:pPr>
+            <a:r>
+              <a:rPr sz="1000" b="0" i="0">
+                <a:solidFill>
+                  <a:srgbClr val="52525B"/>
+                </a:solidFill>
+                <a:latin typeface="Arial"/>
+              </a:rPr>
+              <a:t>светло-серый — подготовка данных</a:t>
+            </a:r>
+          </a:p>
+        </p:txBody>
+      </p:sp>
+      <p:sp>
+        <p:nvSpPr>
+          <p:cNvPr id="49" name="TextBox 48"/>
+          <p:cNvSpPr txBox="1"/>
+          <p:nvPr/>
+        </p:nvSpPr>
+        <p:spPr>
+          <a:xfrm>
+            <a:off x="548640" y="3931920"/>
+            <a:ext cx="6766560" cy="274320"/>
+          </a:xfrm>
+          <a:prstGeom prst="rect">
+            <a:avLst/>
+          </a:prstGeom>
+          <a:noFill/>
+        </p:spPr>
+        <p:txBody>
+          <a:bodyPr wrap="square" anchor="t" lIns="0" rIns="0" tIns="0" bIns="0">
+            <a:spAutoFit/>
+          </a:bodyPr>
+          <a:lstStyle/>
+          <a:p>
+            <a:pPr algn="l">
+              <a:lnSpc>
+                <a:spcPct val="110000"/>
+              </a:lnSpc>
+              <a:spcAft>
+                <a:spcPts val="0"/>
+              </a:spcAft>
+            </a:pPr>
+            <a:r>
+              <a:rPr sz="1200" b="1" i="0">
+                <a:solidFill>
+                  <a:srgbClr val="27272A"/>
+                </a:solidFill>
+                <a:latin typeface="Arial"/>
+              </a:rPr>
+              <a:t>Чем она отличается от моей модели</a:t>
+            </a:r>
+          </a:p>
+        </p:txBody>
+      </p:sp>
+      <p:graphicFrame>
+        <p:nvGraphicFramePr>
+          <p:cNvPr id="50" name="Table 49"/>
+          <p:cNvGraphicFramePr>
+            <a:graphicFrameLocks noGrp="1"/>
+          </p:cNvGraphicFramePr>
+          <p:nvPr/>
+        </p:nvGraphicFramePr>
+        <p:xfrm>
+          <a:off x="548640" y="4242816"/>
+          <a:ext cx="6720840" cy="1755648"/>
+        </p:xfrm>
+        <a:graphic>
+          <a:graphicData uri="http://schemas.openxmlformats.org/drawingml/2006/table">
+            <a:tbl>
+              <a:tblPr>
+                <a:tableStyleId>{5C22544A-7EE6-4342-B048-85BDC9FD1C3A}</a:tableStyleId>
+              </a:tblPr>
+              <a:tblGrid>
+                <a:gridCol w="1051560"/>
+                <a:gridCol w="2834640"/>
+                <a:gridCol w="2834640"/>
+              </a:tblGrid>
+              <a:tr h="292608">
+                <a:tc>
+                  <a:txBody>
+                    <a:bodyPr wrap="square"/>
+                    <a:lstStyle/>
+                    <a:p>
+                      <a:r>
+                        <a:rPr sz="950" b="1">
+                          <a:solidFill>
+                            <a:srgbClr val="FFFFFF"/>
+                          </a:solidFill>
+                          <a:latin typeface="Arial"/>
+                        </a:rPr>
+                        <a:t/>
+                      </a:r>
+                    </a:p>
+                  </a:txBody>
+                  <a:tcPr marL="73152" marR="73152" marT="27432" marB="27432" anchor="ctr">
+                    <a:solidFill>
+                      <a:srgbClr val="27272A"/>
+                    </a:solidFill>
+                  </a:tcPr>
+                </a:tc>
+                <a:tc>
+                  <a:txBody>
+                    <a:bodyPr wrap="square"/>
+                    <a:lstStyle/>
+                    <a:p>
+                      <a:r>
+                        <a:rPr sz="950" b="1">
+                          <a:solidFill>
+                            <a:srgbClr val="FFFFFF"/>
+                          </a:solidFill>
+                          <a:latin typeface="Arial"/>
+                        </a:rPr>
+                        <a:t>OCEAN-AI · готовые веса</a:t>
+                      </a:r>
+                    </a:p>
+                  </a:txBody>
+                  <a:tcPr marL="73152" marR="73152" marT="27432" marB="27432" anchor="ctr">
+                    <a:solidFill>
+                      <a:srgbClr val="1D4ED8"/>
+                    </a:solidFill>
+                  </a:tcPr>
+                </a:tc>
+                <a:tc>
+                  <a:txBody>
+                    <a:bodyPr wrap="square"/>
+                    <a:lstStyle/>
+                    <a:p>
+                      <a:r>
+                        <a:rPr sz="950" b="1">
+                          <a:solidFill>
+                            <a:srgbClr val="FFFFFF"/>
+                          </a:solidFill>
+                          <a:latin typeface="Arial"/>
+                        </a:rPr>
+                        <a:t>Моя модель · обучил я</a:t>
+                      </a:r>
+                    </a:p>
+                  </a:txBody>
+                  <a:tcPr marL="73152" marR="73152" marT="27432" marB="27432" anchor="ctr">
+                    <a:solidFill>
+                      <a:srgbClr val="C2410C"/>
+                    </a:solidFill>
+                  </a:tcPr>
+                </a:tc>
+              </a:tr>
+              <a:tr h="292608">
+                <a:tc>
+                  <a:txBody>
+                    <a:bodyPr wrap="square"/>
+                    <a:lstStyle/>
+                    <a:p>
+                      <a:r>
+                        <a:rPr sz="950" b="1">
+                          <a:solidFill>
+                            <a:srgbClr val="27272A"/>
+                          </a:solidFill>
+                          <a:latin typeface="Arial"/>
+                        </a:rPr>
+                        <a:t>Кадры</a:t>
+                      </a:r>
+                    </a:p>
+                  </a:txBody>
+                  <a:tcPr marL="73152" marR="73152" marT="27432" marB="27432" anchor="ctr">
+                    <a:solidFill>
+                      <a:srgbClr val="F4F4F5"/>
+                    </a:solidFill>
+                  </a:tcPr>
+                </a:tc>
+                <a:tc>
+                  <a:txBody>
+                    <a:bodyPr wrap="square"/>
+                    <a:lstStyle/>
+                    <a:p>
+                      <a:r>
+                        <a:rPr sz="950" b="0">
+                          <a:solidFill>
+                            <a:srgbClr val="27272A"/>
+                          </a:solidFill>
+                          <a:latin typeface="Arial"/>
+                        </a:rPr>
+                        <a:t>5 в секунду — 75 на 15-секундный ролик</a:t>
+                      </a:r>
+                    </a:p>
+                  </a:txBody>
+                  <a:tcPr marL="73152" marR="73152" marT="27432" marB="27432" anchor="ctr">
+                    <a:solidFill>
+                      <a:srgbClr val="DBEAFE"/>
+                    </a:solidFill>
+                  </a:tcPr>
+                </a:tc>
+                <a:tc>
+                  <a:txBody>
+                    <a:bodyPr wrap="square"/>
+                    <a:lstStyle/>
+                    <a:p>
+                      <a:r>
+                        <a:rPr sz="950" b="0">
+                          <a:solidFill>
+                            <a:srgbClr val="27272A"/>
+                          </a:solidFill>
+                          <a:latin typeface="Arial"/>
+                        </a:rPr>
+                        <a:t>30 на ролик — 2 в секунду</a:t>
+                      </a:r>
+                    </a:p>
+                  </a:txBody>
+                  <a:tcPr marL="73152" marR="73152" marT="27432" marB="27432" anchor="ctr">
+                    <a:solidFill>
+                      <a:srgbClr val="FFEDD5"/>
+                    </a:solidFill>
+                  </a:tcPr>
+                </a:tc>
+              </a:tr>
+              <a:tr h="292608">
+                <a:tc>
+                  <a:txBody>
+                    <a:bodyPr wrap="square"/>
+                    <a:lstStyle/>
+                    <a:p>
+                      <a:r>
+                        <a:rPr sz="950" b="1">
+                          <a:solidFill>
+                            <a:srgbClr val="27272A"/>
+                          </a:solidFill>
+                          <a:latin typeface="Arial"/>
+                        </a:rPr>
+                        <a:t>Лицо</a:t>
+                      </a:r>
+                    </a:p>
+                  </a:txBody>
+                  <a:tcPr marL="73152" marR="73152" marT="27432" marB="27432" anchor="ctr">
+                    <a:solidFill>
+                      <a:srgbClr val="F4F4F5"/>
+                    </a:solidFill>
+                  </a:tcPr>
+                </a:tc>
+                <a:tc>
+                  <a:txBody>
+                    <a:bodyPr wrap="square"/>
+                    <a:lstStyle/>
+                    <a:p>
+                      <a:r>
+                        <a:rPr sz="950" b="0">
+                          <a:solidFill>
+                            <a:srgbClr val="27272A"/>
+                          </a:solidFill>
+                          <a:latin typeface="Arial"/>
+                        </a:rPr>
+                        <a:t>468 точек лица и картинка лица через ResNet50</a:t>
+                      </a:r>
+                    </a:p>
+                  </a:txBody>
+                  <a:tcPr marL="73152" marR="73152" marT="27432" marB="27432" anchor="ctr">
+                    <a:solidFill>
+                      <a:srgbClr val="DBEAFE"/>
+                    </a:solidFill>
+                  </a:tcPr>
+                </a:tc>
+                <a:tc>
+                  <a:txBody>
+                    <a:bodyPr wrap="square"/>
+                    <a:lstStyle/>
+                    <a:p>
+                      <a:r>
+                        <a:rPr sz="950" b="0">
+                          <a:solidFill>
+                            <a:srgbClr val="27272A"/>
+                          </a:solidFill>
+                          <a:latin typeface="Arial"/>
+                        </a:rPr>
+                        <a:t>вырезанное лицо через CLIP</a:t>
+                      </a:r>
+                    </a:p>
+                  </a:txBody>
+                  <a:tcPr marL="73152" marR="73152" marT="27432" marB="27432" anchor="ctr">
+                    <a:solidFill>
+                      <a:srgbClr val="FFEDD5"/>
+                    </a:solidFill>
+                  </a:tcPr>
+                </a:tc>
+              </a:tr>
+              <a:tr h="292608">
+                <a:tc>
+                  <a:txBody>
+                    <a:bodyPr wrap="square"/>
+                    <a:lstStyle/>
+                    <a:p>
+                      <a:r>
+                        <a:rPr sz="950" b="1">
+                          <a:solidFill>
+                            <a:srgbClr val="27272A"/>
+                          </a:solidFill>
+                          <a:latin typeface="Arial"/>
+                        </a:rPr>
+                        <a:t>Движение</a:t>
+                      </a:r>
+                    </a:p>
+                  </a:txBody>
+                  <a:tcPr marL="73152" marR="73152" marT="27432" marB="27432" anchor="ctr">
+                    <a:solidFill>
+                      <a:srgbClr val="F4F4F5"/>
+                    </a:solidFill>
+                  </a:tcPr>
+                </a:tc>
+                <a:tc>
+                  <a:txBody>
+                    <a:bodyPr wrap="square"/>
+                    <a:lstStyle/>
+                    <a:p>
+                      <a:r>
+                        <a:rPr sz="950" b="0">
+                          <a:solidFill>
+                            <a:srgbClr val="27272A"/>
+                          </a:solidFill>
+                          <a:latin typeface="Arial"/>
+                        </a:rPr>
+                        <a:t>окна по 2 с: сеть видит порядок кадров</a:t>
+                      </a:r>
+                    </a:p>
+                  </a:txBody>
+                  <a:tcPr marL="73152" marR="73152" marT="27432" marB="27432" anchor="ctr">
+                    <a:solidFill>
+                      <a:srgbClr val="DBEAFE"/>
+                    </a:solidFill>
+                  </a:tcPr>
+                </a:tc>
+                <a:tc>
+                  <a:txBody>
+                    <a:bodyPr wrap="square"/>
+                    <a:lstStyle/>
+                    <a:p>
+                      <a:r>
+                        <a:rPr sz="950" b="0">
+                          <a:solidFill>
+                            <a:srgbClr val="27272A"/>
+                          </a:solidFill>
+                          <a:latin typeface="Arial"/>
+                        </a:rPr>
+                        <a:t>среднее и разброс по кадрам, порядок не учитывается</a:t>
+                      </a:r>
+                    </a:p>
+                  </a:txBody>
+                  <a:tcPr marL="73152" marR="73152" marT="27432" marB="27432" anchor="ctr">
+                    <a:solidFill>
+                      <a:srgbClr val="FFEDD5"/>
+                    </a:solidFill>
+                  </a:tcPr>
+                </a:tc>
+              </a:tr>
+              <a:tr h="292608">
+                <a:tc>
+                  <a:txBody>
+                    <a:bodyPr wrap="square"/>
+                    <a:lstStyle/>
+                    <a:p>
+                      <a:r>
+                        <a:rPr sz="950" b="1">
+                          <a:solidFill>
+                            <a:srgbClr val="27272A"/>
+                          </a:solidFill>
+                          <a:latin typeface="Arial"/>
+                        </a:rPr>
+                        <a:t>Голос</a:t>
+                      </a:r>
+                    </a:p>
+                  </a:txBody>
+                  <a:tcPr marL="73152" marR="73152" marT="27432" marB="27432" anchor="ctr">
+                    <a:solidFill>
+                      <a:srgbClr val="F4F4F5"/>
+                    </a:solidFill>
+                  </a:tcPr>
+                </a:tc>
+                <a:tc>
+                  <a:txBody>
+                    <a:bodyPr wrap="square"/>
+                    <a:lstStyle/>
+                    <a:p>
+                      <a:r>
+                        <a:rPr sz="950" b="0">
+                          <a:solidFill>
+                            <a:srgbClr val="27272A"/>
+                          </a:solidFill>
+                          <a:latin typeface="Arial"/>
+                        </a:rPr>
+                        <a:t>openSMILE и спектрограмма</a:t>
+                      </a:r>
+                    </a:p>
+                  </a:txBody>
+                  <a:tcPr marL="73152" marR="73152" marT="27432" marB="27432" anchor="ctr">
+                    <a:solidFill>
+                      <a:srgbClr val="DBEAFE"/>
+                    </a:solidFill>
+                  </a:tcPr>
+                </a:tc>
+                <a:tc>
+                  <a:txBody>
+                    <a:bodyPr wrap="square"/>
+                    <a:lstStyle/>
+                    <a:p>
+                      <a:r>
+                        <a:rPr sz="950" b="0">
+                          <a:solidFill>
+                            <a:srgbClr val="27272A"/>
+                          </a:solidFill>
+                          <a:latin typeface="Arial"/>
+                        </a:rPr>
+                        <a:t>весь звук через CLAP</a:t>
+                      </a:r>
+                    </a:p>
+                  </a:txBody>
+                  <a:tcPr marL="73152" marR="73152" marT="27432" marB="27432" anchor="ctr">
+                    <a:solidFill>
+                      <a:srgbClr val="FFEDD5"/>
+                    </a:solidFill>
+                  </a:tcPr>
+                </a:tc>
+              </a:tr>
+              <a:tr h="292608">
+                <a:tc>
+                  <a:txBody>
+                    <a:bodyPr wrap="square"/>
+                    <a:lstStyle/>
+                    <a:p>
+                      <a:r>
+                        <a:rPr sz="950" b="1">
+                          <a:solidFill>
+                            <a:srgbClr val="27272A"/>
+                          </a:solidFill>
+                          <a:latin typeface="Arial"/>
+                        </a:rPr>
+                        <a:t>Речь</a:t>
+                      </a:r>
+                    </a:p>
+                  </a:txBody>
+                  <a:tcPr marL="73152" marR="73152" marT="27432" marB="27432" anchor="ctr">
+                    <a:solidFill>
+                      <a:srgbClr val="F4F4F5"/>
+                    </a:solidFill>
+                  </a:tcPr>
+                </a:tc>
+                <a:tc>
+                  <a:txBody>
+                    <a:bodyPr wrap="square"/>
+                    <a:lstStyle/>
+                    <a:p>
+                      <a:r>
+                        <a:rPr sz="950" b="0">
+                          <a:solidFill>
+                            <a:srgbClr val="27272A"/>
+                          </a:solidFill>
+                          <a:latin typeface="Arial"/>
+                        </a:rPr>
+                        <a:t>текст через BERT; русский переводится на английский</a:t>
+                      </a:r>
+                    </a:p>
+                  </a:txBody>
+                  <a:tcPr marL="73152" marR="73152" marT="27432" marB="27432" anchor="ctr">
+                    <a:solidFill>
+                      <a:srgbClr val="DBEAFE"/>
+                    </a:solidFill>
+                  </a:tcPr>
+                </a:tc>
+                <a:tc>
+                  <a:txBody>
+                    <a:bodyPr wrap="square"/>
+                    <a:lstStyle/>
+                    <a:p>
+                      <a:r>
+                        <a:rPr sz="950" b="0">
+                          <a:solidFill>
+                            <a:srgbClr val="27272A"/>
+                          </a:solidFill>
+                          <a:latin typeface="Arial"/>
+                        </a:rPr>
+                        <a:t>текст и описание поведения (Qwen-VL) через EmoRoBERTa</a:t>
+                      </a:r>
+                    </a:p>
+                  </a:txBody>
+                  <a:tcPr marL="73152" marR="73152" marT="27432" marB="27432" anchor="ctr">
+                    <a:solidFill>
+                      <a:srgbClr val="FFEDD5"/>
+                    </a:solidFill>
+                  </a:tcPr>
+                </a:tc>
+              </a:tr>
+            </a:tbl>
+          </a:graphicData>
+        </a:graphic>
+      </p:graphicFrame>
+      <p:sp>
+        <p:nvSpPr>
+          <p:cNvPr id="51" name="Rounded Rectangle 50"/>
+          <p:cNvSpPr/>
+          <p:nvPr/>
+        </p:nvSpPr>
+        <p:spPr>
+          <a:xfrm>
+            <a:off x="7543800" y="3959352"/>
+            <a:ext cx="4069080" cy="1051560"/>
+          </a:xfrm>
+          <a:prstGeom prst="roundRect">
+            <a:avLst>
+              <a:gd name="adj" fmla="val 6956"/>
+            </a:avLst>
+          </a:prstGeom>
+          <a:solidFill>
+            <a:srgbClr val="F4F4F5"/>
+          </a:solidFill>
+          <a:ln>
+            <a:noFill/>
+          </a:ln>
+          <a:effectLst/>
+        </p:spPr>
+        <p:style>
+          <a:lnRef idx="1">
+            <a:schemeClr val="accent1"/>
+          </a:lnRef>
+          <a:fillRef idx="3">
+            <a:schemeClr val="accent1"/>
+          </a:fillRef>
+          <a:effectRef idx="2">
+            <a:schemeClr val="accent1"/>
+          </a:effectRef>
+          <a:fontRef idx="minor">
+            <a:schemeClr val="lt1"/>
+          </a:fontRef>
+        </p:style>
+        <p:txBody>
+          <a:bodyPr rtlCol="0" anchor="ctr"/>
+          <a:lstStyle/>
+          <a:p/>
+        </p:txBody>
+      </p:sp>
+      <p:sp>
+        <p:nvSpPr>
+          <p:cNvPr id="52" name="TextBox 51"/>
+          <p:cNvSpPr txBox="1"/>
+          <p:nvPr/>
+        </p:nvSpPr>
+        <p:spPr>
+          <a:xfrm>
+            <a:off x="7708392" y="4005072"/>
+            <a:ext cx="3749039" cy="960120"/>
+          </a:xfrm>
+          <a:prstGeom prst="rect">
+            <a:avLst/>
+          </a:prstGeom>
+          <a:noFill/>
+        </p:spPr>
+        <p:txBody>
+          <a:bodyPr wrap="square" anchor="ctr" lIns="0" rIns="0" tIns="0" bIns="0">
+            <a:spAutoFit/>
+          </a:bodyPr>
+          <a:lstStyle/>
+          <a:p>
+            <a:pPr algn="l">
+              <a:lnSpc>
+                <a:spcPct val="105000"/>
+              </a:lnSpc>
+              <a:spcAft>
+                <a:spcPts val="0"/>
+              </a:spcAft>
+            </a:pPr>
+            <a:r>
+              <a:rPr sz="950" b="1" i="0">
+                <a:solidFill>
+                  <a:srgbClr val="C2410C"/>
+                </a:solidFill>
+                <a:latin typeface="Arial"/>
+              </a:rPr>
+              <a:t>Кто обучал. </a:t>
+            </a:r>
+            <a:r>
+              <a:rPr sz="950" b="0" i="0">
+                <a:solidFill>
+                  <a:srgbClr val="27272A"/>
+                </a:solidFill>
+                <a:latin typeface="Arial"/>
+              </a:rPr>
+              <a:t>Авторы OCEAN-AI из СПб ФИЦ РАН. Веса FIV2 обучены на английских роликах First Impressions V2, веса MuPTA — на русском корпусе MuPTA. Я беру их как есть: английская речь — FIV2, русская — MuPTA.</a:t>
+            </a:r>
+          </a:p>
+        </p:txBody>
+      </p:sp>
+      <p:sp>
+        <p:nvSpPr>
+          <p:cNvPr id="53" name="Rounded Rectangle 52"/>
+          <p:cNvSpPr/>
+          <p:nvPr/>
+        </p:nvSpPr>
+        <p:spPr>
+          <a:xfrm>
+            <a:off x="7543800" y="5120640"/>
+            <a:ext cx="4069080" cy="1051560"/>
+          </a:xfrm>
+          <a:prstGeom prst="roundRect">
+            <a:avLst>
+              <a:gd name="adj" fmla="val 6956"/>
+            </a:avLst>
+          </a:prstGeom>
+          <a:solidFill>
+            <a:srgbClr val="F4F4F5"/>
+          </a:solidFill>
+          <a:ln>
+            <a:noFill/>
+          </a:ln>
+          <a:effectLst/>
+        </p:spPr>
+        <p:style>
+          <a:lnRef idx="1">
+            <a:schemeClr val="accent1"/>
+          </a:lnRef>
+          <a:fillRef idx="3">
+            <a:schemeClr val="accent1"/>
+          </a:fillRef>
+          <a:effectRef idx="2">
+            <a:schemeClr val="accent1"/>
+          </a:effectRef>
+          <a:fontRef idx="minor">
+            <a:schemeClr val="lt1"/>
+          </a:fontRef>
+        </p:style>
+        <p:txBody>
+          <a:bodyPr rtlCol="0" anchor="ctr"/>
+          <a:lstStyle/>
+          <a:p/>
+        </p:txBody>
+      </p:sp>
+      <p:sp>
+        <p:nvSpPr>
+          <p:cNvPr id="54" name="TextBox 53"/>
+          <p:cNvSpPr txBox="1"/>
+          <p:nvPr/>
+        </p:nvSpPr>
+        <p:spPr>
+          <a:xfrm>
+            <a:off x="7708392" y="5166359"/>
+            <a:ext cx="3749039" cy="960120"/>
+          </a:xfrm>
+          <a:prstGeom prst="rect">
+            <a:avLst/>
+          </a:prstGeom>
+          <a:noFill/>
+        </p:spPr>
+        <p:txBody>
+          <a:bodyPr wrap="square" anchor="ctr" lIns="0" rIns="0" tIns="0" bIns="0">
+            <a:spAutoFit/>
+          </a:bodyPr>
+          <a:lstStyle/>
+          <a:p>
+            <a:pPr algn="l">
+              <a:lnSpc>
+                <a:spcPct val="105000"/>
+              </a:lnSpc>
+              <a:spcAft>
+                <a:spcPts val="0"/>
+              </a:spcAft>
+            </a:pPr>
+            <a:r>
+              <a:rPr sz="950" b="1" i="0">
+                <a:solidFill>
+                  <a:srgbClr val="C2410C"/>
+                </a:solidFill>
+                <a:latin typeface="Arial"/>
+              </a:rPr>
+              <a:t>Почему среднее двух систем точнее. </a:t>
+            </a:r>
+            <a:r>
+              <a:rPr sz="950" b="0" i="0">
+                <a:solidFill>
+                  <a:srgbClr val="27272A"/>
+                </a:solidFill>
+                <a:latin typeface="Arial"/>
+              </a:rPr>
+              <a:t>OCEAN-AI видит движение мимики и точную геометрию лица, моя модель — общий облик лица и словесное описание поведения. Ошибки совпадают не полностью (корреляция 0.72–0.84), поэтому в среднем часть из них гасится.</a:t>
+            </a:r>
+          </a:p>
+        </p:txBody>
+      </p:sp>
+      <p:sp>
+        <p:nvSpPr>
+          <p:cNvPr id="55" name="TextBox 54"/>
           <p:cNvSpPr txBox="1"/>
           <p:nvPr/>
         </p:nvSpPr>
